--- a/Project slides.pptx
+++ b/Project slides.pptx
@@ -5,7 +5,7 @@
     <p:sldMasterId id="2147483648" r:id="rId4"/>
   </p:sldMasterIdLst>
   <p:notesMasterIdLst>
-    <p:notesMasterId r:id="rId27"/>
+    <p:notesMasterId r:id="rId28"/>
   </p:notesMasterIdLst>
   <p:sldIdLst>
     <p:sldId id="261" r:id="rId5"/>
@@ -21,15 +21,16 @@
     <p:sldId id="275" r:id="rId15"/>
     <p:sldId id="276" r:id="rId16"/>
     <p:sldId id="277" r:id="rId17"/>
-    <p:sldId id="279" r:id="rId18"/>
+    <p:sldId id="267" r:id="rId18"/>
     <p:sldId id="281" r:id="rId19"/>
-    <p:sldId id="267" r:id="rId20"/>
+    <p:sldId id="283" r:id="rId20"/>
     <p:sldId id="268" r:id="rId21"/>
     <p:sldId id="269" r:id="rId22"/>
     <p:sldId id="280" r:id="rId23"/>
     <p:sldId id="278" r:id="rId24"/>
-    <p:sldId id="260" r:id="rId25"/>
-    <p:sldId id="270" r:id="rId26"/>
+    <p:sldId id="282" r:id="rId25"/>
+    <p:sldId id="260" r:id="rId26"/>
+    <p:sldId id="270" r:id="rId27"/>
   </p:sldIdLst>
   <p:sldSz cx="9144000" cy="6858000" type="screen4x3"/>
   <p:notesSz cx="6858000" cy="9144000"/>
@@ -237,7 +238,7 @@
           <a:p>
             <a:fld id="{810B0250-5E95-4301-A834-CE72E4D9A9B1}" type="datetimeFigureOut">
               <a:rPr lang="it-IT" smtClean="0"/>
-              <a:t>08/06/2025</a:t>
+              <a:t>26/09/2025</a:t>
             </a:fld>
             <a:endParaRPr lang="it-IT"/>
           </a:p>
@@ -955,238 +956,6 @@
         <p:cNvPr id="1" name="">
           <a:extLst>
             <a:ext uri="{FF2B5EF4-FFF2-40B4-BE49-F238E27FC236}">
-              <a16:creationId xmlns:a16="http://schemas.microsoft.com/office/drawing/2014/main" id="{71BD6B07-5E42-24FF-EB96-A99EC5E1948C}"/>
-            </a:ext>
-          </a:extLst>
-        </p:cNvPr>
-        <p:cNvGrpSpPr/>
-        <p:nvPr/>
-      </p:nvGrpSpPr>
-      <p:grpSpPr>
-        <a:xfrm>
-          <a:off x="0" y="0"/>
-          <a:ext cx="0" cy="0"/>
-          <a:chOff x="0" y="0"/>
-          <a:chExt cx="0" cy="0"/>
-        </a:xfrm>
-      </p:grpSpPr>
-      <p:sp>
-        <p:nvSpPr>
-          <p:cNvPr id="2" name="Slide Image Placeholder 1">
-            <a:extLst>
-              <a:ext uri="{FF2B5EF4-FFF2-40B4-BE49-F238E27FC236}">
-                <a16:creationId xmlns:a16="http://schemas.microsoft.com/office/drawing/2014/main" id="{83EB36CA-3662-DEB5-825A-F9A35B9790A3}"/>
-              </a:ext>
-            </a:extLst>
-          </p:cNvPr>
-          <p:cNvSpPr>
-            <a:spLocks noGrp="1" noRot="1" noChangeAspect="1"/>
-          </p:cNvSpPr>
-          <p:nvPr>
-            <p:ph type="sldImg"/>
-          </p:nvPr>
-        </p:nvSpPr>
-        <p:spPr>
-          <a:xfrm>
-            <a:off x="1371600" y="1143000"/>
-            <a:ext cx="4114800" cy="3086100"/>
-          </a:xfrm>
-        </p:spPr>
-      </p:sp>
-      <p:sp>
-        <p:nvSpPr>
-          <p:cNvPr id="3" name="Notes Placeholder 2">
-            <a:extLst>
-              <a:ext uri="{FF2B5EF4-FFF2-40B4-BE49-F238E27FC236}">
-                <a16:creationId xmlns:a16="http://schemas.microsoft.com/office/drawing/2014/main" id="{A5B4EE7E-C6A9-BBDE-8848-F7EE37E131C7}"/>
-              </a:ext>
-            </a:extLst>
-          </p:cNvPr>
-          <p:cNvSpPr>
-            <a:spLocks noGrp="1"/>
-          </p:cNvSpPr>
-          <p:nvPr>
-            <p:ph type="body" idx="1"/>
-          </p:nvPr>
-        </p:nvSpPr>
-        <p:spPr/>
-        <p:txBody>
-          <a:bodyPr/>
-          <a:lstStyle/>
-          <a:p>
-            <a:endParaRPr lang="it-IT"/>
-          </a:p>
-          <a:p>
-            <a:endParaRPr lang="en-US"/>
-          </a:p>
-        </p:txBody>
-      </p:sp>
-      <p:sp>
-        <p:nvSpPr>
-          <p:cNvPr id="4" name="Slide Number Placeholder 3">
-            <a:extLst>
-              <a:ext uri="{FF2B5EF4-FFF2-40B4-BE49-F238E27FC236}">
-                <a16:creationId xmlns:a16="http://schemas.microsoft.com/office/drawing/2014/main" id="{2D4570AF-65C3-3A76-5D31-3C9D5158EBEA}"/>
-              </a:ext>
-            </a:extLst>
-          </p:cNvPr>
-          <p:cNvSpPr>
-            <a:spLocks noGrp="1"/>
-          </p:cNvSpPr>
-          <p:nvPr>
-            <p:ph type="sldNum" sz="quarter" idx="5"/>
-          </p:nvPr>
-        </p:nvSpPr>
-        <p:spPr/>
-        <p:txBody>
-          <a:bodyPr/>
-          <a:lstStyle/>
-          <a:p>
-            <a:fld id="{B4614DB0-6389-4E60-A9E8-38662DC90D27}" type="slidenum">
-              <a:rPr lang="it-IT" smtClean="0"/>
-              <a:t>14</a:t>
-            </a:fld>
-            <a:endParaRPr lang="it-IT"/>
-          </a:p>
-        </p:txBody>
-      </p:sp>
-    </p:spTree>
-    <p:extLst>
-      <p:ext uri="{BB962C8B-B14F-4D97-AF65-F5344CB8AC3E}">
-        <p14:creationId xmlns:p14="http://schemas.microsoft.com/office/powerpoint/2010/main" val="64054441"/>
-      </p:ext>
-    </p:extLst>
-  </p:cSld>
-  <p:clrMapOvr>
-    <a:masterClrMapping/>
-  </p:clrMapOvr>
-</p:notes>
-</file>
-
-<file path=ppt/notesSlides/notesSlide14.xml><?xml version="1.0" encoding="utf-8"?>
-<p:notes xmlns:a="http://schemas.openxmlformats.org/drawingml/2006/main" xmlns:r="http://schemas.openxmlformats.org/officeDocument/2006/relationships" xmlns:p="http://schemas.openxmlformats.org/presentationml/2006/main">
-  <p:cSld>
-    <p:spTree>
-      <p:nvGrpSpPr>
-        <p:cNvPr id="1" name="">
-          <a:extLst>
-            <a:ext uri="{FF2B5EF4-FFF2-40B4-BE49-F238E27FC236}">
-              <a16:creationId xmlns:a16="http://schemas.microsoft.com/office/drawing/2014/main" id="{736DD853-D98A-B3DD-D4A9-0DC5A9C0F8D1}"/>
-            </a:ext>
-          </a:extLst>
-        </p:cNvPr>
-        <p:cNvGrpSpPr/>
-        <p:nvPr/>
-      </p:nvGrpSpPr>
-      <p:grpSpPr>
-        <a:xfrm>
-          <a:off x="0" y="0"/>
-          <a:ext cx="0" cy="0"/>
-          <a:chOff x="0" y="0"/>
-          <a:chExt cx="0" cy="0"/>
-        </a:xfrm>
-      </p:grpSpPr>
-      <p:sp>
-        <p:nvSpPr>
-          <p:cNvPr id="2" name="Slide Image Placeholder 1">
-            <a:extLst>
-              <a:ext uri="{FF2B5EF4-FFF2-40B4-BE49-F238E27FC236}">
-                <a16:creationId xmlns:a16="http://schemas.microsoft.com/office/drawing/2014/main" id="{EDF4F4DF-C1E3-A10A-F201-D84256252E13}"/>
-              </a:ext>
-            </a:extLst>
-          </p:cNvPr>
-          <p:cNvSpPr>
-            <a:spLocks noGrp="1" noRot="1" noChangeAspect="1"/>
-          </p:cNvSpPr>
-          <p:nvPr>
-            <p:ph type="sldImg"/>
-          </p:nvPr>
-        </p:nvSpPr>
-        <p:spPr>
-          <a:xfrm>
-            <a:off x="1371600" y="1143000"/>
-            <a:ext cx="4114800" cy="3086100"/>
-          </a:xfrm>
-        </p:spPr>
-      </p:sp>
-      <p:sp>
-        <p:nvSpPr>
-          <p:cNvPr id="3" name="Notes Placeholder 2">
-            <a:extLst>
-              <a:ext uri="{FF2B5EF4-FFF2-40B4-BE49-F238E27FC236}">
-                <a16:creationId xmlns:a16="http://schemas.microsoft.com/office/drawing/2014/main" id="{0E04D3D6-161C-1A41-91DA-27E253D200DD}"/>
-              </a:ext>
-            </a:extLst>
-          </p:cNvPr>
-          <p:cNvSpPr>
-            <a:spLocks noGrp="1"/>
-          </p:cNvSpPr>
-          <p:nvPr>
-            <p:ph type="body" idx="1"/>
-          </p:nvPr>
-        </p:nvSpPr>
-        <p:spPr/>
-        <p:txBody>
-          <a:bodyPr/>
-          <a:lstStyle/>
-          <a:p>
-            <a:endParaRPr lang="it-IT"/>
-          </a:p>
-          <a:p>
-            <a:endParaRPr lang="en-US"/>
-          </a:p>
-        </p:txBody>
-      </p:sp>
-      <p:sp>
-        <p:nvSpPr>
-          <p:cNvPr id="4" name="Slide Number Placeholder 3">
-            <a:extLst>
-              <a:ext uri="{FF2B5EF4-FFF2-40B4-BE49-F238E27FC236}">
-                <a16:creationId xmlns:a16="http://schemas.microsoft.com/office/drawing/2014/main" id="{7F1810CB-0E52-D785-662F-B53FDF3F14C8}"/>
-              </a:ext>
-            </a:extLst>
-          </p:cNvPr>
-          <p:cNvSpPr>
-            <a:spLocks noGrp="1"/>
-          </p:cNvSpPr>
-          <p:nvPr>
-            <p:ph type="sldNum" sz="quarter" idx="5"/>
-          </p:nvPr>
-        </p:nvSpPr>
-        <p:spPr/>
-        <p:txBody>
-          <a:bodyPr/>
-          <a:lstStyle/>
-          <a:p>
-            <a:fld id="{B4614DB0-6389-4E60-A9E8-38662DC90D27}" type="slidenum">
-              <a:rPr lang="it-IT" smtClean="0"/>
-              <a:t>15</a:t>
-            </a:fld>
-            <a:endParaRPr lang="it-IT"/>
-          </a:p>
-        </p:txBody>
-      </p:sp>
-    </p:spTree>
-    <p:extLst>
-      <p:ext uri="{BB962C8B-B14F-4D97-AF65-F5344CB8AC3E}">
-        <p14:creationId xmlns:p14="http://schemas.microsoft.com/office/powerpoint/2010/main" val="1399388116"/>
-      </p:ext>
-    </p:extLst>
-  </p:cSld>
-  <p:clrMapOvr>
-    <a:masterClrMapping/>
-  </p:clrMapOvr>
-</p:notes>
-</file>
-
-<file path=ppt/notesSlides/notesSlide15.xml><?xml version="1.0" encoding="utf-8"?>
-<p:notes xmlns:a="http://schemas.openxmlformats.org/drawingml/2006/main" xmlns:r="http://schemas.openxmlformats.org/officeDocument/2006/relationships" xmlns:p="http://schemas.openxmlformats.org/presentationml/2006/main">
-  <p:cSld>
-    <p:spTree>
-      <p:nvGrpSpPr>
-        <p:cNvPr id="1" name="">
-          <a:extLst>
-            <a:ext uri="{FF2B5EF4-FFF2-40B4-BE49-F238E27FC236}">
               <a16:creationId xmlns:a16="http://schemas.microsoft.com/office/drawing/2014/main" id="{6D88979A-E120-2B94-1FBC-212277769996}"/>
             </a:ext>
           </a:extLst>
@@ -1279,7 +1048,7 @@
           <a:p>
             <a:fld id="{B4614DB0-6389-4E60-A9E8-38662DC90D27}" type="slidenum">
               <a:rPr lang="it-IT" smtClean="0"/>
-              <a:t>16</a:t>
+              <a:t>14</a:t>
             </a:fld>
             <a:endParaRPr lang="it-IT"/>
           </a:p>
@@ -1289,6 +1058,238 @@
     <p:extLst>
       <p:ext uri="{BB962C8B-B14F-4D97-AF65-F5344CB8AC3E}">
         <p14:creationId xmlns:p14="http://schemas.microsoft.com/office/powerpoint/2010/main" val="1785655692"/>
+      </p:ext>
+    </p:extLst>
+  </p:cSld>
+  <p:clrMapOvr>
+    <a:masterClrMapping/>
+  </p:clrMapOvr>
+</p:notes>
+</file>
+
+<file path=ppt/notesSlides/notesSlide14.xml><?xml version="1.0" encoding="utf-8"?>
+<p:notes xmlns:a="http://schemas.openxmlformats.org/drawingml/2006/main" xmlns:r="http://schemas.openxmlformats.org/officeDocument/2006/relationships" xmlns:p="http://schemas.openxmlformats.org/presentationml/2006/main">
+  <p:cSld>
+    <p:spTree>
+      <p:nvGrpSpPr>
+        <p:cNvPr id="1" name="">
+          <a:extLst>
+            <a:ext uri="{FF2B5EF4-FFF2-40B4-BE49-F238E27FC236}">
+              <a16:creationId xmlns:a16="http://schemas.microsoft.com/office/drawing/2014/main" id="{72897284-22F1-1476-BB1B-8704D445FA25}"/>
+            </a:ext>
+          </a:extLst>
+        </p:cNvPr>
+        <p:cNvGrpSpPr/>
+        <p:nvPr/>
+      </p:nvGrpSpPr>
+      <p:grpSpPr>
+        <a:xfrm>
+          <a:off x="0" y="0"/>
+          <a:ext cx="0" cy="0"/>
+          <a:chOff x="0" y="0"/>
+          <a:chExt cx="0" cy="0"/>
+        </a:xfrm>
+      </p:grpSpPr>
+      <p:sp>
+        <p:nvSpPr>
+          <p:cNvPr id="2" name="Slide Image Placeholder 1">
+            <a:extLst>
+              <a:ext uri="{FF2B5EF4-FFF2-40B4-BE49-F238E27FC236}">
+                <a16:creationId xmlns:a16="http://schemas.microsoft.com/office/drawing/2014/main" id="{A5854227-E42A-42D3-67B6-1281E1E833F6}"/>
+              </a:ext>
+            </a:extLst>
+          </p:cNvPr>
+          <p:cNvSpPr>
+            <a:spLocks noGrp="1" noRot="1" noChangeAspect="1"/>
+          </p:cNvSpPr>
+          <p:nvPr>
+            <p:ph type="sldImg"/>
+          </p:nvPr>
+        </p:nvSpPr>
+        <p:spPr>
+          <a:xfrm>
+            <a:off x="1371600" y="1143000"/>
+            <a:ext cx="4114800" cy="3086100"/>
+          </a:xfrm>
+        </p:spPr>
+      </p:sp>
+      <p:sp>
+        <p:nvSpPr>
+          <p:cNvPr id="3" name="Notes Placeholder 2">
+            <a:extLst>
+              <a:ext uri="{FF2B5EF4-FFF2-40B4-BE49-F238E27FC236}">
+                <a16:creationId xmlns:a16="http://schemas.microsoft.com/office/drawing/2014/main" id="{27FD267C-3BB0-94A0-F8F5-40621B8D7ACC}"/>
+              </a:ext>
+            </a:extLst>
+          </p:cNvPr>
+          <p:cNvSpPr>
+            <a:spLocks noGrp="1"/>
+          </p:cNvSpPr>
+          <p:nvPr>
+            <p:ph type="body" idx="1"/>
+          </p:nvPr>
+        </p:nvSpPr>
+        <p:spPr/>
+        <p:txBody>
+          <a:bodyPr/>
+          <a:lstStyle/>
+          <a:p>
+            <a:endParaRPr lang="it-IT"/>
+          </a:p>
+          <a:p>
+            <a:endParaRPr lang="en-US"/>
+          </a:p>
+        </p:txBody>
+      </p:sp>
+      <p:sp>
+        <p:nvSpPr>
+          <p:cNvPr id="4" name="Slide Number Placeholder 3">
+            <a:extLst>
+              <a:ext uri="{FF2B5EF4-FFF2-40B4-BE49-F238E27FC236}">
+                <a16:creationId xmlns:a16="http://schemas.microsoft.com/office/drawing/2014/main" id="{38459163-3E89-AD98-3D10-E7F0BD22E1A9}"/>
+              </a:ext>
+            </a:extLst>
+          </p:cNvPr>
+          <p:cNvSpPr>
+            <a:spLocks noGrp="1"/>
+          </p:cNvSpPr>
+          <p:nvPr>
+            <p:ph type="sldNum" sz="quarter" idx="5"/>
+          </p:nvPr>
+        </p:nvSpPr>
+        <p:spPr/>
+        <p:txBody>
+          <a:bodyPr/>
+          <a:lstStyle/>
+          <a:p>
+            <a:fld id="{B4614DB0-6389-4E60-A9E8-38662DC90D27}" type="slidenum">
+              <a:rPr lang="it-IT" smtClean="0"/>
+              <a:t>15</a:t>
+            </a:fld>
+            <a:endParaRPr lang="it-IT"/>
+          </a:p>
+        </p:txBody>
+      </p:sp>
+    </p:spTree>
+    <p:extLst>
+      <p:ext uri="{BB962C8B-B14F-4D97-AF65-F5344CB8AC3E}">
+        <p14:creationId xmlns:p14="http://schemas.microsoft.com/office/powerpoint/2010/main" val="371740751"/>
+      </p:ext>
+    </p:extLst>
+  </p:cSld>
+  <p:clrMapOvr>
+    <a:masterClrMapping/>
+  </p:clrMapOvr>
+</p:notes>
+</file>
+
+<file path=ppt/notesSlides/notesSlide15.xml><?xml version="1.0" encoding="utf-8"?>
+<p:notes xmlns:a="http://schemas.openxmlformats.org/drawingml/2006/main" xmlns:r="http://schemas.openxmlformats.org/officeDocument/2006/relationships" xmlns:p="http://schemas.openxmlformats.org/presentationml/2006/main">
+  <p:cSld>
+    <p:spTree>
+      <p:nvGrpSpPr>
+        <p:cNvPr id="1" name="">
+          <a:extLst>
+            <a:ext uri="{FF2B5EF4-FFF2-40B4-BE49-F238E27FC236}">
+              <a16:creationId xmlns:a16="http://schemas.microsoft.com/office/drawing/2014/main" id="{FA08DF94-F2C1-90CE-61AB-02BE63F34DAF}"/>
+            </a:ext>
+          </a:extLst>
+        </p:cNvPr>
+        <p:cNvGrpSpPr/>
+        <p:nvPr/>
+      </p:nvGrpSpPr>
+      <p:grpSpPr>
+        <a:xfrm>
+          <a:off x="0" y="0"/>
+          <a:ext cx="0" cy="0"/>
+          <a:chOff x="0" y="0"/>
+          <a:chExt cx="0" cy="0"/>
+        </a:xfrm>
+      </p:grpSpPr>
+      <p:sp>
+        <p:nvSpPr>
+          <p:cNvPr id="2" name="Slide Image Placeholder 1">
+            <a:extLst>
+              <a:ext uri="{FF2B5EF4-FFF2-40B4-BE49-F238E27FC236}">
+                <a16:creationId xmlns:a16="http://schemas.microsoft.com/office/drawing/2014/main" id="{A4E250A1-840F-A4E0-C86D-8091E5E772D4}"/>
+              </a:ext>
+            </a:extLst>
+          </p:cNvPr>
+          <p:cNvSpPr>
+            <a:spLocks noGrp="1" noRot="1" noChangeAspect="1"/>
+          </p:cNvSpPr>
+          <p:nvPr>
+            <p:ph type="sldImg"/>
+          </p:nvPr>
+        </p:nvSpPr>
+        <p:spPr>
+          <a:xfrm>
+            <a:off x="1371600" y="1143000"/>
+            <a:ext cx="4114800" cy="3086100"/>
+          </a:xfrm>
+        </p:spPr>
+      </p:sp>
+      <p:sp>
+        <p:nvSpPr>
+          <p:cNvPr id="3" name="Notes Placeholder 2">
+            <a:extLst>
+              <a:ext uri="{FF2B5EF4-FFF2-40B4-BE49-F238E27FC236}">
+                <a16:creationId xmlns:a16="http://schemas.microsoft.com/office/drawing/2014/main" id="{9875B853-4A7F-1E5A-BB33-16964AB0D34B}"/>
+              </a:ext>
+            </a:extLst>
+          </p:cNvPr>
+          <p:cNvSpPr>
+            <a:spLocks noGrp="1"/>
+          </p:cNvSpPr>
+          <p:nvPr>
+            <p:ph type="body" idx="1"/>
+          </p:nvPr>
+        </p:nvSpPr>
+        <p:spPr/>
+        <p:txBody>
+          <a:bodyPr/>
+          <a:lstStyle/>
+          <a:p>
+            <a:endParaRPr lang="it-IT"/>
+          </a:p>
+          <a:p>
+            <a:endParaRPr lang="en-US"/>
+          </a:p>
+        </p:txBody>
+      </p:sp>
+      <p:sp>
+        <p:nvSpPr>
+          <p:cNvPr id="4" name="Slide Number Placeholder 3">
+            <a:extLst>
+              <a:ext uri="{FF2B5EF4-FFF2-40B4-BE49-F238E27FC236}">
+                <a16:creationId xmlns:a16="http://schemas.microsoft.com/office/drawing/2014/main" id="{C3535B51-79D9-F938-CF29-E1043E8F5E42}"/>
+              </a:ext>
+            </a:extLst>
+          </p:cNvPr>
+          <p:cNvSpPr>
+            <a:spLocks noGrp="1"/>
+          </p:cNvSpPr>
+          <p:nvPr>
+            <p:ph type="sldNum" sz="quarter" idx="5"/>
+          </p:nvPr>
+        </p:nvSpPr>
+        <p:spPr/>
+        <p:txBody>
+          <a:bodyPr/>
+          <a:lstStyle/>
+          <a:p>
+            <a:fld id="{B4614DB0-6389-4E60-A9E8-38662DC90D27}" type="slidenum">
+              <a:rPr lang="it-IT" smtClean="0"/>
+              <a:t>16</a:t>
+            </a:fld>
+            <a:endParaRPr lang="it-IT"/>
+          </a:p>
+        </p:txBody>
+      </p:sp>
+    </p:spTree>
+    <p:extLst>
+      <p:ext uri="{BB962C8B-B14F-4D97-AF65-F5344CB8AC3E}">
+        <p14:creationId xmlns:p14="http://schemas.microsoft.com/office/powerpoint/2010/main" val="2874602027"/>
       </p:ext>
     </p:extLst>
   </p:cSld>
@@ -1881,6 +1882,122 @@
     <p:extLst>
       <p:ext uri="{BB962C8B-B14F-4D97-AF65-F5344CB8AC3E}">
         <p14:creationId xmlns:p14="http://schemas.microsoft.com/office/powerpoint/2010/main" val="3388805428"/>
+      </p:ext>
+    </p:extLst>
+  </p:cSld>
+  <p:clrMapOvr>
+    <a:masterClrMapping/>
+  </p:clrMapOvr>
+</p:notes>
+</file>
+
+<file path=ppt/notesSlides/notesSlide20.xml><?xml version="1.0" encoding="utf-8"?>
+<p:notes xmlns:a="http://schemas.openxmlformats.org/drawingml/2006/main" xmlns:r="http://schemas.openxmlformats.org/officeDocument/2006/relationships" xmlns:p="http://schemas.openxmlformats.org/presentationml/2006/main">
+  <p:cSld>
+    <p:spTree>
+      <p:nvGrpSpPr>
+        <p:cNvPr id="1" name="">
+          <a:extLst>
+            <a:ext uri="{FF2B5EF4-FFF2-40B4-BE49-F238E27FC236}">
+              <a16:creationId xmlns:a16="http://schemas.microsoft.com/office/drawing/2014/main" id="{57C2DB2D-8D4A-3345-6DDB-9C0154885640}"/>
+            </a:ext>
+          </a:extLst>
+        </p:cNvPr>
+        <p:cNvGrpSpPr/>
+        <p:nvPr/>
+      </p:nvGrpSpPr>
+      <p:grpSpPr>
+        <a:xfrm>
+          <a:off x="0" y="0"/>
+          <a:ext cx="0" cy="0"/>
+          <a:chOff x="0" y="0"/>
+          <a:chExt cx="0" cy="0"/>
+        </a:xfrm>
+      </p:grpSpPr>
+      <p:sp>
+        <p:nvSpPr>
+          <p:cNvPr id="2" name="Slide Image Placeholder 1">
+            <a:extLst>
+              <a:ext uri="{FF2B5EF4-FFF2-40B4-BE49-F238E27FC236}">
+                <a16:creationId xmlns:a16="http://schemas.microsoft.com/office/drawing/2014/main" id="{28F2AA72-BBAB-C6E4-2DC6-F552188C32D5}"/>
+              </a:ext>
+            </a:extLst>
+          </p:cNvPr>
+          <p:cNvSpPr>
+            <a:spLocks noGrp="1" noRot="1" noChangeAspect="1"/>
+          </p:cNvSpPr>
+          <p:nvPr>
+            <p:ph type="sldImg"/>
+          </p:nvPr>
+        </p:nvSpPr>
+        <p:spPr>
+          <a:xfrm>
+            <a:off x="1371600" y="1143000"/>
+            <a:ext cx="4114800" cy="3086100"/>
+          </a:xfrm>
+        </p:spPr>
+      </p:sp>
+      <p:sp>
+        <p:nvSpPr>
+          <p:cNvPr id="3" name="Notes Placeholder 2">
+            <a:extLst>
+              <a:ext uri="{FF2B5EF4-FFF2-40B4-BE49-F238E27FC236}">
+                <a16:creationId xmlns:a16="http://schemas.microsoft.com/office/drawing/2014/main" id="{A7700A7B-B737-F324-94DE-D08A2FFB9F15}"/>
+              </a:ext>
+            </a:extLst>
+          </p:cNvPr>
+          <p:cNvSpPr>
+            <a:spLocks noGrp="1"/>
+          </p:cNvSpPr>
+          <p:nvPr>
+            <p:ph type="body" idx="1"/>
+          </p:nvPr>
+        </p:nvSpPr>
+        <p:spPr/>
+        <p:txBody>
+          <a:bodyPr/>
+          <a:lstStyle/>
+          <a:p>
+            <a:endParaRPr lang="it-IT"/>
+          </a:p>
+          <a:p>
+            <a:endParaRPr lang="en-US"/>
+          </a:p>
+        </p:txBody>
+      </p:sp>
+      <p:sp>
+        <p:nvSpPr>
+          <p:cNvPr id="4" name="Slide Number Placeholder 3">
+            <a:extLst>
+              <a:ext uri="{FF2B5EF4-FFF2-40B4-BE49-F238E27FC236}">
+                <a16:creationId xmlns:a16="http://schemas.microsoft.com/office/drawing/2014/main" id="{0BDC84DC-4E7D-43F9-F375-C0B72AA10943}"/>
+              </a:ext>
+            </a:extLst>
+          </p:cNvPr>
+          <p:cNvSpPr>
+            <a:spLocks noGrp="1"/>
+          </p:cNvSpPr>
+          <p:nvPr>
+            <p:ph type="sldNum" sz="quarter" idx="5"/>
+          </p:nvPr>
+        </p:nvSpPr>
+        <p:spPr/>
+        <p:txBody>
+          <a:bodyPr/>
+          <a:lstStyle/>
+          <a:p>
+            <a:fld id="{B4614DB0-6389-4E60-A9E8-38662DC90D27}" type="slidenum">
+              <a:rPr lang="it-IT" smtClean="0"/>
+              <a:t>21</a:t>
+            </a:fld>
+            <a:endParaRPr lang="it-IT"/>
+          </a:p>
+        </p:txBody>
+      </p:sp>
+    </p:spTree>
+    <p:extLst>
+      <p:ext uri="{BB962C8B-B14F-4D97-AF65-F5344CB8AC3E}">
+        <p14:creationId xmlns:p14="http://schemas.microsoft.com/office/powerpoint/2010/main" val="1930940895"/>
       </p:ext>
     </p:extLst>
   </p:cSld>
@@ -2893,7 +3010,7 @@
           <a:p>
             <a:fld id="{8DF5B5D2-CA2A-6548-955E-9897154AE4E2}" type="datetimeFigureOut">
               <a:rPr lang="it-IT" smtClean="0"/>
-              <a:t>08/06/2025</a:t>
+              <a:t>26/09/2025</a:t>
             </a:fld>
             <a:endParaRPr lang="it-IT"/>
           </a:p>
@@ -3061,7 +3178,7 @@
           <a:p>
             <a:fld id="{8DF5B5D2-CA2A-6548-955E-9897154AE4E2}" type="datetimeFigureOut">
               <a:rPr lang="it-IT" smtClean="0"/>
-              <a:t>08/06/2025</a:t>
+              <a:t>26/09/2025</a:t>
             </a:fld>
             <a:endParaRPr lang="it-IT"/>
           </a:p>
@@ -3239,7 +3356,7 @@
           <a:p>
             <a:fld id="{8DF5B5D2-CA2A-6548-955E-9897154AE4E2}" type="datetimeFigureOut">
               <a:rPr lang="it-IT" smtClean="0"/>
-              <a:t>08/06/2025</a:t>
+              <a:t>26/09/2025</a:t>
             </a:fld>
             <a:endParaRPr lang="it-IT"/>
           </a:p>
@@ -3407,7 +3524,7 @@
           <a:p>
             <a:fld id="{8DF5B5D2-CA2A-6548-955E-9897154AE4E2}" type="datetimeFigureOut">
               <a:rPr lang="it-IT" smtClean="0"/>
-              <a:t>08/06/2025</a:t>
+              <a:t>26/09/2025</a:t>
             </a:fld>
             <a:endParaRPr lang="it-IT"/>
           </a:p>
@@ -3652,7 +3769,7 @@
           <a:p>
             <a:fld id="{8DF5B5D2-CA2A-6548-955E-9897154AE4E2}" type="datetimeFigureOut">
               <a:rPr lang="it-IT" smtClean="0"/>
-              <a:t>08/06/2025</a:t>
+              <a:t>26/09/2025</a:t>
             </a:fld>
             <a:endParaRPr lang="it-IT"/>
           </a:p>
@@ -3937,7 +4054,7 @@
           <a:p>
             <a:fld id="{8DF5B5D2-CA2A-6548-955E-9897154AE4E2}" type="datetimeFigureOut">
               <a:rPr lang="it-IT" smtClean="0"/>
-              <a:t>08/06/2025</a:t>
+              <a:t>26/09/2025</a:t>
             </a:fld>
             <a:endParaRPr lang="it-IT"/>
           </a:p>
@@ -4356,7 +4473,7 @@
           <a:p>
             <a:fld id="{8DF5B5D2-CA2A-6548-955E-9897154AE4E2}" type="datetimeFigureOut">
               <a:rPr lang="it-IT" smtClean="0"/>
-              <a:t>08/06/2025</a:t>
+              <a:t>26/09/2025</a:t>
             </a:fld>
             <a:endParaRPr lang="it-IT"/>
           </a:p>
@@ -4473,7 +4590,7 @@
           <a:p>
             <a:fld id="{8DF5B5D2-CA2A-6548-955E-9897154AE4E2}" type="datetimeFigureOut">
               <a:rPr lang="it-IT" smtClean="0"/>
-              <a:t>08/06/2025</a:t>
+              <a:t>26/09/2025</a:t>
             </a:fld>
             <a:endParaRPr lang="it-IT"/>
           </a:p>
@@ -4568,7 +4685,7 @@
           <a:p>
             <a:fld id="{8DF5B5D2-CA2A-6548-955E-9897154AE4E2}" type="datetimeFigureOut">
               <a:rPr lang="it-IT" smtClean="0"/>
-              <a:t>08/06/2025</a:t>
+              <a:t>26/09/2025</a:t>
             </a:fld>
             <a:endParaRPr lang="it-IT"/>
           </a:p>
@@ -4843,7 +4960,7 @@
           <a:p>
             <a:fld id="{8DF5B5D2-CA2A-6548-955E-9897154AE4E2}" type="datetimeFigureOut">
               <a:rPr lang="it-IT" smtClean="0"/>
-              <a:t>08/06/2025</a:t>
+              <a:t>26/09/2025</a:t>
             </a:fld>
             <a:endParaRPr lang="it-IT"/>
           </a:p>
@@ -5095,7 +5212,7 @@
           <a:p>
             <a:fld id="{8DF5B5D2-CA2A-6548-955E-9897154AE4E2}" type="datetimeFigureOut">
               <a:rPr lang="it-IT" smtClean="0"/>
-              <a:t>08/06/2025</a:t>
+              <a:t>26/09/2025</a:t>
             </a:fld>
             <a:endParaRPr lang="it-IT"/>
           </a:p>
@@ -5306,7 +5423,7 @@
           <a:p>
             <a:fld id="{8DF5B5D2-CA2A-6548-955E-9897154AE4E2}" type="datetimeFigureOut">
               <a:rPr lang="it-IT" smtClean="0"/>
-              <a:t>08/06/2025</a:t>
+              <a:t>26/09/2025</a:t>
             </a:fld>
             <a:endParaRPr lang="it-IT"/>
           </a:p>
@@ -7005,7 +7122,7 @@
         <p:spPr>
           <a:xfrm>
             <a:off x="5943600" y="4450083"/>
-            <a:ext cx="2907792" cy="830997"/>
+            <a:ext cx="2907792" cy="1323439"/>
           </a:xfrm>
           <a:prstGeom prst="rect">
             <a:avLst/>
@@ -7026,11 +7143,38 @@
               <a:buChar char="•"/>
             </a:pPr>
             <a:r>
-              <a:rPr lang="en-US" sz="1600">
+              <a:rPr lang="en-US" sz="1600" dirty="0">
                 <a:latin typeface="Arial"/>
                 <a:cs typeface="Arial"/>
               </a:rPr>
               <a:t>After detecting hard-spots points, we performed a 3x3 max filtering </a:t>
+            </a:r>
+          </a:p>
+          <a:p>
+            <a:pPr marL="285744" indent="-285744">
+              <a:buFont typeface="Arial"/>
+              <a:buChar char="•"/>
+            </a:pPr>
+            <a:r>
+              <a:rPr lang="en-US" sz="1600" dirty="0">
+                <a:latin typeface="Arial"/>
+                <a:cs typeface="Arial"/>
+              </a:rPr>
+              <a:t>Final </a:t>
+            </a:r>
+            <a:r>
+              <a:rPr lang="en-US" sz="1600" b="1" dirty="0">
+                <a:latin typeface="Arial"/>
+                <a:cs typeface="Arial"/>
+              </a:rPr>
+              <a:t>FOV</a:t>
+            </a:r>
+            <a:r>
+              <a:rPr lang="en-US" sz="1600" dirty="0">
+                <a:latin typeface="Arial"/>
+                <a:cs typeface="Arial"/>
+              </a:rPr>
+              <a:t> of our approach: 5x5</a:t>
             </a:r>
           </a:p>
         </p:txBody>
@@ -10119,7 +10263,781 @@
         <p:cNvPr id="1" name="">
           <a:extLst>
             <a:ext uri="{FF2B5EF4-FFF2-40B4-BE49-F238E27FC236}">
-              <a16:creationId xmlns:a16="http://schemas.microsoft.com/office/drawing/2014/main" id="{67875C35-5970-3DD2-8CB2-BFD0D66B0288}"/>
+              <a16:creationId xmlns:a16="http://schemas.microsoft.com/office/drawing/2014/main" id="{A9D81833-7E5D-EEB0-FA81-60644B548C45}"/>
+            </a:ext>
+          </a:extLst>
+        </p:cNvPr>
+        <p:cNvGrpSpPr/>
+        <p:nvPr/>
+      </p:nvGrpSpPr>
+      <p:grpSpPr>
+        <a:xfrm>
+          <a:off x="0" y="0"/>
+          <a:ext cx="0" cy="0"/>
+          <a:chOff x="0" y="0"/>
+          <a:chExt cx="0" cy="0"/>
+        </a:xfrm>
+      </p:grpSpPr>
+      <p:pic>
+        <p:nvPicPr>
+          <p:cNvPr id="38" name="Immagine 37" descr="Immagine che contiene testo, schermata, diagramma, numero&#10;&#10;Il contenuto generato dall'IA potrebbe non essere corretto.">
+            <a:extLst>
+              <a:ext uri="{FF2B5EF4-FFF2-40B4-BE49-F238E27FC236}">
+                <a16:creationId xmlns:a16="http://schemas.microsoft.com/office/drawing/2014/main" id="{3B2E6781-08DF-588F-F409-C300D955C6EC}"/>
+              </a:ext>
+            </a:extLst>
+          </p:cNvPr>
+          <p:cNvPicPr>
+            <a:picLocks noChangeAspect="1"/>
+          </p:cNvPicPr>
+          <p:nvPr/>
+        </p:nvPicPr>
+        <p:blipFill>
+          <a:blip r:embed="rId3"/>
+          <a:stretch>
+            <a:fillRect/>
+          </a:stretch>
+        </p:blipFill>
+        <p:spPr>
+          <a:xfrm>
+            <a:off x="4245460" y="3241969"/>
+            <a:ext cx="197443" cy="86632"/>
+          </a:xfrm>
+          <a:prstGeom prst="rect">
+            <a:avLst/>
+          </a:prstGeom>
+        </p:spPr>
+      </p:pic>
+      <p:sp>
+        <p:nvSpPr>
+          <p:cNvPr id="6" name="Parallelogramma 5">
+            <a:extLst>
+              <a:ext uri="{FF2B5EF4-FFF2-40B4-BE49-F238E27FC236}">
+                <a16:creationId xmlns:a16="http://schemas.microsoft.com/office/drawing/2014/main" id="{7526B841-A049-BF67-43A3-D4ADB829F23A}"/>
+              </a:ext>
+            </a:extLst>
+          </p:cNvPr>
+          <p:cNvSpPr/>
+          <p:nvPr/>
+        </p:nvSpPr>
+        <p:spPr>
+          <a:xfrm>
+            <a:off x="-238531" y="6376664"/>
+            <a:ext cx="8472199" cy="481339"/>
+          </a:xfrm>
+          <a:prstGeom prst="parallelogram">
+            <a:avLst/>
+          </a:prstGeom>
+          <a:solidFill>
+            <a:srgbClr val="0F406B"/>
+          </a:solidFill>
+          <a:ln>
+            <a:noFill/>
+          </a:ln>
+        </p:spPr>
+        <p:style>
+          <a:lnRef idx="1">
+            <a:schemeClr val="accent1"/>
+          </a:lnRef>
+          <a:fillRef idx="3">
+            <a:schemeClr val="accent1"/>
+          </a:fillRef>
+          <a:effectRef idx="2">
+            <a:schemeClr val="accent1"/>
+          </a:effectRef>
+          <a:fontRef idx="minor">
+            <a:schemeClr val="lt1"/>
+          </a:fontRef>
+        </p:style>
+        <p:txBody>
+          <a:bodyPr rtlCol="0" anchor="ctr"/>
+          <a:lstStyle/>
+          <a:p>
+            <a:pPr algn="ctr"/>
+            <a:endParaRPr lang="it-IT">
+              <a:solidFill>
+                <a:srgbClr val="0F406B"/>
+              </a:solidFill>
+            </a:endParaRPr>
+          </a:p>
+        </p:txBody>
+      </p:sp>
+      <p:pic>
+        <p:nvPicPr>
+          <p:cNvPr id="7" name="Immagine 6" descr="cherubino_pant541.eps">
+            <a:extLst>
+              <a:ext uri="{FF2B5EF4-FFF2-40B4-BE49-F238E27FC236}">
+                <a16:creationId xmlns:a16="http://schemas.microsoft.com/office/drawing/2014/main" id="{81C54B1E-3854-C5F0-D471-BB6801B5A35D}"/>
+              </a:ext>
+            </a:extLst>
+          </p:cNvPr>
+          <p:cNvPicPr>
+            <a:picLocks noChangeAspect="1"/>
+          </p:cNvPicPr>
+          <p:nvPr/>
+        </p:nvPicPr>
+        <p:blipFill>
+          <a:blip r:embed="rId4">
+            <a:extLst>
+              <a:ext uri="{28A0092B-C50C-407E-A947-70E740481C1C}">
+                <a14:useLocalDpi xmlns:a14="http://schemas.microsoft.com/office/drawing/2010/main" val="0"/>
+              </a:ext>
+            </a:extLst>
+          </a:blip>
+          <a:stretch>
+            <a:fillRect/>
+          </a:stretch>
+        </p:blipFill>
+        <p:spPr>
+          <a:xfrm>
+            <a:off x="8458202" y="6376665"/>
+            <a:ext cx="459463" cy="469067"/>
+          </a:xfrm>
+          <a:prstGeom prst="rect">
+            <a:avLst/>
+          </a:prstGeom>
+        </p:spPr>
+      </p:pic>
+      <p:pic>
+        <p:nvPicPr>
+          <p:cNvPr id="8" name="Immagine 7" descr="logo_white.eps">
+            <a:extLst>
+              <a:ext uri="{FF2B5EF4-FFF2-40B4-BE49-F238E27FC236}">
+                <a16:creationId xmlns:a16="http://schemas.microsoft.com/office/drawing/2014/main" id="{5E7581D7-3684-38FB-49AC-D380A57E87B4}"/>
+              </a:ext>
+            </a:extLst>
+          </p:cNvPr>
+          <p:cNvPicPr>
+            <a:picLocks noChangeAspect="1"/>
+          </p:cNvPicPr>
+          <p:nvPr/>
+        </p:nvPicPr>
+        <p:blipFill>
+          <a:blip r:embed="rId5">
+            <a:extLst>
+              <a:ext uri="{28A0092B-C50C-407E-A947-70E740481C1C}">
+                <a14:useLocalDpi xmlns:a14="http://schemas.microsoft.com/office/drawing/2010/main" val="0"/>
+              </a:ext>
+            </a:extLst>
+          </a:blip>
+          <a:stretch>
+            <a:fillRect/>
+          </a:stretch>
+        </p:blipFill>
+        <p:spPr>
+          <a:xfrm>
+            <a:off x="5457610" y="6502433"/>
+            <a:ext cx="2395665" cy="220877"/>
+          </a:xfrm>
+          <a:prstGeom prst="rect">
+            <a:avLst/>
+          </a:prstGeom>
+        </p:spPr>
+      </p:pic>
+      <p:sp>
+        <p:nvSpPr>
+          <p:cNvPr id="3" name="CasellaDiTesto 2">
+            <a:extLst>
+              <a:ext uri="{FF2B5EF4-FFF2-40B4-BE49-F238E27FC236}">
+                <a16:creationId xmlns:a16="http://schemas.microsoft.com/office/drawing/2014/main" id="{72481C5A-4A80-9DA9-36C6-B338316DDBB2}"/>
+              </a:ext>
+            </a:extLst>
+          </p:cNvPr>
+          <p:cNvSpPr txBox="1">
+            <a:spLocks noChangeArrowheads="1"/>
+          </p:cNvSpPr>
+          <p:nvPr/>
+        </p:nvSpPr>
+        <p:spPr bwMode="auto">
+          <a:xfrm>
+            <a:off x="3" y="0"/>
+            <a:ext cx="3400425" cy="553998"/>
+          </a:xfrm>
+          <a:prstGeom prst="rect">
+            <a:avLst/>
+          </a:prstGeom>
+          <a:noFill/>
+          <a:ln>
+            <a:noFill/>
+          </a:ln>
+          <a:extLst>
+            <a:ext uri="{909E8E84-426E-40DD-AFC4-6F175D3DCCD1}">
+              <a14:hiddenFill xmlns:a14="http://schemas.microsoft.com/office/drawing/2010/main">
+                <a:solidFill>
+                  <a:srgbClr val="FFFFFF"/>
+                </a:solidFill>
+              </a14:hiddenFill>
+            </a:ext>
+            <a:ext uri="{91240B29-F687-4F45-9708-019B960494DF}">
+              <a14:hiddenLine xmlns:a14="http://schemas.microsoft.com/office/drawing/2010/main" w="9525">
+                <a:solidFill>
+                  <a:srgbClr val="000000"/>
+                </a:solidFill>
+                <a:miter lim="800000"/>
+                <a:headEnd/>
+                <a:tailEnd/>
+              </a14:hiddenLine>
+            </a:ext>
+          </a:extLst>
+        </p:spPr>
+        <p:txBody>
+          <a:bodyPr wrap="square">
+            <a:spAutoFit/>
+          </a:bodyPr>
+          <a:lstStyle>
+            <a:lvl1pPr eaLnBrk="0" hangingPunct="0">
+              <a:defRPr sz="3000">
+                <a:solidFill>
+                  <a:srgbClr val="414141"/>
+                </a:solidFill>
+                <a:latin typeface="Gill Sans Light" charset="0"/>
+                <a:ea typeface="ヒラギノ角ゴ ProN W3" charset="0"/>
+                <a:cs typeface="ヒラギノ角ゴ ProN W3" charset="0"/>
+                <a:sym typeface="Gill Sans Light" charset="0"/>
+              </a:defRPr>
+            </a:lvl1pPr>
+            <a:lvl2pPr marL="742950" indent="-285750" eaLnBrk="0" hangingPunct="0">
+              <a:defRPr sz="3000">
+                <a:solidFill>
+                  <a:srgbClr val="414141"/>
+                </a:solidFill>
+                <a:latin typeface="Gill Sans Light" charset="0"/>
+                <a:ea typeface="ヒラギノ角ゴ ProN W3" charset="0"/>
+                <a:cs typeface="ヒラギノ角ゴ ProN W3" charset="0"/>
+                <a:sym typeface="Gill Sans Light" charset="0"/>
+              </a:defRPr>
+            </a:lvl2pPr>
+            <a:lvl3pPr marL="1143000" indent="-228600" eaLnBrk="0" hangingPunct="0">
+              <a:defRPr sz="3000">
+                <a:solidFill>
+                  <a:srgbClr val="414141"/>
+                </a:solidFill>
+                <a:latin typeface="Gill Sans Light" charset="0"/>
+                <a:ea typeface="ヒラギノ角ゴ ProN W3" charset="0"/>
+                <a:cs typeface="ヒラギノ角ゴ ProN W3" charset="0"/>
+                <a:sym typeface="Gill Sans Light" charset="0"/>
+              </a:defRPr>
+            </a:lvl3pPr>
+            <a:lvl4pPr marL="1600200" indent="-228600" eaLnBrk="0" hangingPunct="0">
+              <a:defRPr sz="3000">
+                <a:solidFill>
+                  <a:srgbClr val="414141"/>
+                </a:solidFill>
+                <a:latin typeface="Gill Sans Light" charset="0"/>
+                <a:ea typeface="ヒラギノ角ゴ ProN W3" charset="0"/>
+                <a:cs typeface="ヒラギノ角ゴ ProN W3" charset="0"/>
+                <a:sym typeface="Gill Sans Light" charset="0"/>
+              </a:defRPr>
+            </a:lvl4pPr>
+            <a:lvl5pPr marL="2057400" indent="-228600" eaLnBrk="0" hangingPunct="0">
+              <a:defRPr sz="3000">
+                <a:solidFill>
+                  <a:srgbClr val="414141"/>
+                </a:solidFill>
+                <a:latin typeface="Gill Sans Light" charset="0"/>
+                <a:ea typeface="ヒラギノ角ゴ ProN W3" charset="0"/>
+                <a:cs typeface="ヒラギノ角ゴ ProN W3" charset="0"/>
+                <a:sym typeface="Gill Sans Light" charset="0"/>
+              </a:defRPr>
+            </a:lvl5pPr>
+            <a:lvl6pPr marL="2514600" indent="-228600" algn="ctr" eaLnBrk="0" fontAlgn="base" hangingPunct="0">
+              <a:spcBef>
+                <a:spcPct val="0"/>
+              </a:spcBef>
+              <a:spcAft>
+                <a:spcPct val="0"/>
+              </a:spcAft>
+              <a:defRPr sz="3000">
+                <a:solidFill>
+                  <a:srgbClr val="414141"/>
+                </a:solidFill>
+                <a:latin typeface="Gill Sans Light" charset="0"/>
+                <a:ea typeface="ヒラギノ角ゴ ProN W3" charset="0"/>
+                <a:cs typeface="ヒラギノ角ゴ ProN W3" charset="0"/>
+                <a:sym typeface="Gill Sans Light" charset="0"/>
+              </a:defRPr>
+            </a:lvl6pPr>
+            <a:lvl7pPr marL="2971800" indent="-228600" algn="ctr" eaLnBrk="0" fontAlgn="base" hangingPunct="0">
+              <a:spcBef>
+                <a:spcPct val="0"/>
+              </a:spcBef>
+              <a:spcAft>
+                <a:spcPct val="0"/>
+              </a:spcAft>
+              <a:defRPr sz="3000">
+                <a:solidFill>
+                  <a:srgbClr val="414141"/>
+                </a:solidFill>
+                <a:latin typeface="Gill Sans Light" charset="0"/>
+                <a:ea typeface="ヒラギノ角ゴ ProN W3" charset="0"/>
+                <a:cs typeface="ヒラギノ角ゴ ProN W3" charset="0"/>
+                <a:sym typeface="Gill Sans Light" charset="0"/>
+              </a:defRPr>
+            </a:lvl7pPr>
+            <a:lvl8pPr marL="3429000" indent="-228600" algn="ctr" eaLnBrk="0" fontAlgn="base" hangingPunct="0">
+              <a:spcBef>
+                <a:spcPct val="0"/>
+              </a:spcBef>
+              <a:spcAft>
+                <a:spcPct val="0"/>
+              </a:spcAft>
+              <a:defRPr sz="3000">
+                <a:solidFill>
+                  <a:srgbClr val="414141"/>
+                </a:solidFill>
+                <a:latin typeface="Gill Sans Light" charset="0"/>
+                <a:ea typeface="ヒラギノ角ゴ ProN W3" charset="0"/>
+                <a:cs typeface="ヒラギノ角ゴ ProN W3" charset="0"/>
+                <a:sym typeface="Gill Sans Light" charset="0"/>
+              </a:defRPr>
+            </a:lvl8pPr>
+            <a:lvl9pPr marL="3886200" indent="-228600" algn="ctr" eaLnBrk="0" fontAlgn="base" hangingPunct="0">
+              <a:spcBef>
+                <a:spcPct val="0"/>
+              </a:spcBef>
+              <a:spcAft>
+                <a:spcPct val="0"/>
+              </a:spcAft>
+              <a:defRPr sz="3000">
+                <a:solidFill>
+                  <a:srgbClr val="414141"/>
+                </a:solidFill>
+                <a:latin typeface="Gill Sans Light" charset="0"/>
+                <a:ea typeface="ヒラギノ角ゴ ProN W3" charset="0"/>
+                <a:cs typeface="ヒラギノ角ゴ ProN W3" charset="0"/>
+                <a:sym typeface="Gill Sans Light" charset="0"/>
+              </a:defRPr>
+            </a:lvl9pPr>
+          </a:lstStyle>
+          <a:p>
+            <a:pPr eaLnBrk="1" hangingPunct="1"/>
+            <a:r>
+              <a:rPr lang="it-IT" b="1">
+                <a:solidFill>
+                  <a:srgbClr val="0F406B"/>
+                </a:solidFill>
+                <a:latin typeface="Arial" panose="020B0604020202020204" pitchFamily="34" charset="0"/>
+                <a:cs typeface="Arial" panose="020B0604020202020204" pitchFamily="34" charset="0"/>
+              </a:rPr>
+              <a:t>R</a:t>
+            </a:r>
+            <a:r>
+              <a:rPr lang="it-IT" sz="2000" b="1">
+                <a:solidFill>
+                  <a:srgbClr val="0F406B"/>
+                </a:solidFill>
+                <a:latin typeface="Arial" panose="020B0604020202020204" pitchFamily="34" charset="0"/>
+                <a:cs typeface="Arial" panose="020B0604020202020204" pitchFamily="34" charset="0"/>
+              </a:rPr>
+              <a:t>ESULTS</a:t>
+            </a:r>
+            <a:endParaRPr lang="it-IT" sz="1400" b="1">
+              <a:solidFill>
+                <a:srgbClr val="0F406B"/>
+              </a:solidFill>
+              <a:latin typeface="Arial" panose="020B0604020202020204" pitchFamily="34" charset="0"/>
+              <a:cs typeface="Arial" panose="020B0604020202020204" pitchFamily="34" charset="0"/>
+            </a:endParaRPr>
+          </a:p>
+        </p:txBody>
+      </p:sp>
+      <p:cxnSp>
+        <p:nvCxnSpPr>
+          <p:cNvPr id="23" name="Connettore diritto 22">
+            <a:extLst>
+              <a:ext uri="{FF2B5EF4-FFF2-40B4-BE49-F238E27FC236}">
+                <a16:creationId xmlns:a16="http://schemas.microsoft.com/office/drawing/2014/main" id="{CC034298-C43C-2456-97DE-0BD6918FF98C}"/>
+              </a:ext>
+            </a:extLst>
+          </p:cNvPr>
+          <p:cNvCxnSpPr>
+            <a:cxnSpLocks/>
+          </p:cNvCxnSpPr>
+          <p:nvPr/>
+        </p:nvCxnSpPr>
+        <p:spPr>
+          <a:xfrm>
+            <a:off x="126750" y="593643"/>
+            <a:ext cx="1819747" cy="0"/>
+          </a:xfrm>
+          <a:prstGeom prst="line">
+            <a:avLst/>
+          </a:prstGeom>
+          <a:ln w="38100">
+            <a:solidFill>
+              <a:srgbClr val="0F406B"/>
+            </a:solidFill>
+          </a:ln>
+        </p:spPr>
+        <p:style>
+          <a:lnRef idx="2">
+            <a:schemeClr val="accent1"/>
+          </a:lnRef>
+          <a:fillRef idx="0">
+            <a:schemeClr val="accent1"/>
+          </a:fillRef>
+          <a:effectRef idx="1">
+            <a:schemeClr val="accent1"/>
+          </a:effectRef>
+          <a:fontRef idx="minor">
+            <a:schemeClr val="tx1"/>
+          </a:fontRef>
+        </p:style>
+      </p:cxnSp>
+      <p:sp>
+        <p:nvSpPr>
+          <p:cNvPr id="16" name="CasellaDiTesto 15">
+            <a:extLst>
+              <a:ext uri="{FF2B5EF4-FFF2-40B4-BE49-F238E27FC236}">
+                <a16:creationId xmlns:a16="http://schemas.microsoft.com/office/drawing/2014/main" id="{E47A22F5-618E-B314-3722-A00F56A3AD64}"/>
+              </a:ext>
+            </a:extLst>
+          </p:cNvPr>
+          <p:cNvSpPr txBox="1">
+            <a:spLocks noChangeArrowheads="1"/>
+          </p:cNvSpPr>
+          <p:nvPr/>
+        </p:nvSpPr>
+        <p:spPr bwMode="auto">
+          <a:xfrm>
+            <a:off x="94957" y="747871"/>
+            <a:ext cx="3400425" cy="338554"/>
+          </a:xfrm>
+          <a:prstGeom prst="rect">
+            <a:avLst/>
+          </a:prstGeom>
+          <a:noFill/>
+          <a:ln>
+            <a:noFill/>
+          </a:ln>
+          <a:extLst>
+            <a:ext uri="{909E8E84-426E-40DD-AFC4-6F175D3DCCD1}">
+              <a14:hiddenFill xmlns:a14="http://schemas.microsoft.com/office/drawing/2010/main">
+                <a:solidFill>
+                  <a:srgbClr val="FFFFFF"/>
+                </a:solidFill>
+              </a14:hiddenFill>
+            </a:ext>
+            <a:ext uri="{91240B29-F687-4F45-9708-019B960494DF}">
+              <a14:hiddenLine xmlns:a14="http://schemas.microsoft.com/office/drawing/2010/main" w="9525">
+                <a:solidFill>
+                  <a:srgbClr val="000000"/>
+                </a:solidFill>
+                <a:miter lim="800000"/>
+                <a:headEnd/>
+                <a:tailEnd/>
+              </a14:hiddenLine>
+            </a:ext>
+          </a:extLst>
+        </p:spPr>
+        <p:txBody>
+          <a:bodyPr wrap="square">
+            <a:spAutoFit/>
+          </a:bodyPr>
+          <a:lstStyle>
+            <a:lvl1pPr eaLnBrk="0" hangingPunct="0">
+              <a:defRPr sz="3000">
+                <a:solidFill>
+                  <a:srgbClr val="414141"/>
+                </a:solidFill>
+                <a:latin typeface="Gill Sans Light" charset="0"/>
+                <a:ea typeface="ヒラギノ角ゴ ProN W3" charset="0"/>
+                <a:cs typeface="ヒラギノ角ゴ ProN W3" charset="0"/>
+                <a:sym typeface="Gill Sans Light" charset="0"/>
+              </a:defRPr>
+            </a:lvl1pPr>
+            <a:lvl2pPr marL="742950" indent="-285750" eaLnBrk="0" hangingPunct="0">
+              <a:defRPr sz="3000">
+                <a:solidFill>
+                  <a:srgbClr val="414141"/>
+                </a:solidFill>
+                <a:latin typeface="Gill Sans Light" charset="0"/>
+                <a:ea typeface="ヒラギノ角ゴ ProN W3" charset="0"/>
+                <a:cs typeface="ヒラギノ角ゴ ProN W3" charset="0"/>
+                <a:sym typeface="Gill Sans Light" charset="0"/>
+              </a:defRPr>
+            </a:lvl2pPr>
+            <a:lvl3pPr marL="1143000" indent="-228600" eaLnBrk="0" hangingPunct="0">
+              <a:defRPr sz="3000">
+                <a:solidFill>
+                  <a:srgbClr val="414141"/>
+                </a:solidFill>
+                <a:latin typeface="Gill Sans Light" charset="0"/>
+                <a:ea typeface="ヒラギノ角ゴ ProN W3" charset="0"/>
+                <a:cs typeface="ヒラギノ角ゴ ProN W3" charset="0"/>
+                <a:sym typeface="Gill Sans Light" charset="0"/>
+              </a:defRPr>
+            </a:lvl3pPr>
+            <a:lvl4pPr marL="1600200" indent="-228600" eaLnBrk="0" hangingPunct="0">
+              <a:defRPr sz="3000">
+                <a:solidFill>
+                  <a:srgbClr val="414141"/>
+                </a:solidFill>
+                <a:latin typeface="Gill Sans Light" charset="0"/>
+                <a:ea typeface="ヒラギノ角ゴ ProN W3" charset="0"/>
+                <a:cs typeface="ヒラギノ角ゴ ProN W3" charset="0"/>
+                <a:sym typeface="Gill Sans Light" charset="0"/>
+              </a:defRPr>
+            </a:lvl4pPr>
+            <a:lvl5pPr marL="2057400" indent="-228600" eaLnBrk="0" hangingPunct="0">
+              <a:defRPr sz="3000">
+                <a:solidFill>
+                  <a:srgbClr val="414141"/>
+                </a:solidFill>
+                <a:latin typeface="Gill Sans Light" charset="0"/>
+                <a:ea typeface="ヒラギノ角ゴ ProN W3" charset="0"/>
+                <a:cs typeface="ヒラギノ角ゴ ProN W3" charset="0"/>
+                <a:sym typeface="Gill Sans Light" charset="0"/>
+              </a:defRPr>
+            </a:lvl5pPr>
+            <a:lvl6pPr marL="2514600" indent="-228600" algn="ctr" eaLnBrk="0" fontAlgn="base" hangingPunct="0">
+              <a:spcBef>
+                <a:spcPct val="0"/>
+              </a:spcBef>
+              <a:spcAft>
+                <a:spcPct val="0"/>
+              </a:spcAft>
+              <a:defRPr sz="3000">
+                <a:solidFill>
+                  <a:srgbClr val="414141"/>
+                </a:solidFill>
+                <a:latin typeface="Gill Sans Light" charset="0"/>
+                <a:ea typeface="ヒラギノ角ゴ ProN W3" charset="0"/>
+                <a:cs typeface="ヒラギノ角ゴ ProN W3" charset="0"/>
+                <a:sym typeface="Gill Sans Light" charset="0"/>
+              </a:defRPr>
+            </a:lvl6pPr>
+            <a:lvl7pPr marL="2971800" indent="-228600" algn="ctr" eaLnBrk="0" fontAlgn="base" hangingPunct="0">
+              <a:spcBef>
+                <a:spcPct val="0"/>
+              </a:spcBef>
+              <a:spcAft>
+                <a:spcPct val="0"/>
+              </a:spcAft>
+              <a:defRPr sz="3000">
+                <a:solidFill>
+                  <a:srgbClr val="414141"/>
+                </a:solidFill>
+                <a:latin typeface="Gill Sans Light" charset="0"/>
+                <a:ea typeface="ヒラギノ角ゴ ProN W3" charset="0"/>
+                <a:cs typeface="ヒラギノ角ゴ ProN W3" charset="0"/>
+                <a:sym typeface="Gill Sans Light" charset="0"/>
+              </a:defRPr>
+            </a:lvl7pPr>
+            <a:lvl8pPr marL="3429000" indent="-228600" algn="ctr" eaLnBrk="0" fontAlgn="base" hangingPunct="0">
+              <a:spcBef>
+                <a:spcPct val="0"/>
+              </a:spcBef>
+              <a:spcAft>
+                <a:spcPct val="0"/>
+              </a:spcAft>
+              <a:defRPr sz="3000">
+                <a:solidFill>
+                  <a:srgbClr val="414141"/>
+                </a:solidFill>
+                <a:latin typeface="Gill Sans Light" charset="0"/>
+                <a:ea typeface="ヒラギノ角ゴ ProN W3" charset="0"/>
+                <a:cs typeface="ヒラギノ角ゴ ProN W3" charset="0"/>
+                <a:sym typeface="Gill Sans Light" charset="0"/>
+              </a:defRPr>
+            </a:lvl8pPr>
+            <a:lvl9pPr marL="3886200" indent="-228600" algn="ctr" eaLnBrk="0" fontAlgn="base" hangingPunct="0">
+              <a:spcBef>
+                <a:spcPct val="0"/>
+              </a:spcBef>
+              <a:spcAft>
+                <a:spcPct val="0"/>
+              </a:spcAft>
+              <a:defRPr sz="3000">
+                <a:solidFill>
+                  <a:srgbClr val="414141"/>
+                </a:solidFill>
+                <a:latin typeface="Gill Sans Light" charset="0"/>
+                <a:ea typeface="ヒラギノ角ゴ ProN W3" charset="0"/>
+                <a:cs typeface="ヒラギノ角ゴ ProN W3" charset="0"/>
+                <a:sym typeface="Gill Sans Light" charset="0"/>
+              </a:defRPr>
+            </a:lvl9pPr>
+          </a:lstStyle>
+          <a:p>
+            <a:pPr eaLnBrk="1" hangingPunct="1"/>
+            <a:r>
+              <a:rPr lang="it-IT" sz="1600" b="1">
+                <a:solidFill>
+                  <a:srgbClr val="0F406B"/>
+                </a:solidFill>
+                <a:latin typeface="Arial" panose="020B0604020202020204" pitchFamily="34" charset="0"/>
+                <a:cs typeface="Arial" panose="020B0604020202020204" pitchFamily="34" charset="0"/>
+              </a:rPr>
+              <a:t>BEST COMBINATIONS :</a:t>
+            </a:r>
+          </a:p>
+        </p:txBody>
+      </p:sp>
+      <p:sp>
+        <p:nvSpPr>
+          <p:cNvPr id="21" name="CasellaDiTesto 20">
+            <a:extLst>
+              <a:ext uri="{FF2B5EF4-FFF2-40B4-BE49-F238E27FC236}">
+                <a16:creationId xmlns:a16="http://schemas.microsoft.com/office/drawing/2014/main" id="{BFE07B55-E79E-06A1-1A48-B38D2CC69D97}"/>
+              </a:ext>
+            </a:extLst>
+          </p:cNvPr>
+          <p:cNvSpPr txBox="1"/>
+          <p:nvPr/>
+        </p:nvSpPr>
+        <p:spPr>
+          <a:xfrm>
+            <a:off x="126750" y="5718970"/>
+            <a:ext cx="6851211" cy="369332"/>
+          </a:xfrm>
+          <a:prstGeom prst="rect">
+            <a:avLst/>
+          </a:prstGeom>
+          <a:noFill/>
+        </p:spPr>
+        <p:txBody>
+          <a:bodyPr wrap="square">
+            <a:spAutoFit/>
+          </a:bodyPr>
+          <a:lstStyle/>
+          <a:p>
+            <a:r>
+              <a:rPr lang="it-IT">
+                <a:latin typeface="Arial" panose="020B0604020202020204" pitchFamily="34" charset="0"/>
+                <a:cs typeface="Arial" panose="020B0604020202020204" pitchFamily="34" charset="0"/>
+              </a:rPr>
+              <a:t>Best </a:t>
+            </a:r>
+            <a:r>
+              <a:rPr lang="it-IT" err="1">
+                <a:latin typeface="Arial" panose="020B0604020202020204" pitchFamily="34" charset="0"/>
+                <a:cs typeface="Arial" panose="020B0604020202020204" pitchFamily="34" charset="0"/>
+              </a:rPr>
+              <a:t>achieved</a:t>
+            </a:r>
+            <a:r>
+              <a:rPr lang="it-IT">
+                <a:latin typeface="Arial" panose="020B0604020202020204" pitchFamily="34" charset="0"/>
+                <a:cs typeface="Arial" panose="020B0604020202020204" pitchFamily="34" charset="0"/>
+              </a:rPr>
+              <a:t> </a:t>
+            </a:r>
+            <a:r>
+              <a:rPr lang="it-IT" b="1">
+                <a:solidFill>
+                  <a:srgbClr val="0F406B"/>
+                </a:solidFill>
+                <a:latin typeface="Arial" panose="020B0604020202020204" pitchFamily="34" charset="0"/>
+                <a:cs typeface="Arial" panose="020B0604020202020204" pitchFamily="34" charset="0"/>
+              </a:rPr>
+              <a:t>f1-macro score </a:t>
+            </a:r>
+            <a:r>
+              <a:rPr lang="it-IT" err="1">
+                <a:latin typeface="Arial" panose="020B0604020202020204" pitchFamily="34" charset="0"/>
+                <a:cs typeface="Arial" panose="020B0604020202020204" pitchFamily="34" charset="0"/>
+              </a:rPr>
+              <a:t>during</a:t>
+            </a:r>
+            <a:r>
+              <a:rPr lang="it-IT">
+                <a:latin typeface="Arial" panose="020B0604020202020204" pitchFamily="34" charset="0"/>
+                <a:cs typeface="Arial" panose="020B0604020202020204" pitchFamily="34" charset="0"/>
+              </a:rPr>
+              <a:t> </a:t>
+            </a:r>
+            <a:r>
+              <a:rPr lang="it-IT" err="1">
+                <a:latin typeface="Arial" panose="020B0604020202020204" pitchFamily="34" charset="0"/>
+                <a:cs typeface="Arial" panose="020B0604020202020204" pitchFamily="34" charset="0"/>
+              </a:rPr>
+              <a:t>RandomSearchCV</a:t>
+            </a:r>
+            <a:r>
+              <a:rPr lang="it-IT">
+                <a:latin typeface="Arial" panose="020B0604020202020204" pitchFamily="34" charset="0"/>
+                <a:cs typeface="Arial" panose="020B0604020202020204" pitchFamily="34" charset="0"/>
+              </a:rPr>
+              <a:t> : </a:t>
+            </a:r>
+            <a:r>
+              <a:rPr lang="it-IT" b="1">
+                <a:solidFill>
+                  <a:srgbClr val="0F406B"/>
+                </a:solidFill>
+                <a:latin typeface="Arial" panose="020B0604020202020204" pitchFamily="34" charset="0"/>
+                <a:cs typeface="Arial" panose="020B0604020202020204" pitchFamily="34" charset="0"/>
+              </a:rPr>
+              <a:t>0.787</a:t>
+            </a:r>
+          </a:p>
+        </p:txBody>
+      </p:sp>
+      <p:pic>
+        <p:nvPicPr>
+          <p:cNvPr id="5" name="Immagine 4">
+            <a:extLst>
+              <a:ext uri="{FF2B5EF4-FFF2-40B4-BE49-F238E27FC236}">
+                <a16:creationId xmlns:a16="http://schemas.microsoft.com/office/drawing/2014/main" id="{5ECC6075-017B-0574-488C-46C7F82C5F79}"/>
+              </a:ext>
+            </a:extLst>
+          </p:cNvPr>
+          <p:cNvPicPr>
+            <a:picLocks noChangeAspect="1"/>
+          </p:cNvPicPr>
+          <p:nvPr/>
+        </p:nvPicPr>
+        <p:blipFill>
+          <a:blip r:embed="rId6"/>
+          <a:stretch>
+            <a:fillRect/>
+          </a:stretch>
+        </p:blipFill>
+        <p:spPr>
+          <a:xfrm>
+            <a:off x="94955" y="1054576"/>
+            <a:ext cx="8917663" cy="4664395"/>
+          </a:xfrm>
+          <a:prstGeom prst="rect">
+            <a:avLst/>
+          </a:prstGeom>
+        </p:spPr>
+      </p:pic>
+    </p:spTree>
+    <p:extLst>
+      <p:ext uri="{BB962C8B-B14F-4D97-AF65-F5344CB8AC3E}">
+        <p14:creationId xmlns:p14="http://schemas.microsoft.com/office/powerpoint/2010/main" val="707321557"/>
+      </p:ext>
+    </p:extLst>
+  </p:cSld>
+  <p:clrMapOvr>
+    <a:masterClrMapping/>
+  </p:clrMapOvr>
+  <mc:AlternateContent xmlns:mc="http://schemas.openxmlformats.org/markup-compatibility/2006" xmlns:p159="http://schemas.microsoft.com/office/powerpoint/2015/09/main">
+    <mc:Choice Requires="p159">
+      <p:transition xmlns:p14="http://schemas.microsoft.com/office/powerpoint/2010/main" spd="slow" p14:dur="1500">
+        <p159:morph option="byObject"/>
+      </p:transition>
+    </mc:Choice>
+    <mc:Fallback xmlns="">
+      <p:transition spd="slow">
+        <p:fade/>
+      </p:transition>
+    </mc:Fallback>
+  </mc:AlternateContent>
+</p:sld>
+</file>
+
+<file path=ppt/slides/slide15.xml><?xml version="1.0" encoding="utf-8"?>
+<p:sld xmlns:a="http://schemas.openxmlformats.org/drawingml/2006/main" xmlns:r="http://schemas.openxmlformats.org/officeDocument/2006/relationships" xmlns:p="http://schemas.openxmlformats.org/presentationml/2006/main">
+  <p:cSld>
+    <p:spTree>
+      <p:nvGrpSpPr>
+        <p:cNvPr id="1" name="">
+          <a:extLst>
+            <a:ext uri="{FF2B5EF4-FFF2-40B4-BE49-F238E27FC236}">
+              <a16:creationId xmlns:a16="http://schemas.microsoft.com/office/drawing/2014/main" id="{E33E6CD4-B477-7424-4657-9EA3A6945F59}"/>
             </a:ext>
           </a:extLst>
         </p:cNvPr>
@@ -10139,7 +11057,7 @@
           <p:cNvPr id="6" name="Parallelogramma 5">
             <a:extLst>
               <a:ext uri="{FF2B5EF4-FFF2-40B4-BE49-F238E27FC236}">
-                <a16:creationId xmlns:a16="http://schemas.microsoft.com/office/drawing/2014/main" id="{0EB5ED62-1F21-C363-57E4-4292FDFA3F1A}"/>
+                <a16:creationId xmlns:a16="http://schemas.microsoft.com/office/drawing/2014/main" id="{950B5FA7-90F0-69F4-4D0A-EF35F4DB23C8}"/>
               </a:ext>
             </a:extLst>
           </p:cNvPr>
@@ -10193,7 +11111,7 @@
           <p:cNvPr id="7" name="Immagine 6" descr="cherubino_pant541.eps">
             <a:extLst>
               <a:ext uri="{FF2B5EF4-FFF2-40B4-BE49-F238E27FC236}">
-                <a16:creationId xmlns:a16="http://schemas.microsoft.com/office/drawing/2014/main" id="{E48252C7-7F5B-C0E0-A0B2-A3DF8992D0F4}"/>
+                <a16:creationId xmlns:a16="http://schemas.microsoft.com/office/drawing/2014/main" id="{6746EB0E-70F3-94D0-15A1-69EA49869F3F}"/>
               </a:ext>
             </a:extLst>
           </p:cNvPr>
@@ -10229,7 +11147,7 @@
           <p:cNvPr id="8" name="Immagine 7" descr="logo_white.eps">
             <a:extLst>
               <a:ext uri="{FF2B5EF4-FFF2-40B4-BE49-F238E27FC236}">
-                <a16:creationId xmlns:a16="http://schemas.microsoft.com/office/drawing/2014/main" id="{23B65B15-E902-8D29-5913-47507C5D694E}"/>
+                <a16:creationId xmlns:a16="http://schemas.microsoft.com/office/drawing/2014/main" id="{F4C2A008-D867-FA10-8FAA-98A265E0C67C}"/>
               </a:ext>
             </a:extLst>
           </p:cNvPr>
@@ -10260,42 +11178,12 @@
           </a:prstGeom>
         </p:spPr>
       </p:pic>
-      <p:pic>
-        <p:nvPicPr>
-          <p:cNvPr id="10" name="Picture 9" descr="A screenshot of a computer game&#10;&#10;AI-generated content may be incorrect.">
-            <a:extLst>
-              <a:ext uri="{FF2B5EF4-FFF2-40B4-BE49-F238E27FC236}">
-                <a16:creationId xmlns:a16="http://schemas.microsoft.com/office/drawing/2014/main" id="{7B8E1DD1-200B-8EDE-8350-B3C26B7962FA}"/>
-              </a:ext>
-            </a:extLst>
-          </p:cNvPr>
-          <p:cNvPicPr>
-            <a:picLocks noChangeAspect="1"/>
-          </p:cNvPicPr>
-          <p:nvPr/>
-        </p:nvPicPr>
-        <p:blipFill>
-          <a:blip r:embed="rId5"/>
-          <a:stretch>
-            <a:fillRect/>
-          </a:stretch>
-        </p:blipFill>
-        <p:spPr>
-          <a:xfrm>
-            <a:off x="12045683" y="440279"/>
-            <a:ext cx="2413635" cy="3067050"/>
-          </a:xfrm>
-          <a:prstGeom prst="rect">
-            <a:avLst/>
-          </a:prstGeom>
-        </p:spPr>
-      </p:pic>
       <p:sp>
         <p:nvSpPr>
           <p:cNvPr id="26" name="CasellaDiTesto 1">
             <a:extLst>
               <a:ext uri="{FF2B5EF4-FFF2-40B4-BE49-F238E27FC236}">
-                <a16:creationId xmlns:a16="http://schemas.microsoft.com/office/drawing/2014/main" id="{F43B3399-62F9-10D0-DAC5-5DA22B285AFB}"/>
+                <a16:creationId xmlns:a16="http://schemas.microsoft.com/office/drawing/2014/main" id="{C5EAB9CC-9C89-3D4F-C4AE-343A7FC75642}"/>
               </a:ext>
             </a:extLst>
           </p:cNvPr>
@@ -10467,24 +11355,14 @@
           </a:lstStyle>
           <a:p>
             <a:r>
-              <a:rPr lang="it-IT" sz="2800" b="1">
+              <a:rPr lang="it-IT" sz="2800" b="1" dirty="0">
                 <a:solidFill>
                   <a:srgbClr val="0F406B"/>
                 </a:solidFill>
                 <a:latin typeface="Arial"/>
                 <a:cs typeface="Arial"/>
               </a:rPr>
-              <a:t>P</a:t>
-            </a:r>
-            <a:r>
-              <a:rPr lang="it-IT" sz="2000" b="1">
-                <a:solidFill>
-                  <a:srgbClr val="0F406B"/>
-                </a:solidFill>
-                <a:latin typeface="Arial"/>
-                <a:cs typeface="Arial"/>
-              </a:rPr>
-              <a:t>REDICT_PROBA METHOD</a:t>
+              <a:t>Considering the Binary Case (1)</a:t>
             </a:r>
           </a:p>
         </p:txBody>
@@ -10494,7 +11372,7 @@
           <p:cNvPr id="27" name="Connettore diritto 15">
             <a:extLst>
               <a:ext uri="{FF2B5EF4-FFF2-40B4-BE49-F238E27FC236}">
-                <a16:creationId xmlns:a16="http://schemas.microsoft.com/office/drawing/2014/main" id="{5BBB535E-5292-43A8-821B-3CEAD062EBE5}"/>
+                <a16:creationId xmlns:a16="http://schemas.microsoft.com/office/drawing/2014/main" id="{995E34A1-977F-A19F-3887-6FA2059EF004}"/>
               </a:ext>
             </a:extLst>
           </p:cNvPr>
@@ -10505,8 +11383,8 @@
         </p:nvCxnSpPr>
         <p:spPr>
           <a:xfrm>
-            <a:off x="198975" y="509700"/>
-            <a:ext cx="3440521" cy="0"/>
+            <a:off x="110087" y="484673"/>
+            <a:ext cx="5450055" cy="0"/>
           </a:xfrm>
           <a:prstGeom prst="line">
             <a:avLst/>
@@ -10516,1640 +11394,6 @@
               <a:srgbClr val="0F406B"/>
             </a:solidFill>
           </a:ln>
-        </p:spPr>
-        <p:style>
-          <a:lnRef idx="3">
-            <a:schemeClr val="accent1"/>
-          </a:lnRef>
-          <a:fillRef idx="0">
-            <a:schemeClr val="accent1"/>
-          </a:fillRef>
-          <a:effectRef idx="2">
-            <a:schemeClr val="accent1"/>
-          </a:effectRef>
-          <a:fontRef idx="minor">
-            <a:schemeClr val="tx1"/>
-          </a:fontRef>
-        </p:style>
-      </p:cxnSp>
-      <p:sp>
-        <p:nvSpPr>
-          <p:cNvPr id="4" name="CasellaDiTesto 15">
-            <a:extLst>
-              <a:ext uri="{FF2B5EF4-FFF2-40B4-BE49-F238E27FC236}">
-                <a16:creationId xmlns:a16="http://schemas.microsoft.com/office/drawing/2014/main" id="{A5DEFAAB-4E33-4EDB-76EE-B9BEADFF007C}"/>
-              </a:ext>
-            </a:extLst>
-          </p:cNvPr>
-          <p:cNvSpPr txBox="1">
-            <a:spLocks noChangeArrowheads="1"/>
-          </p:cNvSpPr>
-          <p:nvPr/>
-        </p:nvSpPr>
-        <p:spPr bwMode="auto">
-          <a:xfrm>
-            <a:off x="9499616" y="2850990"/>
-            <a:ext cx="4217289" cy="338554"/>
-          </a:xfrm>
-          <a:prstGeom prst="rect">
-            <a:avLst/>
-          </a:prstGeom>
-          <a:noFill/>
-          <a:ln>
-            <a:noFill/>
-          </a:ln>
-          <a:extLst>
-            <a:ext uri="{909E8E84-426E-40DD-AFC4-6F175D3DCCD1}">
-              <a14:hiddenFill xmlns:a14="http://schemas.microsoft.com/office/drawing/2010/main">
-                <a:solidFill>
-                  <a:srgbClr val="FFFFFF"/>
-                </a:solidFill>
-              </a14:hiddenFill>
-            </a:ext>
-            <a:ext uri="{91240B29-F687-4F45-9708-019B960494DF}">
-              <a14:hiddenLine xmlns:a14="http://schemas.microsoft.com/office/drawing/2010/main" w="9525">
-                <a:solidFill>
-                  <a:srgbClr val="000000"/>
-                </a:solidFill>
-                <a:miter lim="800000"/>
-                <a:headEnd/>
-                <a:tailEnd/>
-              </a14:hiddenLine>
-            </a:ext>
-          </a:extLst>
-        </p:spPr>
-        <p:txBody>
-          <a:bodyPr wrap="square" lIns="91440" tIns="45720" rIns="91440" bIns="45720" anchor="t">
-            <a:spAutoFit/>
-          </a:bodyPr>
-          <a:lstStyle>
-            <a:lvl1pPr eaLnBrk="0" hangingPunct="0">
-              <a:defRPr sz="3000">
-                <a:solidFill>
-                  <a:srgbClr val="414141"/>
-                </a:solidFill>
-                <a:latin typeface="Gill Sans Light" charset="0"/>
-                <a:ea typeface="ヒラギノ角ゴ ProN W3" charset="0"/>
-                <a:cs typeface="ヒラギノ角ゴ ProN W3" charset="0"/>
-                <a:sym typeface="Gill Sans Light" charset="0"/>
-              </a:defRPr>
-            </a:lvl1pPr>
-            <a:lvl2pPr marL="742950" indent="-285750" eaLnBrk="0" hangingPunct="0">
-              <a:defRPr sz="3000">
-                <a:solidFill>
-                  <a:srgbClr val="414141"/>
-                </a:solidFill>
-                <a:latin typeface="Gill Sans Light" charset="0"/>
-                <a:ea typeface="ヒラギノ角ゴ ProN W3" charset="0"/>
-                <a:cs typeface="ヒラギノ角ゴ ProN W3" charset="0"/>
-                <a:sym typeface="Gill Sans Light" charset="0"/>
-              </a:defRPr>
-            </a:lvl2pPr>
-            <a:lvl3pPr marL="1143000" indent="-228600" eaLnBrk="0" hangingPunct="0">
-              <a:defRPr sz="3000">
-                <a:solidFill>
-                  <a:srgbClr val="414141"/>
-                </a:solidFill>
-                <a:latin typeface="Gill Sans Light" charset="0"/>
-                <a:ea typeface="ヒラギノ角ゴ ProN W3" charset="0"/>
-                <a:cs typeface="ヒラギノ角ゴ ProN W3" charset="0"/>
-                <a:sym typeface="Gill Sans Light" charset="0"/>
-              </a:defRPr>
-            </a:lvl3pPr>
-            <a:lvl4pPr marL="1600200" indent="-228600" eaLnBrk="0" hangingPunct="0">
-              <a:defRPr sz="3000">
-                <a:solidFill>
-                  <a:srgbClr val="414141"/>
-                </a:solidFill>
-                <a:latin typeface="Gill Sans Light" charset="0"/>
-                <a:ea typeface="ヒラギノ角ゴ ProN W3" charset="0"/>
-                <a:cs typeface="ヒラギノ角ゴ ProN W3" charset="0"/>
-                <a:sym typeface="Gill Sans Light" charset="0"/>
-              </a:defRPr>
-            </a:lvl4pPr>
-            <a:lvl5pPr marL="2057400" indent="-228600" eaLnBrk="0" hangingPunct="0">
-              <a:defRPr sz="3000">
-                <a:solidFill>
-                  <a:srgbClr val="414141"/>
-                </a:solidFill>
-                <a:latin typeface="Gill Sans Light" charset="0"/>
-                <a:ea typeface="ヒラギノ角ゴ ProN W3" charset="0"/>
-                <a:cs typeface="ヒラギノ角ゴ ProN W3" charset="0"/>
-                <a:sym typeface="Gill Sans Light" charset="0"/>
-              </a:defRPr>
-            </a:lvl5pPr>
-            <a:lvl6pPr marL="2514600" indent="-228600" algn="ctr" eaLnBrk="0" fontAlgn="base" hangingPunct="0">
-              <a:spcBef>
-                <a:spcPct val="0"/>
-              </a:spcBef>
-              <a:spcAft>
-                <a:spcPct val="0"/>
-              </a:spcAft>
-              <a:defRPr sz="3000">
-                <a:solidFill>
-                  <a:srgbClr val="414141"/>
-                </a:solidFill>
-                <a:latin typeface="Gill Sans Light" charset="0"/>
-                <a:ea typeface="ヒラギノ角ゴ ProN W3" charset="0"/>
-                <a:cs typeface="ヒラギノ角ゴ ProN W3" charset="0"/>
-                <a:sym typeface="Gill Sans Light" charset="0"/>
-              </a:defRPr>
-            </a:lvl6pPr>
-            <a:lvl7pPr marL="2971800" indent="-228600" algn="ctr" eaLnBrk="0" fontAlgn="base" hangingPunct="0">
-              <a:spcBef>
-                <a:spcPct val="0"/>
-              </a:spcBef>
-              <a:spcAft>
-                <a:spcPct val="0"/>
-              </a:spcAft>
-              <a:defRPr sz="3000">
-                <a:solidFill>
-                  <a:srgbClr val="414141"/>
-                </a:solidFill>
-                <a:latin typeface="Gill Sans Light" charset="0"/>
-                <a:ea typeface="ヒラギノ角ゴ ProN W3" charset="0"/>
-                <a:cs typeface="ヒラギノ角ゴ ProN W3" charset="0"/>
-                <a:sym typeface="Gill Sans Light" charset="0"/>
-              </a:defRPr>
-            </a:lvl7pPr>
-            <a:lvl8pPr marL="3429000" indent="-228600" algn="ctr" eaLnBrk="0" fontAlgn="base" hangingPunct="0">
-              <a:spcBef>
-                <a:spcPct val="0"/>
-              </a:spcBef>
-              <a:spcAft>
-                <a:spcPct val="0"/>
-              </a:spcAft>
-              <a:defRPr sz="3000">
-                <a:solidFill>
-                  <a:srgbClr val="414141"/>
-                </a:solidFill>
-                <a:latin typeface="Gill Sans Light" charset="0"/>
-                <a:ea typeface="ヒラギノ角ゴ ProN W3" charset="0"/>
-                <a:cs typeface="ヒラギノ角ゴ ProN W3" charset="0"/>
-                <a:sym typeface="Gill Sans Light" charset="0"/>
-              </a:defRPr>
-            </a:lvl8pPr>
-            <a:lvl9pPr marL="3886200" indent="-228600" algn="ctr" eaLnBrk="0" fontAlgn="base" hangingPunct="0">
-              <a:spcBef>
-                <a:spcPct val="0"/>
-              </a:spcBef>
-              <a:spcAft>
-                <a:spcPct val="0"/>
-              </a:spcAft>
-              <a:defRPr sz="3000">
-                <a:solidFill>
-                  <a:srgbClr val="414141"/>
-                </a:solidFill>
-                <a:latin typeface="Gill Sans Light" charset="0"/>
-                <a:ea typeface="ヒラギノ角ゴ ProN W3" charset="0"/>
-                <a:cs typeface="ヒラギノ角ゴ ProN W3" charset="0"/>
-                <a:sym typeface="Gill Sans Light" charset="0"/>
-              </a:defRPr>
-            </a:lvl9pPr>
-          </a:lstStyle>
-          <a:p>
-            <a:r>
-              <a:rPr lang="it-IT" sz="1600" b="1">
-                <a:solidFill>
-                  <a:srgbClr val="0F406B"/>
-                </a:solidFill>
-                <a:latin typeface="Arial"/>
-                <a:cs typeface="Arial"/>
-              </a:rPr>
-              <a:t>RandomizedSearchCV</a:t>
-            </a:r>
-            <a:endParaRPr lang="en-US">
-              <a:cs typeface="Arial"/>
-            </a:endParaRPr>
-          </a:p>
-        </p:txBody>
-      </p:sp>
-      <p:sp>
-        <p:nvSpPr>
-          <p:cNvPr id="3" name="CasellaDiTesto 15">
-            <a:extLst>
-              <a:ext uri="{FF2B5EF4-FFF2-40B4-BE49-F238E27FC236}">
-                <a16:creationId xmlns:a16="http://schemas.microsoft.com/office/drawing/2014/main" id="{18D8B621-B710-6C39-1354-A079C1231674}"/>
-              </a:ext>
-            </a:extLst>
-          </p:cNvPr>
-          <p:cNvSpPr txBox="1">
-            <a:spLocks noChangeArrowheads="1"/>
-          </p:cNvSpPr>
-          <p:nvPr/>
-        </p:nvSpPr>
-        <p:spPr bwMode="auto">
-          <a:xfrm>
-            <a:off x="113243" y="762190"/>
-            <a:ext cx="1498276" cy="584775"/>
-          </a:xfrm>
-          <a:prstGeom prst="rect">
-            <a:avLst/>
-          </a:prstGeom>
-          <a:noFill/>
-          <a:ln>
-            <a:noFill/>
-          </a:ln>
-          <a:extLst>
-            <a:ext uri="{909E8E84-426E-40DD-AFC4-6F175D3DCCD1}">
-              <a14:hiddenFill xmlns:a14="http://schemas.microsoft.com/office/drawing/2010/main">
-                <a:solidFill>
-                  <a:srgbClr val="FFFFFF"/>
-                </a:solidFill>
-              </a14:hiddenFill>
-            </a:ext>
-            <a:ext uri="{91240B29-F687-4F45-9708-019B960494DF}">
-              <a14:hiddenLine xmlns:a14="http://schemas.microsoft.com/office/drawing/2010/main" w="9525">
-                <a:solidFill>
-                  <a:srgbClr val="000000"/>
-                </a:solidFill>
-                <a:miter lim="800000"/>
-                <a:headEnd/>
-                <a:tailEnd/>
-              </a14:hiddenLine>
-            </a:ext>
-          </a:extLst>
-        </p:spPr>
-        <p:txBody>
-          <a:bodyPr wrap="square" lIns="91440" tIns="45720" rIns="91440" bIns="45720" anchor="t">
-            <a:spAutoFit/>
-          </a:bodyPr>
-          <a:lstStyle>
-            <a:lvl1pPr eaLnBrk="0" hangingPunct="0">
-              <a:defRPr sz="3000">
-                <a:solidFill>
-                  <a:srgbClr val="414141"/>
-                </a:solidFill>
-                <a:latin typeface="Gill Sans Light" charset="0"/>
-                <a:ea typeface="ヒラギノ角ゴ ProN W3" charset="0"/>
-                <a:cs typeface="ヒラギノ角ゴ ProN W3" charset="0"/>
-                <a:sym typeface="Gill Sans Light" charset="0"/>
-              </a:defRPr>
-            </a:lvl1pPr>
-            <a:lvl2pPr marL="742950" indent="-285750" eaLnBrk="0" hangingPunct="0">
-              <a:defRPr sz="3000">
-                <a:solidFill>
-                  <a:srgbClr val="414141"/>
-                </a:solidFill>
-                <a:latin typeface="Gill Sans Light" charset="0"/>
-                <a:ea typeface="ヒラギノ角ゴ ProN W3" charset="0"/>
-                <a:cs typeface="ヒラギノ角ゴ ProN W3" charset="0"/>
-                <a:sym typeface="Gill Sans Light" charset="0"/>
-              </a:defRPr>
-            </a:lvl2pPr>
-            <a:lvl3pPr marL="1143000" indent="-228600" eaLnBrk="0" hangingPunct="0">
-              <a:defRPr sz="3000">
-                <a:solidFill>
-                  <a:srgbClr val="414141"/>
-                </a:solidFill>
-                <a:latin typeface="Gill Sans Light" charset="0"/>
-                <a:ea typeface="ヒラギノ角ゴ ProN W3" charset="0"/>
-                <a:cs typeface="ヒラギノ角ゴ ProN W3" charset="0"/>
-                <a:sym typeface="Gill Sans Light" charset="0"/>
-              </a:defRPr>
-            </a:lvl3pPr>
-            <a:lvl4pPr marL="1600200" indent="-228600" eaLnBrk="0" hangingPunct="0">
-              <a:defRPr sz="3000">
-                <a:solidFill>
-                  <a:srgbClr val="414141"/>
-                </a:solidFill>
-                <a:latin typeface="Gill Sans Light" charset="0"/>
-                <a:ea typeface="ヒラギノ角ゴ ProN W3" charset="0"/>
-                <a:cs typeface="ヒラギノ角ゴ ProN W3" charset="0"/>
-                <a:sym typeface="Gill Sans Light" charset="0"/>
-              </a:defRPr>
-            </a:lvl4pPr>
-            <a:lvl5pPr marL="2057400" indent="-228600" eaLnBrk="0" hangingPunct="0">
-              <a:defRPr sz="3000">
-                <a:solidFill>
-                  <a:srgbClr val="414141"/>
-                </a:solidFill>
-                <a:latin typeface="Gill Sans Light" charset="0"/>
-                <a:ea typeface="ヒラギノ角ゴ ProN W3" charset="0"/>
-                <a:cs typeface="ヒラギノ角ゴ ProN W3" charset="0"/>
-                <a:sym typeface="Gill Sans Light" charset="0"/>
-              </a:defRPr>
-            </a:lvl5pPr>
-            <a:lvl6pPr marL="2514600" indent="-228600" algn="ctr" eaLnBrk="0" fontAlgn="base" hangingPunct="0">
-              <a:spcBef>
-                <a:spcPct val="0"/>
-              </a:spcBef>
-              <a:spcAft>
-                <a:spcPct val="0"/>
-              </a:spcAft>
-              <a:defRPr sz="3000">
-                <a:solidFill>
-                  <a:srgbClr val="414141"/>
-                </a:solidFill>
-                <a:latin typeface="Gill Sans Light" charset="0"/>
-                <a:ea typeface="ヒラギノ角ゴ ProN W3" charset="0"/>
-                <a:cs typeface="ヒラギノ角ゴ ProN W3" charset="0"/>
-                <a:sym typeface="Gill Sans Light" charset="0"/>
-              </a:defRPr>
-            </a:lvl6pPr>
-            <a:lvl7pPr marL="2971800" indent="-228600" algn="ctr" eaLnBrk="0" fontAlgn="base" hangingPunct="0">
-              <a:spcBef>
-                <a:spcPct val="0"/>
-              </a:spcBef>
-              <a:spcAft>
-                <a:spcPct val="0"/>
-              </a:spcAft>
-              <a:defRPr sz="3000">
-                <a:solidFill>
-                  <a:srgbClr val="414141"/>
-                </a:solidFill>
-                <a:latin typeface="Gill Sans Light" charset="0"/>
-                <a:ea typeface="ヒラギノ角ゴ ProN W3" charset="0"/>
-                <a:cs typeface="ヒラギノ角ゴ ProN W3" charset="0"/>
-                <a:sym typeface="Gill Sans Light" charset="0"/>
-              </a:defRPr>
-            </a:lvl7pPr>
-            <a:lvl8pPr marL="3429000" indent="-228600" algn="ctr" eaLnBrk="0" fontAlgn="base" hangingPunct="0">
-              <a:spcBef>
-                <a:spcPct val="0"/>
-              </a:spcBef>
-              <a:spcAft>
-                <a:spcPct val="0"/>
-              </a:spcAft>
-              <a:defRPr sz="3000">
-                <a:solidFill>
-                  <a:srgbClr val="414141"/>
-                </a:solidFill>
-                <a:latin typeface="Gill Sans Light" charset="0"/>
-                <a:ea typeface="ヒラギノ角ゴ ProN W3" charset="0"/>
-                <a:cs typeface="ヒラギノ角ゴ ProN W3" charset="0"/>
-                <a:sym typeface="Gill Sans Light" charset="0"/>
-              </a:defRPr>
-            </a:lvl8pPr>
-            <a:lvl9pPr marL="3886200" indent="-228600" algn="ctr" eaLnBrk="0" fontAlgn="base" hangingPunct="0">
-              <a:spcBef>
-                <a:spcPct val="0"/>
-              </a:spcBef>
-              <a:spcAft>
-                <a:spcPct val="0"/>
-              </a:spcAft>
-              <a:defRPr sz="3000">
-                <a:solidFill>
-                  <a:srgbClr val="414141"/>
-                </a:solidFill>
-                <a:latin typeface="Gill Sans Light" charset="0"/>
-                <a:ea typeface="ヒラギノ角ゴ ProN W3" charset="0"/>
-                <a:cs typeface="ヒラギノ角ゴ ProN W3" charset="0"/>
-                <a:sym typeface="Gill Sans Light" charset="0"/>
-              </a:defRPr>
-            </a:lvl9pPr>
-          </a:lstStyle>
-          <a:p>
-            <a:r>
-              <a:rPr lang="it-IT" sz="1600" b="1">
-                <a:solidFill>
-                  <a:srgbClr val="0F406B"/>
-                </a:solidFill>
-                <a:latin typeface="Arial"/>
-                <a:cs typeface="Arial"/>
-              </a:rPr>
-              <a:t>ENSEMBLE MODEL</a:t>
-            </a:r>
-            <a:endParaRPr lang="en-US"/>
-          </a:p>
-        </p:txBody>
-      </p:sp>
-      <p:sp>
-        <p:nvSpPr>
-          <p:cNvPr id="16" name="TextBox 15">
-            <a:extLst>
-              <a:ext uri="{FF2B5EF4-FFF2-40B4-BE49-F238E27FC236}">
-                <a16:creationId xmlns:a16="http://schemas.microsoft.com/office/drawing/2014/main" id="{9E1E1B40-36F8-93BD-C43A-7C15605642D3}"/>
-              </a:ext>
-            </a:extLst>
-          </p:cNvPr>
-          <p:cNvSpPr txBox="1"/>
-          <p:nvPr/>
-        </p:nvSpPr>
-        <p:spPr>
-          <a:xfrm>
-            <a:off x="13907007" y="3728870"/>
-            <a:ext cx="4519916" cy="1569660"/>
-          </a:xfrm>
-          <a:prstGeom prst="rect">
-            <a:avLst/>
-          </a:prstGeom>
-          <a:noFill/>
-        </p:spPr>
-        <p:txBody>
-          <a:bodyPr rot="0" spcFirstLastPara="0" vertOverflow="overflow" horzOverflow="overflow" vert="horz" wrap="square" lIns="91440" tIns="45720" rIns="91440" bIns="45720" numCol="1" spcCol="0" rtlCol="0" fromWordArt="0" anchor="t" anchorCtr="0" forceAA="0" compatLnSpc="1">
-            <a:prstTxWarp prst="textNoShape">
-              <a:avLst/>
-            </a:prstTxWarp>
-            <a:spAutoFit/>
-          </a:bodyPr>
-          <a:lstStyle/>
-          <a:p>
-            <a:pPr marL="285744" indent="-285744">
-              <a:buFont typeface="Arial"/>
-              <a:buChar char="•"/>
-            </a:pPr>
-            <a:r>
-              <a:rPr lang="en-US" sz="1600">
-                <a:latin typeface="Calibri"/>
-                <a:ea typeface="Calibri"/>
-                <a:cs typeface="Calibri"/>
-              </a:rPr>
-              <a:t>We define a randomized search over the features sets, the binary and multiclass models, and their hyperparameters</a:t>
-            </a:r>
-          </a:p>
-          <a:p>
-            <a:pPr marL="285744" indent="-285744">
-              <a:buFont typeface="Arial"/>
-              <a:buChar char="•"/>
-            </a:pPr>
-            <a:r>
-              <a:rPr lang="en-US" sz="1600">
-                <a:latin typeface="Calibri"/>
-                <a:ea typeface="Calibri"/>
-                <a:cs typeface="Calibri"/>
-              </a:rPr>
-              <a:t>The best parameters set is chosen by f1-score macro </a:t>
-            </a:r>
-          </a:p>
-          <a:p>
-            <a:pPr marL="285744" indent="-285744">
-              <a:buFont typeface="Arial"/>
-              <a:buChar char="•"/>
-            </a:pPr>
-            <a:endParaRPr lang="en-US" sz="1600">
-              <a:latin typeface="Arial"/>
-              <a:ea typeface="Calibri"/>
-              <a:cs typeface="Arial"/>
-            </a:endParaRPr>
-          </a:p>
-        </p:txBody>
-      </p:sp>
-      <p:grpSp>
-        <p:nvGrpSpPr>
-          <p:cNvPr id="14" name="Group 13">
-            <a:extLst>
-              <a:ext uri="{FF2B5EF4-FFF2-40B4-BE49-F238E27FC236}">
-                <a16:creationId xmlns:a16="http://schemas.microsoft.com/office/drawing/2014/main" id="{259253A8-D730-1BA1-3A74-24546F3D3912}"/>
-              </a:ext>
-            </a:extLst>
-          </p:cNvPr>
-          <p:cNvGrpSpPr/>
-          <p:nvPr/>
-        </p:nvGrpSpPr>
-        <p:grpSpPr>
-          <a:xfrm>
-            <a:off x="9591443" y="3238846"/>
-            <a:ext cx="4094772" cy="3067010"/>
-            <a:chOff x="1213104" y="3782332"/>
-            <a:chExt cx="3965904" cy="2708423"/>
-          </a:xfrm>
-        </p:grpSpPr>
-        <p:pic>
-          <p:nvPicPr>
-            <p:cNvPr id="12" name="Picture 11" descr="A screenshot of a computer&#10;&#10;AI-generated content may be incorrect.">
-              <a:extLst>
-                <a:ext uri="{FF2B5EF4-FFF2-40B4-BE49-F238E27FC236}">
-                  <a16:creationId xmlns:a16="http://schemas.microsoft.com/office/drawing/2014/main" id="{5D257B5B-C38E-67C1-BB89-93FED54168E3}"/>
-                </a:ext>
-              </a:extLst>
-            </p:cNvPr>
-            <p:cNvPicPr>
-              <a:picLocks noChangeAspect="1"/>
-            </p:cNvPicPr>
-            <p:nvPr/>
-          </p:nvPicPr>
-          <p:blipFill>
-            <a:blip r:embed="rId6"/>
-            <a:srcRect t="542" r="73" b="39270"/>
-            <a:stretch>
-              <a:fillRect/>
-            </a:stretch>
-          </p:blipFill>
-          <p:spPr>
-            <a:xfrm>
-              <a:off x="1213552" y="3782332"/>
-              <a:ext cx="3965456" cy="1630305"/>
-            </a:xfrm>
-            <a:prstGeom prst="rect">
-              <a:avLst/>
-            </a:prstGeom>
-          </p:spPr>
-        </p:pic>
-        <p:pic>
-          <p:nvPicPr>
-            <p:cNvPr id="13" name="Picture 12" descr="A screenshot of a computer code&#10;&#10;AI-generated content may be incorrect.">
-              <a:extLst>
-                <a:ext uri="{FF2B5EF4-FFF2-40B4-BE49-F238E27FC236}">
-                  <a16:creationId xmlns:a16="http://schemas.microsoft.com/office/drawing/2014/main" id="{CF5A9DB6-40AE-E92C-109C-4E137B16CEBC}"/>
-                </a:ext>
-              </a:extLst>
-            </p:cNvPr>
-            <p:cNvPicPr>
-              <a:picLocks noChangeAspect="1"/>
-            </p:cNvPicPr>
-            <p:nvPr/>
-          </p:nvPicPr>
-          <p:blipFill>
-            <a:blip r:embed="rId7"/>
-            <a:srcRect t="518" b="-442"/>
-            <a:stretch>
-              <a:fillRect/>
-            </a:stretch>
-          </p:blipFill>
-          <p:spPr>
-            <a:xfrm>
-              <a:off x="1213104" y="5410682"/>
-              <a:ext cx="3962400" cy="1080073"/>
-            </a:xfrm>
-            <a:prstGeom prst="rect">
-              <a:avLst/>
-            </a:prstGeom>
-          </p:spPr>
-        </p:pic>
-      </p:grpSp>
-      <p:pic>
-        <p:nvPicPr>
-          <p:cNvPr id="17" name="Picture 16" descr="A white rectangular box with black text&#10;&#10;AI-generated content may be incorrect.">
-            <a:extLst>
-              <a:ext uri="{FF2B5EF4-FFF2-40B4-BE49-F238E27FC236}">
-                <a16:creationId xmlns:a16="http://schemas.microsoft.com/office/drawing/2014/main" id="{0AF72FB4-5E8B-F04D-3E9D-40AC7175F34A}"/>
-              </a:ext>
-            </a:extLst>
-          </p:cNvPr>
-          <p:cNvPicPr>
-            <a:picLocks noChangeAspect="1"/>
-          </p:cNvPicPr>
-          <p:nvPr/>
-        </p:nvPicPr>
-        <p:blipFill>
-          <a:blip r:embed="rId8"/>
-          <a:srcRect t="-236" r="20216"/>
-          <a:stretch>
-            <a:fillRect/>
-          </a:stretch>
-        </p:blipFill>
-        <p:spPr>
-          <a:xfrm>
-            <a:off x="14021497" y="5202443"/>
-            <a:ext cx="4050594" cy="1039885"/>
-          </a:xfrm>
-          <a:prstGeom prst="rect">
-            <a:avLst/>
-          </a:prstGeom>
-        </p:spPr>
-      </p:pic>
-      <p:pic>
-        <p:nvPicPr>
-          <p:cNvPr id="9" name="Immagine 8">
-            <a:extLst>
-              <a:ext uri="{FF2B5EF4-FFF2-40B4-BE49-F238E27FC236}">
-                <a16:creationId xmlns:a16="http://schemas.microsoft.com/office/drawing/2014/main" id="{EB7161ED-AD66-5D5C-4F63-B2097DC98AC8}"/>
-              </a:ext>
-            </a:extLst>
-          </p:cNvPr>
-          <p:cNvPicPr>
-            <a:picLocks noChangeAspect="1"/>
-          </p:cNvPicPr>
-          <p:nvPr/>
-        </p:nvPicPr>
-        <p:blipFill>
-          <a:blip r:embed="rId9"/>
-          <a:stretch>
-            <a:fillRect/>
-          </a:stretch>
-        </p:blipFill>
-        <p:spPr>
-          <a:xfrm>
-            <a:off x="-9852211" y="1054575"/>
-            <a:ext cx="8917662" cy="4664394"/>
-          </a:xfrm>
-          <a:prstGeom prst="rect">
-            <a:avLst/>
-          </a:prstGeom>
-        </p:spPr>
-      </p:pic>
-      <p:sp>
-        <p:nvSpPr>
-          <p:cNvPr id="2" name="CasellaDiTesto 15">
-            <a:extLst>
-              <a:ext uri="{FF2B5EF4-FFF2-40B4-BE49-F238E27FC236}">
-                <a16:creationId xmlns:a16="http://schemas.microsoft.com/office/drawing/2014/main" id="{9E12692B-A3EF-6DCC-53BE-035DE6C76743}"/>
-              </a:ext>
-            </a:extLst>
-          </p:cNvPr>
-          <p:cNvSpPr txBox="1">
-            <a:spLocks noChangeArrowheads="1"/>
-          </p:cNvSpPr>
-          <p:nvPr/>
-        </p:nvSpPr>
-        <p:spPr bwMode="auto">
-          <a:xfrm>
-            <a:off x="2740385" y="762190"/>
-            <a:ext cx="3663235" cy="584775"/>
-          </a:xfrm>
-          <a:prstGeom prst="rect">
-            <a:avLst/>
-          </a:prstGeom>
-          <a:noFill/>
-          <a:ln>
-            <a:noFill/>
-          </a:ln>
-          <a:extLst>
-            <a:ext uri="{909E8E84-426E-40DD-AFC4-6F175D3DCCD1}">
-              <a14:hiddenFill xmlns:a14="http://schemas.microsoft.com/office/drawing/2010/main">
-                <a:solidFill>
-                  <a:srgbClr val="FFFFFF"/>
-                </a:solidFill>
-              </a14:hiddenFill>
-            </a:ext>
-            <a:ext uri="{91240B29-F687-4F45-9708-019B960494DF}">
-              <a14:hiddenLine xmlns:a14="http://schemas.microsoft.com/office/drawing/2010/main" w="9525">
-                <a:solidFill>
-                  <a:srgbClr val="000000"/>
-                </a:solidFill>
-                <a:miter lim="800000"/>
-                <a:headEnd/>
-                <a:tailEnd/>
-              </a14:hiddenLine>
-            </a:ext>
-          </a:extLst>
-        </p:spPr>
-        <p:txBody>
-          <a:bodyPr wrap="square" lIns="91440" tIns="45720" rIns="91440" bIns="45720" anchor="t">
-            <a:spAutoFit/>
-          </a:bodyPr>
-          <a:lstStyle>
-            <a:lvl1pPr eaLnBrk="0" hangingPunct="0">
-              <a:defRPr sz="3000">
-                <a:solidFill>
-                  <a:srgbClr val="414141"/>
-                </a:solidFill>
-                <a:latin typeface="Gill Sans Light" charset="0"/>
-                <a:ea typeface="ヒラギノ角ゴ ProN W3" charset="0"/>
-                <a:cs typeface="ヒラギノ角ゴ ProN W3" charset="0"/>
-                <a:sym typeface="Gill Sans Light" charset="0"/>
-              </a:defRPr>
-            </a:lvl1pPr>
-            <a:lvl2pPr marL="742950" indent="-285750" eaLnBrk="0" hangingPunct="0">
-              <a:defRPr sz="3000">
-                <a:solidFill>
-                  <a:srgbClr val="414141"/>
-                </a:solidFill>
-                <a:latin typeface="Gill Sans Light" charset="0"/>
-                <a:ea typeface="ヒラギノ角ゴ ProN W3" charset="0"/>
-                <a:cs typeface="ヒラギノ角ゴ ProN W3" charset="0"/>
-                <a:sym typeface="Gill Sans Light" charset="0"/>
-              </a:defRPr>
-            </a:lvl2pPr>
-            <a:lvl3pPr marL="1143000" indent="-228600" eaLnBrk="0" hangingPunct="0">
-              <a:defRPr sz="3000">
-                <a:solidFill>
-                  <a:srgbClr val="414141"/>
-                </a:solidFill>
-                <a:latin typeface="Gill Sans Light" charset="0"/>
-                <a:ea typeface="ヒラギノ角ゴ ProN W3" charset="0"/>
-                <a:cs typeface="ヒラギノ角ゴ ProN W3" charset="0"/>
-                <a:sym typeface="Gill Sans Light" charset="0"/>
-              </a:defRPr>
-            </a:lvl3pPr>
-            <a:lvl4pPr marL="1600200" indent="-228600" eaLnBrk="0" hangingPunct="0">
-              <a:defRPr sz="3000">
-                <a:solidFill>
-                  <a:srgbClr val="414141"/>
-                </a:solidFill>
-                <a:latin typeface="Gill Sans Light" charset="0"/>
-                <a:ea typeface="ヒラギノ角ゴ ProN W3" charset="0"/>
-                <a:cs typeface="ヒラギノ角ゴ ProN W3" charset="0"/>
-                <a:sym typeface="Gill Sans Light" charset="0"/>
-              </a:defRPr>
-            </a:lvl4pPr>
-            <a:lvl5pPr marL="2057400" indent="-228600" eaLnBrk="0" hangingPunct="0">
-              <a:defRPr sz="3000">
-                <a:solidFill>
-                  <a:srgbClr val="414141"/>
-                </a:solidFill>
-                <a:latin typeface="Gill Sans Light" charset="0"/>
-                <a:ea typeface="ヒラギノ角ゴ ProN W3" charset="0"/>
-                <a:cs typeface="ヒラギノ角ゴ ProN W3" charset="0"/>
-                <a:sym typeface="Gill Sans Light" charset="0"/>
-              </a:defRPr>
-            </a:lvl5pPr>
-            <a:lvl6pPr marL="2514600" indent="-228600" algn="ctr" eaLnBrk="0" fontAlgn="base" hangingPunct="0">
-              <a:spcBef>
-                <a:spcPct val="0"/>
-              </a:spcBef>
-              <a:spcAft>
-                <a:spcPct val="0"/>
-              </a:spcAft>
-              <a:defRPr sz="3000">
-                <a:solidFill>
-                  <a:srgbClr val="414141"/>
-                </a:solidFill>
-                <a:latin typeface="Gill Sans Light" charset="0"/>
-                <a:ea typeface="ヒラギノ角ゴ ProN W3" charset="0"/>
-                <a:cs typeface="ヒラギノ角ゴ ProN W3" charset="0"/>
-                <a:sym typeface="Gill Sans Light" charset="0"/>
-              </a:defRPr>
-            </a:lvl6pPr>
-            <a:lvl7pPr marL="2971800" indent="-228600" algn="ctr" eaLnBrk="0" fontAlgn="base" hangingPunct="0">
-              <a:spcBef>
-                <a:spcPct val="0"/>
-              </a:spcBef>
-              <a:spcAft>
-                <a:spcPct val="0"/>
-              </a:spcAft>
-              <a:defRPr sz="3000">
-                <a:solidFill>
-                  <a:srgbClr val="414141"/>
-                </a:solidFill>
-                <a:latin typeface="Gill Sans Light" charset="0"/>
-                <a:ea typeface="ヒラギノ角ゴ ProN W3" charset="0"/>
-                <a:cs typeface="ヒラギノ角ゴ ProN W3" charset="0"/>
-                <a:sym typeface="Gill Sans Light" charset="0"/>
-              </a:defRPr>
-            </a:lvl7pPr>
-            <a:lvl8pPr marL="3429000" indent="-228600" algn="ctr" eaLnBrk="0" fontAlgn="base" hangingPunct="0">
-              <a:spcBef>
-                <a:spcPct val="0"/>
-              </a:spcBef>
-              <a:spcAft>
-                <a:spcPct val="0"/>
-              </a:spcAft>
-              <a:defRPr sz="3000">
-                <a:solidFill>
-                  <a:srgbClr val="414141"/>
-                </a:solidFill>
-                <a:latin typeface="Gill Sans Light" charset="0"/>
-                <a:ea typeface="ヒラギノ角ゴ ProN W3" charset="0"/>
-                <a:cs typeface="ヒラギノ角ゴ ProN W3" charset="0"/>
-                <a:sym typeface="Gill Sans Light" charset="0"/>
-              </a:defRPr>
-            </a:lvl8pPr>
-            <a:lvl9pPr marL="3886200" indent="-228600" algn="ctr" eaLnBrk="0" fontAlgn="base" hangingPunct="0">
-              <a:spcBef>
-                <a:spcPct val="0"/>
-              </a:spcBef>
-              <a:spcAft>
-                <a:spcPct val="0"/>
-              </a:spcAft>
-              <a:defRPr sz="3000">
-                <a:solidFill>
-                  <a:srgbClr val="414141"/>
-                </a:solidFill>
-                <a:latin typeface="Gill Sans Light" charset="0"/>
-                <a:ea typeface="ヒラギノ角ゴ ProN W3" charset="0"/>
-                <a:cs typeface="ヒラギノ角ゴ ProN W3" charset="0"/>
-                <a:sym typeface="Gill Sans Light" charset="0"/>
-              </a:defRPr>
-            </a:lvl9pPr>
-          </a:lstStyle>
-          <a:p>
-            <a:pPr algn="ctr"/>
-            <a:r>
-              <a:rPr lang="it-IT" sz="1600" b="1">
-                <a:solidFill>
-                  <a:srgbClr val="0F406B"/>
-                </a:solidFill>
-                <a:latin typeface="Arial"/>
-                <a:cs typeface="Arial"/>
-              </a:rPr>
-              <a:t>STANDARD CLASSIFIERS METHOD </a:t>
-            </a:r>
-            <a:r>
-              <a:rPr lang="it-IT" sz="1600" b="1">
-                <a:solidFill>
-                  <a:srgbClr val="FF0000"/>
-                </a:solidFill>
-                <a:latin typeface="Arial"/>
-                <a:cs typeface="Arial"/>
-              </a:rPr>
-              <a:t>CAN’T BE USED DIRECTLY</a:t>
-            </a:r>
-          </a:p>
-        </p:txBody>
-      </p:sp>
-      <p:cxnSp>
-        <p:nvCxnSpPr>
-          <p:cNvPr id="11" name="Connettore 2 10">
-            <a:extLst>
-              <a:ext uri="{FF2B5EF4-FFF2-40B4-BE49-F238E27FC236}">
-                <a16:creationId xmlns:a16="http://schemas.microsoft.com/office/drawing/2014/main" id="{15CD292C-A6B5-8DBB-A8BF-6CB50CCFF235}"/>
-              </a:ext>
-            </a:extLst>
-          </p:cNvPr>
-          <p:cNvCxnSpPr>
-            <a:stCxn id="3" idx="3"/>
-            <a:endCxn id="2" idx="1"/>
-          </p:cNvCxnSpPr>
-          <p:nvPr/>
-        </p:nvCxnSpPr>
-        <p:spPr>
-          <a:xfrm>
-            <a:off x="1611520" y="1054577"/>
-            <a:ext cx="1128865" cy="0"/>
-          </a:xfrm>
-          <a:prstGeom prst="straightConnector1">
-            <a:avLst/>
-          </a:prstGeom>
-          <a:ln>
-            <a:solidFill>
-              <a:srgbClr val="0F406B"/>
-            </a:solidFill>
-            <a:tailEnd type="triangle"/>
-          </a:ln>
-          <a:effectLst/>
-        </p:spPr>
-        <p:style>
-          <a:lnRef idx="3">
-            <a:schemeClr val="accent1"/>
-          </a:lnRef>
-          <a:fillRef idx="0">
-            <a:schemeClr val="accent1"/>
-          </a:fillRef>
-          <a:effectRef idx="2">
-            <a:schemeClr val="accent1"/>
-          </a:effectRef>
-          <a:fontRef idx="minor">
-            <a:schemeClr val="tx1"/>
-          </a:fontRef>
-        </p:style>
-      </p:cxnSp>
-      <p:sp>
-        <p:nvSpPr>
-          <p:cNvPr id="18" name="CasellaDiTesto 15">
-            <a:extLst>
-              <a:ext uri="{FF2B5EF4-FFF2-40B4-BE49-F238E27FC236}">
-                <a16:creationId xmlns:a16="http://schemas.microsoft.com/office/drawing/2014/main" id="{5DDD5F93-44F2-88E1-344A-33BF84105F13}"/>
-              </a:ext>
-            </a:extLst>
-          </p:cNvPr>
-          <p:cNvSpPr txBox="1">
-            <a:spLocks noChangeArrowheads="1"/>
-          </p:cNvSpPr>
-          <p:nvPr/>
-        </p:nvSpPr>
-        <p:spPr bwMode="auto">
-          <a:xfrm>
-            <a:off x="2740384" y="1537865"/>
-            <a:ext cx="3663235" cy="338554"/>
-          </a:xfrm>
-          <a:prstGeom prst="rect">
-            <a:avLst/>
-          </a:prstGeom>
-          <a:noFill/>
-          <a:ln>
-            <a:noFill/>
-          </a:ln>
-          <a:extLst>
-            <a:ext uri="{909E8E84-426E-40DD-AFC4-6F175D3DCCD1}">
-              <a14:hiddenFill xmlns:a14="http://schemas.microsoft.com/office/drawing/2010/main">
-                <a:solidFill>
-                  <a:srgbClr val="FFFFFF"/>
-                </a:solidFill>
-              </a14:hiddenFill>
-            </a:ext>
-            <a:ext uri="{91240B29-F687-4F45-9708-019B960494DF}">
-              <a14:hiddenLine xmlns:a14="http://schemas.microsoft.com/office/drawing/2010/main" w="9525">
-                <a:solidFill>
-                  <a:srgbClr val="000000"/>
-                </a:solidFill>
-                <a:miter lim="800000"/>
-                <a:headEnd/>
-                <a:tailEnd/>
-              </a14:hiddenLine>
-            </a:ext>
-          </a:extLst>
-        </p:spPr>
-        <p:txBody>
-          <a:bodyPr wrap="square" lIns="91440" tIns="45720" rIns="91440" bIns="45720" anchor="t">
-            <a:spAutoFit/>
-          </a:bodyPr>
-          <a:lstStyle>
-            <a:lvl1pPr eaLnBrk="0" hangingPunct="0">
-              <a:defRPr sz="3000">
-                <a:solidFill>
-                  <a:srgbClr val="414141"/>
-                </a:solidFill>
-                <a:latin typeface="Gill Sans Light" charset="0"/>
-                <a:ea typeface="ヒラギノ角ゴ ProN W3" charset="0"/>
-                <a:cs typeface="ヒラギノ角ゴ ProN W3" charset="0"/>
-                <a:sym typeface="Gill Sans Light" charset="0"/>
-              </a:defRPr>
-            </a:lvl1pPr>
-            <a:lvl2pPr marL="742950" indent="-285750" eaLnBrk="0" hangingPunct="0">
-              <a:defRPr sz="3000">
-                <a:solidFill>
-                  <a:srgbClr val="414141"/>
-                </a:solidFill>
-                <a:latin typeface="Gill Sans Light" charset="0"/>
-                <a:ea typeface="ヒラギノ角ゴ ProN W3" charset="0"/>
-                <a:cs typeface="ヒラギノ角ゴ ProN W3" charset="0"/>
-                <a:sym typeface="Gill Sans Light" charset="0"/>
-              </a:defRPr>
-            </a:lvl2pPr>
-            <a:lvl3pPr marL="1143000" indent="-228600" eaLnBrk="0" hangingPunct="0">
-              <a:defRPr sz="3000">
-                <a:solidFill>
-                  <a:srgbClr val="414141"/>
-                </a:solidFill>
-                <a:latin typeface="Gill Sans Light" charset="0"/>
-                <a:ea typeface="ヒラギノ角ゴ ProN W3" charset="0"/>
-                <a:cs typeface="ヒラギノ角ゴ ProN W3" charset="0"/>
-                <a:sym typeface="Gill Sans Light" charset="0"/>
-              </a:defRPr>
-            </a:lvl3pPr>
-            <a:lvl4pPr marL="1600200" indent="-228600" eaLnBrk="0" hangingPunct="0">
-              <a:defRPr sz="3000">
-                <a:solidFill>
-                  <a:srgbClr val="414141"/>
-                </a:solidFill>
-                <a:latin typeface="Gill Sans Light" charset="0"/>
-                <a:ea typeface="ヒラギノ角ゴ ProN W3" charset="0"/>
-                <a:cs typeface="ヒラギノ角ゴ ProN W3" charset="0"/>
-                <a:sym typeface="Gill Sans Light" charset="0"/>
-              </a:defRPr>
-            </a:lvl4pPr>
-            <a:lvl5pPr marL="2057400" indent="-228600" eaLnBrk="0" hangingPunct="0">
-              <a:defRPr sz="3000">
-                <a:solidFill>
-                  <a:srgbClr val="414141"/>
-                </a:solidFill>
-                <a:latin typeface="Gill Sans Light" charset="0"/>
-                <a:ea typeface="ヒラギノ角ゴ ProN W3" charset="0"/>
-                <a:cs typeface="ヒラギノ角ゴ ProN W3" charset="0"/>
-                <a:sym typeface="Gill Sans Light" charset="0"/>
-              </a:defRPr>
-            </a:lvl5pPr>
-            <a:lvl6pPr marL="2514600" indent="-228600" algn="ctr" eaLnBrk="0" fontAlgn="base" hangingPunct="0">
-              <a:spcBef>
-                <a:spcPct val="0"/>
-              </a:spcBef>
-              <a:spcAft>
-                <a:spcPct val="0"/>
-              </a:spcAft>
-              <a:defRPr sz="3000">
-                <a:solidFill>
-                  <a:srgbClr val="414141"/>
-                </a:solidFill>
-                <a:latin typeface="Gill Sans Light" charset="0"/>
-                <a:ea typeface="ヒラギノ角ゴ ProN W3" charset="0"/>
-                <a:cs typeface="ヒラギノ角ゴ ProN W3" charset="0"/>
-                <a:sym typeface="Gill Sans Light" charset="0"/>
-              </a:defRPr>
-            </a:lvl6pPr>
-            <a:lvl7pPr marL="2971800" indent="-228600" algn="ctr" eaLnBrk="0" fontAlgn="base" hangingPunct="0">
-              <a:spcBef>
-                <a:spcPct val="0"/>
-              </a:spcBef>
-              <a:spcAft>
-                <a:spcPct val="0"/>
-              </a:spcAft>
-              <a:defRPr sz="3000">
-                <a:solidFill>
-                  <a:srgbClr val="414141"/>
-                </a:solidFill>
-                <a:latin typeface="Gill Sans Light" charset="0"/>
-                <a:ea typeface="ヒラギノ角ゴ ProN W3" charset="0"/>
-                <a:cs typeface="ヒラギノ角ゴ ProN W3" charset="0"/>
-                <a:sym typeface="Gill Sans Light" charset="0"/>
-              </a:defRPr>
-            </a:lvl7pPr>
-            <a:lvl8pPr marL="3429000" indent="-228600" algn="ctr" eaLnBrk="0" fontAlgn="base" hangingPunct="0">
-              <a:spcBef>
-                <a:spcPct val="0"/>
-              </a:spcBef>
-              <a:spcAft>
-                <a:spcPct val="0"/>
-              </a:spcAft>
-              <a:defRPr sz="3000">
-                <a:solidFill>
-                  <a:srgbClr val="414141"/>
-                </a:solidFill>
-                <a:latin typeface="Gill Sans Light" charset="0"/>
-                <a:ea typeface="ヒラギノ角ゴ ProN W3" charset="0"/>
-                <a:cs typeface="ヒラギノ角ゴ ProN W3" charset="0"/>
-                <a:sym typeface="Gill Sans Light" charset="0"/>
-              </a:defRPr>
-            </a:lvl8pPr>
-            <a:lvl9pPr marL="3886200" indent="-228600" algn="ctr" eaLnBrk="0" fontAlgn="base" hangingPunct="0">
-              <a:spcBef>
-                <a:spcPct val="0"/>
-              </a:spcBef>
-              <a:spcAft>
-                <a:spcPct val="0"/>
-              </a:spcAft>
-              <a:defRPr sz="3000">
-                <a:solidFill>
-                  <a:srgbClr val="414141"/>
-                </a:solidFill>
-                <a:latin typeface="Gill Sans Light" charset="0"/>
-                <a:ea typeface="ヒラギノ角ゴ ProN W3" charset="0"/>
-                <a:cs typeface="ヒラギノ角ゴ ProN W3" charset="0"/>
-                <a:sym typeface="Gill Sans Light" charset="0"/>
-              </a:defRPr>
-            </a:lvl9pPr>
-          </a:lstStyle>
-          <a:p>
-            <a:pPr algn="ctr"/>
-            <a:r>
-              <a:rPr lang="it-IT" sz="1600" b="1">
-                <a:solidFill>
-                  <a:srgbClr val="0F406B"/>
-                </a:solidFill>
-                <a:latin typeface="Arial"/>
-                <a:cs typeface="Arial"/>
-              </a:rPr>
-              <a:t>CUSTOM METHOD : </a:t>
-            </a:r>
-            <a:endParaRPr lang="it-IT" sz="1600" b="1">
-              <a:solidFill>
-                <a:srgbClr val="FF0000"/>
-              </a:solidFill>
-              <a:latin typeface="Arial"/>
-              <a:cs typeface="Arial"/>
-            </a:endParaRPr>
-          </a:p>
-        </p:txBody>
-      </p:sp>
-      <p:pic>
-        <p:nvPicPr>
-          <p:cNvPr id="20" name="Elemento grafico 19" descr="Punto esclamativo contorno">
-            <a:extLst>
-              <a:ext uri="{FF2B5EF4-FFF2-40B4-BE49-F238E27FC236}">
-                <a16:creationId xmlns:a16="http://schemas.microsoft.com/office/drawing/2014/main" id="{474DA30C-2633-7127-F023-3BBEB32B2340}"/>
-              </a:ext>
-            </a:extLst>
-          </p:cNvPr>
-          <p:cNvPicPr>
-            <a:picLocks noChangeAspect="1"/>
-          </p:cNvPicPr>
-          <p:nvPr/>
-        </p:nvPicPr>
-        <p:blipFill>
-          <a:blip r:embed="rId10">
-            <a:extLst>
-              <a:ext uri="{96DAC541-7B7A-43D3-8B79-37D633B846F1}">
-                <asvg:svgBlip xmlns:asvg="http://schemas.microsoft.com/office/drawing/2016/SVG/main" r:embed="rId11"/>
-              </a:ext>
-            </a:extLst>
-          </a:blip>
-          <a:stretch>
-            <a:fillRect/>
-          </a:stretch>
-        </p:blipFill>
-        <p:spPr>
-          <a:xfrm>
-            <a:off x="6245230" y="650886"/>
-            <a:ext cx="820419" cy="820419"/>
-          </a:xfrm>
-          <a:prstGeom prst="rect">
-            <a:avLst/>
-          </a:prstGeom>
-        </p:spPr>
-      </p:pic>
-      <p:sp>
-        <p:nvSpPr>
-          <p:cNvPr id="21" name="Parentesi graffa aperta 20">
-            <a:extLst>
-              <a:ext uri="{FF2B5EF4-FFF2-40B4-BE49-F238E27FC236}">
-                <a16:creationId xmlns:a16="http://schemas.microsoft.com/office/drawing/2014/main" id="{CFC0D66D-8167-8B74-0330-C4D5C094A28A}"/>
-              </a:ext>
-            </a:extLst>
-          </p:cNvPr>
-          <p:cNvSpPr/>
-          <p:nvPr/>
-        </p:nvSpPr>
-        <p:spPr>
-          <a:xfrm rot="16200000">
-            <a:off x="4519281" y="-370225"/>
-            <a:ext cx="151563" cy="3534346"/>
-          </a:xfrm>
-          <a:prstGeom prst="leftBrace">
-            <a:avLst/>
-          </a:prstGeom>
-          <a:ln>
-            <a:solidFill>
-              <a:srgbClr val="0F406B"/>
-            </a:solidFill>
-          </a:ln>
-          <a:effectLst/>
-        </p:spPr>
-        <p:style>
-          <a:lnRef idx="2">
-            <a:schemeClr val="accent1"/>
-          </a:lnRef>
-          <a:fillRef idx="0">
-            <a:schemeClr val="accent1"/>
-          </a:fillRef>
-          <a:effectRef idx="1">
-            <a:schemeClr val="accent1"/>
-          </a:effectRef>
-          <a:fontRef idx="minor">
-            <a:schemeClr val="tx1"/>
-          </a:fontRef>
-        </p:style>
-        <p:txBody>
-          <a:bodyPr rtlCol="0" anchor="ctr"/>
-          <a:lstStyle/>
-          <a:p>
-            <a:pPr algn="ctr"/>
-            <a:endParaRPr lang="en-US"/>
-          </a:p>
-        </p:txBody>
-      </p:sp>
-      <p:pic>
-        <p:nvPicPr>
-          <p:cNvPr id="25" name="Immagine 24" descr="Immagine che contiene Carattere, tipografia, testo, bianco&#10;&#10;Il contenuto generato dall'IA potrebbe non essere corretto.">
-            <a:extLst>
-              <a:ext uri="{FF2B5EF4-FFF2-40B4-BE49-F238E27FC236}">
-                <a16:creationId xmlns:a16="http://schemas.microsoft.com/office/drawing/2014/main" id="{84CD8888-C1AB-9F5F-9B79-D9A18F0129A7}"/>
-              </a:ext>
-            </a:extLst>
-          </p:cNvPr>
-          <p:cNvPicPr>
-            <a:picLocks noChangeAspect="1"/>
-          </p:cNvPicPr>
-          <p:nvPr/>
-        </p:nvPicPr>
-        <p:blipFill>
-          <a:blip r:embed="rId12"/>
-          <a:stretch>
-            <a:fillRect/>
-          </a:stretch>
-        </p:blipFill>
-        <p:spPr>
-          <a:xfrm>
-            <a:off x="3355184" y="2202085"/>
-            <a:ext cx="2704662" cy="528912"/>
-          </a:xfrm>
-          <a:prstGeom prst="rect">
-            <a:avLst/>
-          </a:prstGeom>
-        </p:spPr>
-      </p:pic>
-      <p:pic>
-        <p:nvPicPr>
-          <p:cNvPr id="29" name="Immagine 28" descr="Immagine che contiene Carattere, testo, linea, tipografia&#10;&#10;Il contenuto generato dall'IA potrebbe non essere corretto.">
-            <a:extLst>
-              <a:ext uri="{FF2B5EF4-FFF2-40B4-BE49-F238E27FC236}">
-                <a16:creationId xmlns:a16="http://schemas.microsoft.com/office/drawing/2014/main" id="{47C55A1B-CD4E-AF76-F89C-8A0F5516EB70}"/>
-              </a:ext>
-            </a:extLst>
-          </p:cNvPr>
-          <p:cNvPicPr>
-            <a:picLocks noChangeAspect="1"/>
-          </p:cNvPicPr>
-          <p:nvPr/>
-        </p:nvPicPr>
-        <p:blipFill>
-          <a:blip r:embed="rId13"/>
-          <a:stretch>
-            <a:fillRect/>
-          </a:stretch>
-        </p:blipFill>
-        <p:spPr>
-          <a:xfrm>
-            <a:off x="98145" y="3593539"/>
-            <a:ext cx="6458446" cy="975944"/>
-          </a:xfrm>
-          <a:prstGeom prst="rect">
-            <a:avLst/>
-          </a:prstGeom>
-        </p:spPr>
-      </p:pic>
-      <p:sp>
-        <p:nvSpPr>
-          <p:cNvPr id="38" name="CasellaDiTesto 37">
-            <a:extLst>
-              <a:ext uri="{FF2B5EF4-FFF2-40B4-BE49-F238E27FC236}">
-                <a16:creationId xmlns:a16="http://schemas.microsoft.com/office/drawing/2014/main" id="{7225C588-1B79-95E6-F66F-92AEE1C4C457}"/>
-              </a:ext>
-            </a:extLst>
-          </p:cNvPr>
-          <p:cNvSpPr txBox="1"/>
-          <p:nvPr/>
-        </p:nvSpPr>
-        <p:spPr>
-          <a:xfrm>
-            <a:off x="3044753" y="1905941"/>
-            <a:ext cx="3219664" cy="369332"/>
-          </a:xfrm>
-          <a:prstGeom prst="rect">
-            <a:avLst/>
-          </a:prstGeom>
-          <a:noFill/>
-        </p:spPr>
-        <p:txBody>
-          <a:bodyPr wrap="none" rtlCol="0">
-            <a:spAutoFit/>
-          </a:bodyPr>
-          <a:lstStyle/>
-          <a:p>
-            <a:pPr algn="ctr"/>
-            <a:r>
-              <a:rPr lang="it-IT">
-                <a:latin typeface="Arial" panose="020B0604020202020204" pitchFamily="34" charset="0"/>
-                <a:cs typeface="Arial" panose="020B0604020202020204" pitchFamily="34" charset="0"/>
-              </a:rPr>
-              <a:t>Use STAGE 1 </a:t>
-            </a:r>
-            <a:r>
-              <a:rPr lang="it-IT" err="1">
-                <a:latin typeface="Arial" panose="020B0604020202020204" pitchFamily="34" charset="0"/>
-                <a:cs typeface="Arial" panose="020B0604020202020204" pitchFamily="34" charset="0"/>
-              </a:rPr>
-              <a:t>predict_proba</a:t>
-            </a:r>
-            <a:r>
-              <a:rPr lang="it-IT">
-                <a:latin typeface="Arial" panose="020B0604020202020204" pitchFamily="34" charset="0"/>
-                <a:cs typeface="Arial" panose="020B0604020202020204" pitchFamily="34" charset="0"/>
-              </a:rPr>
-              <a:t> :</a:t>
-            </a:r>
-            <a:endParaRPr lang="en-US">
-              <a:latin typeface="Arial" panose="020B0604020202020204" pitchFamily="34" charset="0"/>
-              <a:cs typeface="Arial" panose="020B0604020202020204" pitchFamily="34" charset="0"/>
-            </a:endParaRPr>
-          </a:p>
-        </p:txBody>
-      </p:sp>
-      <p:sp>
-        <p:nvSpPr>
-          <p:cNvPr id="39" name="CasellaDiTesto 38">
-            <a:extLst>
-              <a:ext uri="{FF2B5EF4-FFF2-40B4-BE49-F238E27FC236}">
-                <a16:creationId xmlns:a16="http://schemas.microsoft.com/office/drawing/2014/main" id="{DC2566E1-BB62-2FAA-FDEE-640D4489EC18}"/>
-              </a:ext>
-            </a:extLst>
-          </p:cNvPr>
-          <p:cNvSpPr txBox="1"/>
-          <p:nvPr/>
-        </p:nvSpPr>
-        <p:spPr>
-          <a:xfrm>
-            <a:off x="9463" y="2834792"/>
-            <a:ext cx="3630033" cy="646331"/>
-          </a:xfrm>
-          <a:prstGeom prst="rect">
-            <a:avLst/>
-          </a:prstGeom>
-          <a:noFill/>
-        </p:spPr>
-        <p:txBody>
-          <a:bodyPr wrap="none" rtlCol="0">
-            <a:spAutoFit/>
-          </a:bodyPr>
-          <a:lstStyle/>
-          <a:p>
-            <a:pPr algn="ctr"/>
-            <a:r>
-              <a:rPr lang="it-IT">
-                <a:latin typeface="Arial" panose="020B0604020202020204" pitchFamily="34" charset="0"/>
-                <a:cs typeface="Arial" panose="020B0604020202020204" pitchFamily="34" charset="0"/>
-              </a:rPr>
-              <a:t>For samples </a:t>
-            </a:r>
-            <a:r>
-              <a:rPr lang="it-IT" b="1" err="1">
-                <a:solidFill>
-                  <a:srgbClr val="0F406B"/>
-                </a:solidFill>
-                <a:latin typeface="Arial" panose="020B0604020202020204" pitchFamily="34" charset="0"/>
-                <a:cs typeface="Arial" panose="020B0604020202020204" pitchFamily="34" charset="0"/>
-              </a:rPr>
-              <a:t>where</a:t>
-            </a:r>
-            <a:r>
-              <a:rPr lang="it-IT" b="1">
-                <a:solidFill>
-                  <a:srgbClr val="0F406B"/>
-                </a:solidFill>
-                <a:latin typeface="Arial" panose="020B0604020202020204" pitchFamily="34" charset="0"/>
-                <a:cs typeface="Arial" panose="020B0604020202020204" pitchFamily="34" charset="0"/>
-              </a:rPr>
-              <a:t> the STAGE 1</a:t>
-            </a:r>
-          </a:p>
-          <a:p>
-            <a:pPr algn="ctr"/>
-            <a:r>
-              <a:rPr lang="it-IT" b="1">
-                <a:solidFill>
-                  <a:srgbClr val="0F406B"/>
-                </a:solidFill>
-                <a:latin typeface="Arial" panose="020B0604020202020204" pitchFamily="34" charset="0"/>
-                <a:cs typeface="Arial" panose="020B0604020202020204" pitchFamily="34" charset="0"/>
-              </a:rPr>
-              <a:t> </a:t>
-            </a:r>
-            <a:r>
-              <a:rPr lang="it-IT" b="1" err="1">
-                <a:solidFill>
-                  <a:srgbClr val="0F406B"/>
-                </a:solidFill>
-                <a:latin typeface="Arial" panose="020B0604020202020204" pitchFamily="34" charset="0"/>
-                <a:cs typeface="Arial" panose="020B0604020202020204" pitchFamily="34" charset="0"/>
-              </a:rPr>
-              <a:t>assigned</a:t>
-            </a:r>
-            <a:r>
-              <a:rPr lang="it-IT" b="1">
-                <a:solidFill>
-                  <a:srgbClr val="0F406B"/>
-                </a:solidFill>
-                <a:latin typeface="Arial" panose="020B0604020202020204" pitchFamily="34" charset="0"/>
-                <a:cs typeface="Arial" panose="020B0604020202020204" pitchFamily="34" charset="0"/>
-              </a:rPr>
-              <a:t> class 0 </a:t>
-            </a:r>
-            <a:r>
-              <a:rPr lang="it-IT">
-                <a:latin typeface="Arial" panose="020B0604020202020204" pitchFamily="34" charset="0"/>
-                <a:cs typeface="Arial" panose="020B0604020202020204" pitchFamily="34" charset="0"/>
-              </a:rPr>
-              <a:t>:</a:t>
-            </a:r>
-            <a:endParaRPr lang="en-US">
-              <a:latin typeface="Arial" panose="020B0604020202020204" pitchFamily="34" charset="0"/>
-              <a:cs typeface="Arial" panose="020B0604020202020204" pitchFamily="34" charset="0"/>
-            </a:endParaRPr>
-          </a:p>
-        </p:txBody>
-      </p:sp>
-      <p:sp>
-        <p:nvSpPr>
-          <p:cNvPr id="42" name="CasellaDiTesto 41">
-            <a:extLst>
-              <a:ext uri="{FF2B5EF4-FFF2-40B4-BE49-F238E27FC236}">
-                <a16:creationId xmlns:a16="http://schemas.microsoft.com/office/drawing/2014/main" id="{6050BEFB-CA8E-7E88-DF7A-9261E9508D05}"/>
-              </a:ext>
-            </a:extLst>
-          </p:cNvPr>
-          <p:cNvSpPr txBox="1"/>
-          <p:nvPr/>
-        </p:nvSpPr>
-        <p:spPr>
-          <a:xfrm>
-            <a:off x="5370371" y="4962505"/>
-            <a:ext cx="3630033" cy="646331"/>
-          </a:xfrm>
-          <a:prstGeom prst="rect">
-            <a:avLst/>
-          </a:prstGeom>
-          <a:noFill/>
-        </p:spPr>
-        <p:txBody>
-          <a:bodyPr wrap="none" rtlCol="0">
-            <a:spAutoFit/>
-          </a:bodyPr>
-          <a:lstStyle/>
-          <a:p>
-            <a:pPr algn="ctr"/>
-            <a:r>
-              <a:rPr lang="it-IT">
-                <a:latin typeface="Arial" panose="020B0604020202020204" pitchFamily="34" charset="0"/>
-                <a:cs typeface="Arial" panose="020B0604020202020204" pitchFamily="34" charset="0"/>
-              </a:rPr>
-              <a:t>For samples </a:t>
-            </a:r>
-            <a:r>
-              <a:rPr lang="it-IT" b="1" err="1">
-                <a:solidFill>
-                  <a:srgbClr val="0F406B"/>
-                </a:solidFill>
-                <a:latin typeface="Arial" panose="020B0604020202020204" pitchFamily="34" charset="0"/>
-                <a:cs typeface="Arial" panose="020B0604020202020204" pitchFamily="34" charset="0"/>
-              </a:rPr>
-              <a:t>where</a:t>
-            </a:r>
-            <a:r>
-              <a:rPr lang="it-IT" b="1">
-                <a:solidFill>
-                  <a:srgbClr val="0F406B"/>
-                </a:solidFill>
-                <a:latin typeface="Arial" panose="020B0604020202020204" pitchFamily="34" charset="0"/>
-                <a:cs typeface="Arial" panose="020B0604020202020204" pitchFamily="34" charset="0"/>
-              </a:rPr>
-              <a:t> the STAGE 1</a:t>
-            </a:r>
-          </a:p>
-          <a:p>
-            <a:pPr algn="ctr"/>
-            <a:r>
-              <a:rPr lang="it-IT" b="1">
-                <a:solidFill>
-                  <a:srgbClr val="0F406B"/>
-                </a:solidFill>
-                <a:latin typeface="Arial" panose="020B0604020202020204" pitchFamily="34" charset="0"/>
-                <a:cs typeface="Arial" panose="020B0604020202020204" pitchFamily="34" charset="0"/>
-              </a:rPr>
-              <a:t> </a:t>
-            </a:r>
-            <a:r>
-              <a:rPr lang="it-IT" b="1" err="1">
-                <a:solidFill>
-                  <a:srgbClr val="0F406B"/>
-                </a:solidFill>
-                <a:latin typeface="Arial" panose="020B0604020202020204" pitchFamily="34" charset="0"/>
-                <a:cs typeface="Arial" panose="020B0604020202020204" pitchFamily="34" charset="0"/>
-              </a:rPr>
-              <a:t>assigned</a:t>
-            </a:r>
-            <a:r>
-              <a:rPr lang="it-IT" b="1">
-                <a:solidFill>
-                  <a:srgbClr val="0F406B"/>
-                </a:solidFill>
-                <a:latin typeface="Arial" panose="020B0604020202020204" pitchFamily="34" charset="0"/>
-                <a:cs typeface="Arial" panose="020B0604020202020204" pitchFamily="34" charset="0"/>
-              </a:rPr>
-              <a:t> class != 0 </a:t>
-            </a:r>
-            <a:r>
-              <a:rPr lang="it-IT">
-                <a:latin typeface="Arial" panose="020B0604020202020204" pitchFamily="34" charset="0"/>
-                <a:cs typeface="Arial" panose="020B0604020202020204" pitchFamily="34" charset="0"/>
-              </a:rPr>
-              <a:t>:</a:t>
-            </a:r>
-            <a:endParaRPr lang="en-US">
-              <a:latin typeface="Arial" panose="020B0604020202020204" pitchFamily="34" charset="0"/>
-              <a:cs typeface="Arial" panose="020B0604020202020204" pitchFamily="34" charset="0"/>
-            </a:endParaRPr>
-          </a:p>
-        </p:txBody>
-      </p:sp>
-      <p:sp>
-        <p:nvSpPr>
-          <p:cNvPr id="43" name="Parentesi graffa aperta 42">
-            <a:extLst>
-              <a:ext uri="{FF2B5EF4-FFF2-40B4-BE49-F238E27FC236}">
-                <a16:creationId xmlns:a16="http://schemas.microsoft.com/office/drawing/2014/main" id="{3BE9626B-CFBB-8D58-D6DD-6FB17C0C62C9}"/>
-              </a:ext>
-            </a:extLst>
-          </p:cNvPr>
-          <p:cNvSpPr/>
-          <p:nvPr/>
-        </p:nvSpPr>
-        <p:spPr>
-          <a:xfrm rot="16200000">
-            <a:off x="2590891" y="3578621"/>
-            <a:ext cx="82189" cy="2015024"/>
-          </a:xfrm>
-          <a:prstGeom prst="leftBrace">
-            <a:avLst/>
-          </a:prstGeom>
-          <a:ln>
-            <a:solidFill>
-              <a:srgbClr val="0F406B"/>
-            </a:solidFill>
-          </a:ln>
-          <a:effectLst/>
-        </p:spPr>
-        <p:style>
-          <a:lnRef idx="2">
-            <a:schemeClr val="accent1"/>
-          </a:lnRef>
-          <a:fillRef idx="0">
-            <a:schemeClr val="accent1"/>
-          </a:fillRef>
-          <a:effectRef idx="1">
-            <a:schemeClr val="accent1"/>
-          </a:effectRef>
-          <a:fontRef idx="minor">
-            <a:schemeClr val="tx1"/>
-          </a:fontRef>
-        </p:style>
-        <p:txBody>
-          <a:bodyPr rtlCol="0" anchor="ctr"/>
-          <a:lstStyle/>
-          <a:p>
-            <a:pPr algn="ctr"/>
-            <a:endParaRPr lang="en-US"/>
-          </a:p>
-        </p:txBody>
-      </p:sp>
-      <p:sp>
-        <p:nvSpPr>
-          <p:cNvPr id="44" name="CasellaDiTesto 43">
-            <a:extLst>
-              <a:ext uri="{FF2B5EF4-FFF2-40B4-BE49-F238E27FC236}">
-                <a16:creationId xmlns:a16="http://schemas.microsoft.com/office/drawing/2014/main" id="{2295143C-FF4E-4460-ACFA-5020E0B6E3A0}"/>
-              </a:ext>
-            </a:extLst>
-          </p:cNvPr>
-          <p:cNvSpPr txBox="1"/>
-          <p:nvPr/>
-        </p:nvSpPr>
-        <p:spPr>
-          <a:xfrm>
-            <a:off x="1331873" y="4777661"/>
-            <a:ext cx="2645275" cy="338554"/>
-          </a:xfrm>
-          <a:prstGeom prst="rect">
-            <a:avLst/>
-          </a:prstGeom>
-          <a:noFill/>
-        </p:spPr>
-        <p:txBody>
-          <a:bodyPr wrap="none" rtlCol="0">
-            <a:spAutoFit/>
-          </a:bodyPr>
-          <a:lstStyle/>
-          <a:p>
-            <a:pPr algn="ctr"/>
-            <a:r>
-              <a:rPr lang="it-IT" sz="1600">
-                <a:latin typeface="Arial" panose="020B0604020202020204" pitchFamily="34" charset="0"/>
-                <a:cs typeface="Arial" panose="020B0604020202020204" pitchFamily="34" charset="0"/>
-              </a:rPr>
-              <a:t>UNIFORM DISTRIBUTION</a:t>
-            </a:r>
-            <a:endParaRPr lang="en-US" sz="1600">
-              <a:latin typeface="Arial" panose="020B0604020202020204" pitchFamily="34" charset="0"/>
-              <a:cs typeface="Arial" panose="020B0604020202020204" pitchFamily="34" charset="0"/>
-            </a:endParaRPr>
-          </a:p>
-        </p:txBody>
-      </p:sp>
-      <p:cxnSp>
-        <p:nvCxnSpPr>
-          <p:cNvPr id="49" name="Connettore a gomito 48">
-            <a:extLst>
-              <a:ext uri="{FF2B5EF4-FFF2-40B4-BE49-F238E27FC236}">
-                <a16:creationId xmlns:a16="http://schemas.microsoft.com/office/drawing/2014/main" id="{7FD06472-AFFD-5280-4512-2A97032BCD5F}"/>
-              </a:ext>
-            </a:extLst>
-          </p:cNvPr>
-          <p:cNvCxnSpPr>
-            <a:stCxn id="38" idx="1"/>
-            <a:endCxn id="39" idx="0"/>
-          </p:cNvCxnSpPr>
-          <p:nvPr/>
-        </p:nvCxnSpPr>
-        <p:spPr>
-          <a:xfrm rot="10800000" flipV="1">
-            <a:off x="1824481" y="2090606"/>
-            <a:ext cx="1220273" cy="744185"/>
-          </a:xfrm>
-          <a:prstGeom prst="bentConnector2">
-            <a:avLst/>
-          </a:prstGeom>
-          <a:ln>
-            <a:solidFill>
-              <a:srgbClr val="0F406B"/>
-            </a:solidFill>
-            <a:tailEnd type="triangle"/>
-          </a:ln>
-          <a:effectLst/>
-        </p:spPr>
-        <p:style>
-          <a:lnRef idx="3">
-            <a:schemeClr val="accent1"/>
-          </a:lnRef>
-          <a:fillRef idx="0">
-            <a:schemeClr val="accent1"/>
-          </a:fillRef>
-          <a:effectRef idx="2">
-            <a:schemeClr val="accent1"/>
-          </a:effectRef>
-          <a:fontRef idx="minor">
-            <a:schemeClr val="tx1"/>
-          </a:fontRef>
-        </p:style>
-      </p:cxnSp>
-      <p:cxnSp>
-        <p:nvCxnSpPr>
-          <p:cNvPr id="50" name="Connettore a gomito 49">
-            <a:extLst>
-              <a:ext uri="{FF2B5EF4-FFF2-40B4-BE49-F238E27FC236}">
-                <a16:creationId xmlns:a16="http://schemas.microsoft.com/office/drawing/2014/main" id="{1AECC1C2-24AE-483D-83A4-FB1DC4F6F7D3}"/>
-              </a:ext>
-            </a:extLst>
-          </p:cNvPr>
-          <p:cNvCxnSpPr>
-            <a:cxnSpLocks/>
-            <a:stCxn id="38" idx="3"/>
-          </p:cNvCxnSpPr>
-          <p:nvPr/>
-        </p:nvCxnSpPr>
-        <p:spPr>
-          <a:xfrm>
-            <a:off x="6264417" y="2090607"/>
-            <a:ext cx="1991062" cy="2861124"/>
-          </a:xfrm>
-          <a:prstGeom prst="bentConnector2">
-            <a:avLst/>
-          </a:prstGeom>
-          <a:ln>
-            <a:solidFill>
-              <a:srgbClr val="0F406B"/>
-            </a:solidFill>
-            <a:tailEnd type="triangle"/>
-          </a:ln>
-          <a:effectLst/>
         </p:spPr>
         <p:style>
           <a:lnRef idx="3">
@@ -12168,10 +11412,10 @@
       </p:cxnSp>
       <p:pic>
         <p:nvPicPr>
-          <p:cNvPr id="57" name="Elemento grafico 56" descr="Freccia: leggera curva con riempimento a tinta unita">
-            <a:extLst>
-              <a:ext uri="{FF2B5EF4-FFF2-40B4-BE49-F238E27FC236}">
-                <a16:creationId xmlns:a16="http://schemas.microsoft.com/office/drawing/2014/main" id="{2B51B324-9818-6D01-BA60-FFF97D2FFA69}"/>
+          <p:cNvPr id="14" name="Picture 13">
+            <a:extLst>
+              <a:ext uri="{FF2B5EF4-FFF2-40B4-BE49-F238E27FC236}">
+                <a16:creationId xmlns:a16="http://schemas.microsoft.com/office/drawing/2014/main" id="{1046B84D-9F86-79F0-B479-1565CEEDCF34}"/>
               </a:ext>
             </a:extLst>
           </p:cNvPr>
@@ -12181,124 +11425,25 @@
           <p:nvPr/>
         </p:nvPicPr>
         <p:blipFill>
-          <a:blip r:embed="rId14">
-            <a:extLst>
-              <a:ext uri="{96DAC541-7B7A-43D3-8B79-37D633B846F1}">
-                <asvg:svgBlip xmlns:asvg="http://schemas.microsoft.com/office/drawing/2016/SVG/main" r:embed="rId15"/>
-              </a:ext>
-            </a:extLst>
-          </a:blip>
+          <a:blip r:embed="rId5"/>
           <a:stretch>
             <a:fillRect/>
           </a:stretch>
         </p:blipFill>
         <p:spPr>
           <a:xfrm>
-            <a:off x="6728187" y="5451490"/>
-            <a:ext cx="914400" cy="914400"/>
+            <a:off x="612178" y="1691555"/>
+            <a:ext cx="7919643" cy="3474889"/>
           </a:xfrm>
           <a:prstGeom prst="rect">
             <a:avLst/>
           </a:prstGeom>
         </p:spPr>
       </p:pic>
-      <p:sp>
-        <p:nvSpPr>
-          <p:cNvPr id="60" name="Parentesi graffa aperta 59">
-            <a:extLst>
-              <a:ext uri="{FF2B5EF4-FFF2-40B4-BE49-F238E27FC236}">
-                <a16:creationId xmlns:a16="http://schemas.microsoft.com/office/drawing/2014/main" id="{D9488BB2-AAEA-A7F3-D6F4-FE6D9A086988}"/>
-              </a:ext>
-            </a:extLst>
-          </p:cNvPr>
-          <p:cNvSpPr/>
-          <p:nvPr/>
-        </p:nvSpPr>
-        <p:spPr>
-          <a:xfrm rot="16200000">
-            <a:off x="5758538" y="4078143"/>
-            <a:ext cx="45719" cy="324413"/>
-          </a:xfrm>
-          <a:prstGeom prst="leftBrace">
-            <a:avLst/>
-          </a:prstGeom>
-          <a:ln>
-            <a:solidFill>
-              <a:srgbClr val="0F406B"/>
-            </a:solidFill>
-          </a:ln>
-          <a:effectLst/>
-        </p:spPr>
-        <p:style>
-          <a:lnRef idx="2">
-            <a:schemeClr val="accent1"/>
-          </a:lnRef>
-          <a:fillRef idx="0">
-            <a:schemeClr val="accent1"/>
-          </a:fillRef>
-          <a:effectRef idx="1">
-            <a:schemeClr val="accent1"/>
-          </a:effectRef>
-          <a:fontRef idx="minor">
-            <a:schemeClr val="tx1"/>
-          </a:fontRef>
-        </p:style>
-        <p:txBody>
-          <a:bodyPr rtlCol="0" anchor="ctr"/>
-          <a:lstStyle/>
-          <a:p>
-            <a:pPr algn="ctr"/>
-            <a:endParaRPr lang="en-US"/>
-          </a:p>
-        </p:txBody>
-      </p:sp>
-      <p:sp>
-        <p:nvSpPr>
-          <p:cNvPr id="61" name="CasellaDiTesto 60">
-            <a:extLst>
-              <a:ext uri="{FF2B5EF4-FFF2-40B4-BE49-F238E27FC236}">
-                <a16:creationId xmlns:a16="http://schemas.microsoft.com/office/drawing/2014/main" id="{60A0BF2C-5BB8-8235-1C4C-9CEF70816389}"/>
-              </a:ext>
-            </a:extLst>
-          </p:cNvPr>
-          <p:cNvSpPr txBox="1"/>
-          <p:nvPr/>
-        </p:nvSpPr>
-        <p:spPr>
-          <a:xfrm>
-            <a:off x="4574175" y="4257896"/>
-            <a:ext cx="2414444" cy="338554"/>
-          </a:xfrm>
-          <a:prstGeom prst="rect">
-            <a:avLst/>
-          </a:prstGeom>
-          <a:noFill/>
-        </p:spPr>
-        <p:txBody>
-          <a:bodyPr wrap="none" rtlCol="0">
-            <a:spAutoFit/>
-          </a:bodyPr>
-          <a:lstStyle/>
-          <a:p>
-            <a:pPr algn="ctr"/>
-            <a:r>
-              <a:rPr lang="it-IT" sz="1600">
-                <a:latin typeface="Arial" panose="020B0604020202020204" pitchFamily="34" charset="0"/>
-                <a:cs typeface="Arial" panose="020B0604020202020204" pitchFamily="34" charset="0"/>
-              </a:rPr>
-              <a:t>NUMBER OF CLASSES</a:t>
-            </a:r>
-            <a:endParaRPr lang="en-US" sz="1600">
-              <a:latin typeface="Arial" panose="020B0604020202020204" pitchFamily="34" charset="0"/>
-              <a:cs typeface="Arial" panose="020B0604020202020204" pitchFamily="34" charset="0"/>
-            </a:endParaRPr>
-          </a:p>
-        </p:txBody>
-      </p:sp>
     </p:spTree>
     <p:extLst>
       <p:ext uri="{BB962C8B-B14F-4D97-AF65-F5344CB8AC3E}">
-        <p14:creationId xmlns:p14="http://schemas.microsoft.com/office/powerpoint/2010/main" val="434431478"/>
+        <p14:creationId xmlns:p14="http://schemas.microsoft.com/office/powerpoint/2010/main" val="1637004160"/>
       </p:ext>
     </p:extLst>
   </p:cSld>
@@ -12320,7 +11465,7 @@
 </p:sld>
 </file>
 
-<file path=ppt/slides/slide15.xml><?xml version="1.0" encoding="utf-8"?>
+<file path=ppt/slides/slide16.xml><?xml version="1.0" encoding="utf-8"?>
 <p:sld xmlns:a="http://schemas.openxmlformats.org/drawingml/2006/main" xmlns:r="http://schemas.openxmlformats.org/officeDocument/2006/relationships" xmlns:p="http://schemas.openxmlformats.org/presentationml/2006/main">
   <p:cSld>
     <p:spTree>
@@ -12328,7 +11473,7 @@
         <p:cNvPr id="1" name="">
           <a:extLst>
             <a:ext uri="{FF2B5EF4-FFF2-40B4-BE49-F238E27FC236}">
-              <a16:creationId xmlns:a16="http://schemas.microsoft.com/office/drawing/2014/main" id="{1EB349DC-71D2-1BE2-A657-DF3CF9C0FE1B}"/>
+              <a16:creationId xmlns:a16="http://schemas.microsoft.com/office/drawing/2014/main" id="{DE91B78F-74DD-6730-04AE-04395E7103CE}"/>
             </a:ext>
           </a:extLst>
         </p:cNvPr>
@@ -12348,7 +11493,7 @@
           <p:cNvPr id="6" name="Parallelogramma 5">
             <a:extLst>
               <a:ext uri="{FF2B5EF4-FFF2-40B4-BE49-F238E27FC236}">
-                <a16:creationId xmlns:a16="http://schemas.microsoft.com/office/drawing/2014/main" id="{481183F0-BECE-FB00-F66C-EE633D587A73}"/>
+                <a16:creationId xmlns:a16="http://schemas.microsoft.com/office/drawing/2014/main" id="{F9AE2922-69D9-ED7E-DEE2-20011B40E298}"/>
               </a:ext>
             </a:extLst>
           </p:cNvPr>
@@ -12402,7 +11547,7 @@
           <p:cNvPr id="7" name="Immagine 6" descr="cherubino_pant541.eps">
             <a:extLst>
               <a:ext uri="{FF2B5EF4-FFF2-40B4-BE49-F238E27FC236}">
-                <a16:creationId xmlns:a16="http://schemas.microsoft.com/office/drawing/2014/main" id="{FA27E442-B705-210A-3FA9-CC1A76E5CD81}"/>
+                <a16:creationId xmlns:a16="http://schemas.microsoft.com/office/drawing/2014/main" id="{D18407DF-311D-CC0B-478C-3BD085DC78F2}"/>
               </a:ext>
             </a:extLst>
           </p:cNvPr>
@@ -12438,7 +11583,7 @@
           <p:cNvPr id="8" name="Immagine 7" descr="logo_white.eps">
             <a:extLst>
               <a:ext uri="{FF2B5EF4-FFF2-40B4-BE49-F238E27FC236}">
-                <a16:creationId xmlns:a16="http://schemas.microsoft.com/office/drawing/2014/main" id="{7281003A-9E79-BA8B-734A-28C319026948}"/>
+                <a16:creationId xmlns:a16="http://schemas.microsoft.com/office/drawing/2014/main" id="{8456C8FF-E08D-3145-B65F-CD0BB5CD6743}"/>
               </a:ext>
             </a:extLst>
           </p:cNvPr>
@@ -12474,7 +11619,7 @@
           <p:cNvPr id="26" name="CasellaDiTesto 1">
             <a:extLst>
               <a:ext uri="{FF2B5EF4-FFF2-40B4-BE49-F238E27FC236}">
-                <a16:creationId xmlns:a16="http://schemas.microsoft.com/office/drawing/2014/main" id="{49689B1F-AD0E-E5AA-3219-FF6AD6E3E094}"/>
+                <a16:creationId xmlns:a16="http://schemas.microsoft.com/office/drawing/2014/main" id="{01F04D3F-A3E8-D61A-5E7B-36613AB1B471}"/>
               </a:ext>
             </a:extLst>
           </p:cNvPr>
@@ -12646,24 +11791,14 @@
           </a:lstStyle>
           <a:p>
             <a:r>
-              <a:rPr lang="it-IT" sz="2800" b="1">
+              <a:rPr lang="it-IT" sz="2800" b="1" dirty="0">
                 <a:solidFill>
                   <a:srgbClr val="0F406B"/>
                 </a:solidFill>
                 <a:latin typeface="Arial"/>
                 <a:cs typeface="Arial"/>
               </a:rPr>
-              <a:t>P</a:t>
-            </a:r>
-            <a:r>
-              <a:rPr lang="it-IT" sz="2000" b="1">
-                <a:solidFill>
-                  <a:srgbClr val="0F406B"/>
-                </a:solidFill>
-                <a:latin typeface="Arial"/>
-                <a:cs typeface="Arial"/>
-              </a:rPr>
-              <a:t>REDICT_PROBA METHOD</a:t>
+              <a:t>Considering the Binary Case (2)</a:t>
             </a:r>
           </a:p>
         </p:txBody>
@@ -12673,7 +11808,7 @@
           <p:cNvPr id="27" name="Connettore diritto 15">
             <a:extLst>
               <a:ext uri="{FF2B5EF4-FFF2-40B4-BE49-F238E27FC236}">
-                <a16:creationId xmlns:a16="http://schemas.microsoft.com/office/drawing/2014/main" id="{26565AF9-68F3-7115-7888-F6FB8AF2E58C}"/>
+                <a16:creationId xmlns:a16="http://schemas.microsoft.com/office/drawing/2014/main" id="{8BEF4A98-60BE-3368-B88D-9C838ABB567E}"/>
               </a:ext>
             </a:extLst>
           </p:cNvPr>
@@ -12684,8 +11819,8 @@
         </p:nvCxnSpPr>
         <p:spPr>
           <a:xfrm>
-            <a:off x="198975" y="509700"/>
-            <a:ext cx="3440521" cy="0"/>
+            <a:off x="110087" y="484673"/>
+            <a:ext cx="5347523" cy="0"/>
           </a:xfrm>
           <a:prstGeom prst="line">
             <a:avLst/>
@@ -12711,218 +11846,12 @@
           </a:fontRef>
         </p:style>
       </p:cxnSp>
-      <p:sp>
-        <p:nvSpPr>
-          <p:cNvPr id="42" name="CasellaDiTesto 41">
-            <a:extLst>
-              <a:ext uri="{FF2B5EF4-FFF2-40B4-BE49-F238E27FC236}">
-                <a16:creationId xmlns:a16="http://schemas.microsoft.com/office/drawing/2014/main" id="{AD3475C1-D154-0A64-F878-58588A99252C}"/>
-              </a:ext>
-            </a:extLst>
-          </p:cNvPr>
-          <p:cNvSpPr txBox="1"/>
-          <p:nvPr/>
-        </p:nvSpPr>
-        <p:spPr>
-          <a:xfrm>
-            <a:off x="104218" y="597129"/>
-            <a:ext cx="3630033" cy="646331"/>
-          </a:xfrm>
-          <a:prstGeom prst="rect">
-            <a:avLst/>
-          </a:prstGeom>
-          <a:noFill/>
-        </p:spPr>
-        <p:txBody>
-          <a:bodyPr wrap="none" rtlCol="0">
-            <a:spAutoFit/>
-          </a:bodyPr>
-          <a:lstStyle/>
-          <a:p>
-            <a:pPr algn="ctr"/>
-            <a:r>
-              <a:rPr lang="it-IT">
-                <a:latin typeface="Arial" panose="020B0604020202020204" pitchFamily="34" charset="0"/>
-                <a:cs typeface="Arial" panose="020B0604020202020204" pitchFamily="34" charset="0"/>
-              </a:rPr>
-              <a:t>For samples </a:t>
-            </a:r>
-            <a:r>
-              <a:rPr lang="it-IT" b="1" err="1">
-                <a:solidFill>
-                  <a:srgbClr val="0F406B"/>
-                </a:solidFill>
-                <a:latin typeface="Arial" panose="020B0604020202020204" pitchFamily="34" charset="0"/>
-                <a:cs typeface="Arial" panose="020B0604020202020204" pitchFamily="34" charset="0"/>
-              </a:rPr>
-              <a:t>where</a:t>
-            </a:r>
-            <a:r>
-              <a:rPr lang="it-IT" b="1">
-                <a:solidFill>
-                  <a:srgbClr val="0F406B"/>
-                </a:solidFill>
-                <a:latin typeface="Arial" panose="020B0604020202020204" pitchFamily="34" charset="0"/>
-                <a:cs typeface="Arial" panose="020B0604020202020204" pitchFamily="34" charset="0"/>
-              </a:rPr>
-              <a:t> the STAGE 1</a:t>
-            </a:r>
-          </a:p>
-          <a:p>
-            <a:pPr algn="ctr"/>
-            <a:r>
-              <a:rPr lang="it-IT" b="1">
-                <a:solidFill>
-                  <a:srgbClr val="0F406B"/>
-                </a:solidFill>
-                <a:latin typeface="Arial" panose="020B0604020202020204" pitchFamily="34" charset="0"/>
-                <a:cs typeface="Arial" panose="020B0604020202020204" pitchFamily="34" charset="0"/>
-              </a:rPr>
-              <a:t> </a:t>
-            </a:r>
-            <a:r>
-              <a:rPr lang="it-IT" b="1" err="1">
-                <a:solidFill>
-                  <a:srgbClr val="0F406B"/>
-                </a:solidFill>
-                <a:latin typeface="Arial" panose="020B0604020202020204" pitchFamily="34" charset="0"/>
-                <a:cs typeface="Arial" panose="020B0604020202020204" pitchFamily="34" charset="0"/>
-              </a:rPr>
-              <a:t>assigned</a:t>
-            </a:r>
-            <a:r>
-              <a:rPr lang="it-IT" b="1">
-                <a:solidFill>
-                  <a:srgbClr val="0F406B"/>
-                </a:solidFill>
-                <a:latin typeface="Arial" panose="020B0604020202020204" pitchFamily="34" charset="0"/>
-                <a:cs typeface="Arial" panose="020B0604020202020204" pitchFamily="34" charset="0"/>
-              </a:rPr>
-              <a:t> class != 0 </a:t>
-            </a:r>
-            <a:r>
-              <a:rPr lang="it-IT">
-                <a:latin typeface="Arial" panose="020B0604020202020204" pitchFamily="34" charset="0"/>
-                <a:cs typeface="Arial" panose="020B0604020202020204" pitchFamily="34" charset="0"/>
-              </a:rPr>
-              <a:t>:</a:t>
-            </a:r>
-            <a:endParaRPr lang="en-US">
-              <a:latin typeface="Arial" panose="020B0604020202020204" pitchFamily="34" charset="0"/>
-              <a:cs typeface="Arial" panose="020B0604020202020204" pitchFamily="34" charset="0"/>
-            </a:endParaRPr>
-          </a:p>
-        </p:txBody>
-      </p:sp>
-      <p:cxnSp>
-        <p:nvCxnSpPr>
-          <p:cNvPr id="50" name="Connettore a gomito 49">
-            <a:extLst>
-              <a:ext uri="{FF2B5EF4-FFF2-40B4-BE49-F238E27FC236}">
-                <a16:creationId xmlns:a16="http://schemas.microsoft.com/office/drawing/2014/main" id="{88125A83-2C68-C00A-D9D2-EF475C1438D4}"/>
-              </a:ext>
-            </a:extLst>
-          </p:cNvPr>
-          <p:cNvCxnSpPr>
-            <a:cxnSpLocks/>
-            <a:stCxn id="28" idx="3"/>
-            <a:endCxn id="31" idx="0"/>
-          </p:cNvCxnSpPr>
-          <p:nvPr/>
-        </p:nvCxnSpPr>
-        <p:spPr>
-          <a:xfrm>
-            <a:off x="2316894" y="4230294"/>
-            <a:ext cx="1828959" cy="263115"/>
-          </a:xfrm>
-          <a:prstGeom prst="bentConnector2">
-            <a:avLst/>
-          </a:prstGeom>
-          <a:ln>
-            <a:solidFill>
-              <a:srgbClr val="0F406B"/>
-            </a:solidFill>
-            <a:tailEnd type="triangle"/>
-          </a:ln>
-          <a:effectLst/>
-        </p:spPr>
-        <p:style>
-          <a:lnRef idx="3">
-            <a:schemeClr val="accent1"/>
-          </a:lnRef>
-          <a:fillRef idx="0">
-            <a:schemeClr val="accent1"/>
-          </a:fillRef>
-          <a:effectRef idx="2">
-            <a:schemeClr val="accent1"/>
-          </a:effectRef>
-          <a:fontRef idx="minor">
-            <a:schemeClr val="tx1"/>
-          </a:fontRef>
-        </p:style>
-      </p:cxnSp>
-      <p:sp>
-        <p:nvSpPr>
-          <p:cNvPr id="5" name="CasellaDiTesto 4">
-            <a:extLst>
-              <a:ext uri="{FF2B5EF4-FFF2-40B4-BE49-F238E27FC236}">
-                <a16:creationId xmlns:a16="http://schemas.microsoft.com/office/drawing/2014/main" id="{0B64461A-7DC4-FE05-F00F-ECC79AC9CFF6}"/>
-              </a:ext>
-            </a:extLst>
-          </p:cNvPr>
-          <p:cNvSpPr txBox="1"/>
-          <p:nvPr/>
-        </p:nvSpPr>
-        <p:spPr>
-          <a:xfrm>
-            <a:off x="165785" y="1312785"/>
-            <a:ext cx="3219664" cy="369332"/>
-          </a:xfrm>
-          <a:prstGeom prst="rect">
-            <a:avLst/>
-          </a:prstGeom>
-          <a:noFill/>
-        </p:spPr>
-        <p:txBody>
-          <a:bodyPr wrap="none" rtlCol="0">
-            <a:spAutoFit/>
-          </a:bodyPr>
-          <a:lstStyle/>
-          <a:p>
-            <a:r>
-              <a:rPr lang="it-IT">
-                <a:latin typeface="Arial" panose="020B0604020202020204" pitchFamily="34" charset="0"/>
-                <a:cs typeface="Arial" panose="020B0604020202020204" pitchFamily="34" charset="0"/>
-              </a:rPr>
-              <a:t>Use STAGE 2 </a:t>
-            </a:r>
-            <a:r>
-              <a:rPr lang="it-IT" err="1">
-                <a:latin typeface="Arial" panose="020B0604020202020204" pitchFamily="34" charset="0"/>
-                <a:cs typeface="Arial" panose="020B0604020202020204" pitchFamily="34" charset="0"/>
-              </a:rPr>
-              <a:t>predict_proba</a:t>
-            </a:r>
-            <a:r>
-              <a:rPr lang="it-IT">
-                <a:latin typeface="Arial" panose="020B0604020202020204" pitchFamily="34" charset="0"/>
-                <a:cs typeface="Arial" panose="020B0604020202020204" pitchFamily="34" charset="0"/>
-              </a:rPr>
-              <a:t> :</a:t>
-            </a:r>
-            <a:endParaRPr lang="en-US">
-              <a:latin typeface="Arial" panose="020B0604020202020204" pitchFamily="34" charset="0"/>
-              <a:cs typeface="Arial" panose="020B0604020202020204" pitchFamily="34" charset="0"/>
-            </a:endParaRPr>
-          </a:p>
-        </p:txBody>
-      </p:sp>
       <p:pic>
         <p:nvPicPr>
-          <p:cNvPr id="23" name="Immagine 22" descr="Immagine che contiene testo, Carattere, bianco, tipografia&#10;&#10;Il contenuto generato dall'IA potrebbe non essere corretto.">
-            <a:extLst>
-              <a:ext uri="{FF2B5EF4-FFF2-40B4-BE49-F238E27FC236}">
-                <a16:creationId xmlns:a16="http://schemas.microsoft.com/office/drawing/2014/main" id="{7CB8BCB5-FAA6-DCE7-73D7-E77F8235F3D2}"/>
+          <p:cNvPr id="3" name="Picture 2">
+            <a:extLst>
+              <a:ext uri="{FF2B5EF4-FFF2-40B4-BE49-F238E27FC236}">
+                <a16:creationId xmlns:a16="http://schemas.microsoft.com/office/drawing/2014/main" id="{E9D3811E-93E1-2D38-F9CA-95262A0CDB20}"/>
               </a:ext>
             </a:extLst>
           </p:cNvPr>
@@ -12939,441 +11868,8 @@
         </p:blipFill>
         <p:spPr>
           <a:xfrm>
-            <a:off x="185961" y="1646194"/>
-            <a:ext cx="4762842" cy="757883"/>
-          </a:xfrm>
-          <a:prstGeom prst="rect">
-            <a:avLst/>
-          </a:prstGeom>
-        </p:spPr>
-      </p:pic>
-      <p:pic>
-        <p:nvPicPr>
-          <p:cNvPr id="28" name="Immagine 27" descr="Immagine che contiene Carattere, tipografia, testo, bianco&#10;&#10;Il contenuto generato dall'IA potrebbe non essere corretto.">
-            <a:extLst>
-              <a:ext uri="{FF2B5EF4-FFF2-40B4-BE49-F238E27FC236}">
-                <a16:creationId xmlns:a16="http://schemas.microsoft.com/office/drawing/2014/main" id="{F27B0EEF-86CE-0B4F-25CA-4D49B49A2191}"/>
-              </a:ext>
-            </a:extLst>
-          </p:cNvPr>
-          <p:cNvPicPr>
-            <a:picLocks noChangeAspect="1"/>
-          </p:cNvPicPr>
-          <p:nvPr/>
-        </p:nvPicPr>
-        <p:blipFill>
-          <a:blip r:embed="rId6"/>
-          <a:stretch>
-            <a:fillRect/>
-          </a:stretch>
-        </p:blipFill>
-        <p:spPr>
-          <a:xfrm>
-            <a:off x="236454" y="3978812"/>
-            <a:ext cx="2080440" cy="502964"/>
-          </a:xfrm>
-          <a:prstGeom prst="rect">
-            <a:avLst/>
-          </a:prstGeom>
-        </p:spPr>
-      </p:pic>
-      <p:pic>
-        <p:nvPicPr>
-          <p:cNvPr id="31" name="Immagine 30">
-            <a:extLst>
-              <a:ext uri="{FF2B5EF4-FFF2-40B4-BE49-F238E27FC236}">
-                <a16:creationId xmlns:a16="http://schemas.microsoft.com/office/drawing/2014/main" id="{63C0A6A0-B5C6-3758-4A81-63277A934A55}"/>
-              </a:ext>
-            </a:extLst>
-          </p:cNvPr>
-          <p:cNvPicPr>
-            <a:picLocks noChangeAspect="1"/>
-          </p:cNvPicPr>
-          <p:nvPr/>
-        </p:nvPicPr>
-        <p:blipFill>
-          <a:blip r:embed="rId7"/>
-          <a:stretch>
-            <a:fillRect/>
-          </a:stretch>
-        </p:blipFill>
-        <p:spPr>
-          <a:xfrm>
-            <a:off x="236454" y="4493409"/>
-            <a:ext cx="7818798" cy="754445"/>
-          </a:xfrm>
-          <a:prstGeom prst="rect">
-            <a:avLst/>
-          </a:prstGeom>
-        </p:spPr>
-      </p:pic>
-      <p:pic>
-        <p:nvPicPr>
-          <p:cNvPr id="33" name="Immagine 32">
-            <a:extLst>
-              <a:ext uri="{FF2B5EF4-FFF2-40B4-BE49-F238E27FC236}">
-                <a16:creationId xmlns:a16="http://schemas.microsoft.com/office/drawing/2014/main" id="{E7D22DCE-1BF2-827B-265E-16EB0A1F9E87}"/>
-              </a:ext>
-            </a:extLst>
-          </p:cNvPr>
-          <p:cNvPicPr>
-            <a:picLocks noChangeAspect="1"/>
-          </p:cNvPicPr>
-          <p:nvPr/>
-        </p:nvPicPr>
-        <p:blipFill>
-          <a:blip r:embed="rId8"/>
-          <a:stretch>
-            <a:fillRect/>
-          </a:stretch>
-        </p:blipFill>
-        <p:spPr>
-          <a:xfrm>
-            <a:off x="198975" y="2762832"/>
-            <a:ext cx="7057975" cy="1078810"/>
-          </a:xfrm>
-          <a:prstGeom prst="rect">
-            <a:avLst/>
-          </a:prstGeom>
-        </p:spPr>
-      </p:pic>
-      <p:sp>
-        <p:nvSpPr>
-          <p:cNvPr id="34" name="CasellaDiTesto 33">
-            <a:extLst>
-              <a:ext uri="{FF2B5EF4-FFF2-40B4-BE49-F238E27FC236}">
-                <a16:creationId xmlns:a16="http://schemas.microsoft.com/office/drawing/2014/main" id="{AC3A409F-AC4B-51F6-BE0F-478B3CDB8F9D}"/>
-              </a:ext>
-            </a:extLst>
-          </p:cNvPr>
-          <p:cNvSpPr txBox="1"/>
-          <p:nvPr/>
-        </p:nvSpPr>
-        <p:spPr>
-          <a:xfrm>
-            <a:off x="165785" y="2404175"/>
-            <a:ext cx="4762842" cy="369332"/>
-          </a:xfrm>
-          <a:prstGeom prst="rect">
-            <a:avLst/>
-          </a:prstGeom>
-          <a:noFill/>
-        </p:spPr>
-        <p:txBody>
-          <a:bodyPr wrap="none" rtlCol="0">
-            <a:spAutoFit/>
-          </a:bodyPr>
-          <a:lstStyle/>
-          <a:p>
-            <a:pPr algn="ctr"/>
-            <a:r>
-              <a:rPr lang="it-IT">
-                <a:latin typeface="Arial" panose="020B0604020202020204" pitchFamily="34" charset="0"/>
-                <a:cs typeface="Arial" panose="020B0604020202020204" pitchFamily="34" charset="0"/>
-              </a:rPr>
-              <a:t>From the </a:t>
-            </a:r>
-            <a:r>
-              <a:rPr lang="it-IT" err="1">
-                <a:latin typeface="Arial" panose="020B0604020202020204" pitchFamily="34" charset="0"/>
-                <a:cs typeface="Arial" panose="020B0604020202020204" pitchFamily="34" charset="0"/>
-              </a:rPr>
-              <a:t>definition</a:t>
-            </a:r>
-            <a:r>
-              <a:rPr lang="it-IT">
-                <a:latin typeface="Arial" panose="020B0604020202020204" pitchFamily="34" charset="0"/>
-                <a:cs typeface="Arial" panose="020B0604020202020204" pitchFamily="34" charset="0"/>
-              </a:rPr>
-              <a:t> of </a:t>
-            </a:r>
-            <a:r>
-              <a:rPr lang="it-IT" err="1">
-                <a:latin typeface="Arial" panose="020B0604020202020204" pitchFamily="34" charset="0"/>
-                <a:cs typeface="Arial" panose="020B0604020202020204" pitchFamily="34" charset="0"/>
-              </a:rPr>
-              <a:t>conditional</a:t>
-            </a:r>
-            <a:r>
-              <a:rPr lang="it-IT">
-                <a:latin typeface="Arial" panose="020B0604020202020204" pitchFamily="34" charset="0"/>
-                <a:cs typeface="Arial" panose="020B0604020202020204" pitchFamily="34" charset="0"/>
-              </a:rPr>
-              <a:t> probability :</a:t>
-            </a:r>
-            <a:endParaRPr lang="en-US">
-              <a:latin typeface="Arial" panose="020B0604020202020204" pitchFamily="34" charset="0"/>
-              <a:cs typeface="Arial" panose="020B0604020202020204" pitchFamily="34" charset="0"/>
-            </a:endParaRPr>
-          </a:p>
-        </p:txBody>
-      </p:sp>
-      <p:sp>
-        <p:nvSpPr>
-          <p:cNvPr id="35" name="CasellaDiTesto 34">
-            <a:extLst>
-              <a:ext uri="{FF2B5EF4-FFF2-40B4-BE49-F238E27FC236}">
-                <a16:creationId xmlns:a16="http://schemas.microsoft.com/office/drawing/2014/main" id="{321CA624-8962-758A-50E6-E546D5CCBC01}"/>
-              </a:ext>
-            </a:extLst>
-          </p:cNvPr>
-          <p:cNvSpPr txBox="1"/>
-          <p:nvPr/>
-        </p:nvSpPr>
-        <p:spPr>
-          <a:xfrm>
-            <a:off x="198975" y="3568908"/>
-            <a:ext cx="2155398" cy="369332"/>
-          </a:xfrm>
-          <a:prstGeom prst="rect">
-            <a:avLst/>
-          </a:prstGeom>
-          <a:noFill/>
-        </p:spPr>
-        <p:txBody>
-          <a:bodyPr wrap="none" rtlCol="0">
-            <a:spAutoFit/>
-          </a:bodyPr>
-          <a:lstStyle/>
-          <a:p>
-            <a:pPr algn="ctr"/>
-            <a:r>
-              <a:rPr lang="it-IT">
-                <a:latin typeface="Arial" panose="020B0604020202020204" pitchFamily="34" charset="0"/>
-                <a:cs typeface="Arial" panose="020B0604020202020204" pitchFamily="34" charset="0"/>
-              </a:rPr>
-              <a:t>We also have </a:t>
-            </a:r>
-            <a:r>
-              <a:rPr lang="it-IT" err="1">
-                <a:latin typeface="Arial" panose="020B0604020202020204" pitchFamily="34" charset="0"/>
-                <a:cs typeface="Arial" panose="020B0604020202020204" pitchFamily="34" charset="0"/>
-              </a:rPr>
-              <a:t>that</a:t>
-            </a:r>
-            <a:r>
-              <a:rPr lang="it-IT">
-                <a:latin typeface="Arial" panose="020B0604020202020204" pitchFamily="34" charset="0"/>
-                <a:cs typeface="Arial" panose="020B0604020202020204" pitchFamily="34" charset="0"/>
-              </a:rPr>
-              <a:t> :</a:t>
-            </a:r>
-            <a:endParaRPr lang="en-US">
-              <a:latin typeface="Arial" panose="020B0604020202020204" pitchFamily="34" charset="0"/>
-              <a:cs typeface="Arial" panose="020B0604020202020204" pitchFamily="34" charset="0"/>
-            </a:endParaRPr>
-          </a:p>
-        </p:txBody>
-      </p:sp>
-      <p:sp>
-        <p:nvSpPr>
-          <p:cNvPr id="40" name="CasellaDiTesto 39">
-            <a:extLst>
-              <a:ext uri="{FF2B5EF4-FFF2-40B4-BE49-F238E27FC236}">
-                <a16:creationId xmlns:a16="http://schemas.microsoft.com/office/drawing/2014/main" id="{0CD6DC53-1143-61AA-E4E9-CC00EE2712F2}"/>
-              </a:ext>
-            </a:extLst>
-          </p:cNvPr>
-          <p:cNvSpPr txBox="1"/>
-          <p:nvPr/>
-        </p:nvSpPr>
-        <p:spPr>
-          <a:xfrm>
-            <a:off x="2567382" y="3882214"/>
-            <a:ext cx="1402948" cy="369332"/>
-          </a:xfrm>
-          <a:prstGeom prst="rect">
-            <a:avLst/>
-          </a:prstGeom>
-          <a:noFill/>
-        </p:spPr>
-        <p:txBody>
-          <a:bodyPr wrap="none" rtlCol="0">
-            <a:spAutoFit/>
-          </a:bodyPr>
-          <a:lstStyle/>
-          <a:p>
-            <a:pPr algn="ctr"/>
-            <a:r>
-              <a:rPr lang="it-IT" b="1" err="1">
-                <a:solidFill>
-                  <a:srgbClr val="0F406B"/>
-                </a:solidFill>
-                <a:latin typeface="Arial" panose="020B0604020202020204" pitchFamily="34" charset="0"/>
-                <a:cs typeface="Arial" panose="020B0604020202020204" pitchFamily="34" charset="0"/>
-              </a:rPr>
-              <a:t>Implication</a:t>
-            </a:r>
-            <a:endParaRPr lang="en-US" b="1">
-              <a:solidFill>
-                <a:srgbClr val="0F406B"/>
-              </a:solidFill>
-              <a:latin typeface="Arial" panose="020B0604020202020204" pitchFamily="34" charset="0"/>
-              <a:cs typeface="Arial" panose="020B0604020202020204" pitchFamily="34" charset="0"/>
-            </a:endParaRPr>
-          </a:p>
-        </p:txBody>
-      </p:sp>
-      <p:sp>
-        <p:nvSpPr>
-          <p:cNvPr id="41" name="Rettangolo 40">
-            <a:extLst>
-              <a:ext uri="{FF2B5EF4-FFF2-40B4-BE49-F238E27FC236}">
-                <a16:creationId xmlns:a16="http://schemas.microsoft.com/office/drawing/2014/main" id="{1C6BA8DD-7070-8558-82F1-82E238A5F9B8}"/>
-              </a:ext>
-            </a:extLst>
-          </p:cNvPr>
-          <p:cNvSpPr/>
-          <p:nvPr/>
-        </p:nvSpPr>
-        <p:spPr>
-          <a:xfrm>
-            <a:off x="358140" y="4625340"/>
-            <a:ext cx="7697112" cy="441710"/>
-          </a:xfrm>
-          <a:prstGeom prst="rect">
-            <a:avLst/>
-          </a:prstGeom>
-          <a:noFill/>
-          <a:ln w="19050">
-            <a:solidFill>
-              <a:srgbClr val="0F406B"/>
-            </a:solidFill>
-          </a:ln>
-        </p:spPr>
-        <p:style>
-          <a:lnRef idx="1">
-            <a:schemeClr val="accent1"/>
-          </a:lnRef>
-          <a:fillRef idx="3">
-            <a:schemeClr val="accent1"/>
-          </a:fillRef>
-          <a:effectRef idx="2">
-            <a:schemeClr val="accent1"/>
-          </a:effectRef>
-          <a:fontRef idx="minor">
-            <a:schemeClr val="lt1"/>
-          </a:fontRef>
-        </p:style>
-        <p:txBody>
-          <a:bodyPr rtlCol="0" anchor="ctr"/>
-          <a:lstStyle/>
-          <a:p>
-            <a:pPr algn="ctr"/>
-            <a:endParaRPr lang="en-US"/>
-          </a:p>
-        </p:txBody>
-      </p:sp>
-      <p:sp>
-        <p:nvSpPr>
-          <p:cNvPr id="45" name="CasellaDiTesto 44">
-            <a:extLst>
-              <a:ext uri="{FF2B5EF4-FFF2-40B4-BE49-F238E27FC236}">
-                <a16:creationId xmlns:a16="http://schemas.microsoft.com/office/drawing/2014/main" id="{A5701B60-02B2-F3D7-A115-D0E2D11923A2}"/>
-              </a:ext>
-            </a:extLst>
-          </p:cNvPr>
-          <p:cNvSpPr txBox="1"/>
-          <p:nvPr/>
-        </p:nvSpPr>
-        <p:spPr>
-          <a:xfrm>
-            <a:off x="236454" y="5258261"/>
-            <a:ext cx="1903085" cy="369332"/>
-          </a:xfrm>
-          <a:prstGeom prst="rect">
-            <a:avLst/>
-          </a:prstGeom>
-          <a:noFill/>
-        </p:spPr>
-        <p:txBody>
-          <a:bodyPr wrap="none" rtlCol="0">
-            <a:spAutoFit/>
-          </a:bodyPr>
-          <a:lstStyle/>
-          <a:p>
-            <a:pPr algn="ctr"/>
-            <a:r>
-              <a:rPr lang="it-IT" err="1">
-                <a:latin typeface="Arial" panose="020B0604020202020204" pitchFamily="34" charset="0"/>
-                <a:cs typeface="Arial" panose="020B0604020202020204" pitchFamily="34" charset="0"/>
-              </a:rPr>
-              <a:t>Finally</a:t>
-            </a:r>
-            <a:r>
-              <a:rPr lang="it-IT">
-                <a:latin typeface="Arial" panose="020B0604020202020204" pitchFamily="34" charset="0"/>
-                <a:cs typeface="Arial" panose="020B0604020202020204" pitchFamily="34" charset="0"/>
-              </a:rPr>
-              <a:t> we have :</a:t>
-            </a:r>
-            <a:endParaRPr lang="en-US">
-              <a:latin typeface="Arial" panose="020B0604020202020204" pitchFamily="34" charset="0"/>
-              <a:cs typeface="Arial" panose="020B0604020202020204" pitchFamily="34" charset="0"/>
-            </a:endParaRPr>
-          </a:p>
-        </p:txBody>
-      </p:sp>
-      <p:pic>
-        <p:nvPicPr>
-          <p:cNvPr id="47" name="Immagine 46" descr="Immagine che contiene Carattere, tipografia, testo, linea&#10;&#10;Il contenuto generato dall'IA potrebbe non essere corretto.">
-            <a:extLst>
-              <a:ext uri="{FF2B5EF4-FFF2-40B4-BE49-F238E27FC236}">
-                <a16:creationId xmlns:a16="http://schemas.microsoft.com/office/drawing/2014/main" id="{279058D8-F373-7229-C3F0-5AD9B6D94030}"/>
-              </a:ext>
-            </a:extLst>
-          </p:cNvPr>
-          <p:cNvPicPr>
-            <a:picLocks noChangeAspect="1"/>
-          </p:cNvPicPr>
-          <p:nvPr/>
-        </p:nvPicPr>
-        <p:blipFill>
-          <a:blip r:embed="rId9"/>
-          <a:stretch>
-            <a:fillRect/>
-          </a:stretch>
-        </p:blipFill>
-        <p:spPr>
-          <a:xfrm>
-            <a:off x="358140" y="5653240"/>
-            <a:ext cx="4976291" cy="609653"/>
-          </a:xfrm>
-          <a:prstGeom prst="rect">
-            <a:avLst/>
-          </a:prstGeom>
-        </p:spPr>
-      </p:pic>
-      <p:pic>
-        <p:nvPicPr>
-          <p:cNvPr id="52" name="Elemento grafico 51" descr="Grafico a barre contorno">
-            <a:extLst>
-              <a:ext uri="{FF2B5EF4-FFF2-40B4-BE49-F238E27FC236}">
-                <a16:creationId xmlns:a16="http://schemas.microsoft.com/office/drawing/2014/main" id="{F850ED9A-470B-7DBA-0DDC-B2D7CA40D337}"/>
-              </a:ext>
-            </a:extLst>
-          </p:cNvPr>
-          <p:cNvPicPr>
-            <a:picLocks noChangeAspect="1"/>
-          </p:cNvPicPr>
-          <p:nvPr/>
-        </p:nvPicPr>
-        <p:blipFill>
-          <a:blip r:embed="rId10">
-            <a:extLst>
-              <a:ext uri="{96DAC541-7B7A-43D3-8B79-37D633B846F1}">
-                <asvg:svgBlip xmlns:asvg="http://schemas.microsoft.com/office/drawing/2016/SVG/main" r:embed="rId11"/>
-              </a:ext>
-            </a:extLst>
-          </a:blip>
-          <a:stretch>
-            <a:fillRect/>
-          </a:stretch>
-        </p:blipFill>
-        <p:spPr>
-          <a:xfrm>
-            <a:off x="6615830" y="284342"/>
-            <a:ext cx="1979698" cy="1979698"/>
+            <a:off x="1589578" y="558522"/>
+            <a:ext cx="5777241" cy="5809218"/>
           </a:xfrm>
           <a:prstGeom prst="rect">
             <a:avLst/>
@@ -13383,7 +11879,7 @@
     </p:spTree>
     <p:extLst>
       <p:ext uri="{BB962C8B-B14F-4D97-AF65-F5344CB8AC3E}">
-        <p14:creationId xmlns:p14="http://schemas.microsoft.com/office/powerpoint/2010/main" val="3513518195"/>
+        <p14:creationId xmlns:p14="http://schemas.microsoft.com/office/powerpoint/2010/main" val="1676080058"/>
       </p:ext>
     </p:extLst>
   </p:cSld>
@@ -13393,1259 +11889,6 @@
   <mc:AlternateContent xmlns:mc="http://schemas.openxmlformats.org/markup-compatibility/2006" xmlns:p159="http://schemas.microsoft.com/office/powerpoint/2015/09/main">
     <mc:Choice Requires="p159">
       <p:transition xmlns:p14="http://schemas.microsoft.com/office/powerpoint/2010/main" spd="slow" p14:dur="2000">
-        <p159:morph option="byObject"/>
-      </p:transition>
-    </mc:Choice>
-    <mc:Fallback xmlns="">
-      <p:transition spd="slow">
-        <p:fade/>
-      </p:transition>
-    </mc:Fallback>
-  </mc:AlternateContent>
-  <p:timing>
-    <p:tnLst>
-      <p:par>
-        <p:cTn id="1" dur="indefinite" restart="never" nodeType="tmRoot">
-          <p:childTnLst>
-            <p:seq concurrent="1" nextAc="seek">
-              <p:cTn id="2" dur="indefinite" nodeType="mainSeq">
-                <p:childTnLst>
-                  <p:par>
-                    <p:cTn id="3" fill="hold">
-                      <p:stCondLst>
-                        <p:cond delay="indefinite"/>
-                        <p:cond evt="onBegin" delay="0">
-                          <p:tn val="2"/>
-                        </p:cond>
-                      </p:stCondLst>
-                      <p:childTnLst>
-                        <p:par>
-                          <p:cTn id="4" fill="hold">
-                            <p:stCondLst>
-                              <p:cond delay="0"/>
-                            </p:stCondLst>
-                            <p:childTnLst>
-                              <p:par>
-                                <p:cTn id="5" presetID="10" presetClass="entr" presetSubtype="0" fill="hold" grpId="0" nodeType="afterEffect">
-                                  <p:stCondLst>
-                                    <p:cond delay="0"/>
-                                  </p:stCondLst>
-                                  <p:childTnLst>
-                                    <p:set>
-                                      <p:cBhvr>
-                                        <p:cTn id="6" dur="1" fill="hold">
-                                          <p:stCondLst>
-                                            <p:cond delay="0"/>
-                                          </p:stCondLst>
-                                        </p:cTn>
-                                        <p:tgtEl>
-                                          <p:spTgt spid="5"/>
-                                        </p:tgtEl>
-                                        <p:attrNameLst>
-                                          <p:attrName>style.visibility</p:attrName>
-                                        </p:attrNameLst>
-                                      </p:cBhvr>
-                                      <p:to>
-                                        <p:strVal val="visible"/>
-                                      </p:to>
-                                    </p:set>
-                                    <p:animEffect transition="in" filter="fade">
-                                      <p:cBhvr>
-                                        <p:cTn id="7" dur="500"/>
-                                        <p:tgtEl>
-                                          <p:spTgt spid="5"/>
-                                        </p:tgtEl>
-                                      </p:cBhvr>
-                                    </p:animEffect>
-                                  </p:childTnLst>
-                                </p:cTn>
-                              </p:par>
-                              <p:par>
-                                <p:cTn id="8" presetID="10" presetClass="entr" presetSubtype="0" fill="hold" nodeType="withEffect">
-                                  <p:stCondLst>
-                                    <p:cond delay="0"/>
-                                  </p:stCondLst>
-                                  <p:childTnLst>
-                                    <p:set>
-                                      <p:cBhvr>
-                                        <p:cTn id="9" dur="1" fill="hold">
-                                          <p:stCondLst>
-                                            <p:cond delay="0"/>
-                                          </p:stCondLst>
-                                        </p:cTn>
-                                        <p:tgtEl>
-                                          <p:spTgt spid="23"/>
-                                        </p:tgtEl>
-                                        <p:attrNameLst>
-                                          <p:attrName>style.visibility</p:attrName>
-                                        </p:attrNameLst>
-                                      </p:cBhvr>
-                                      <p:to>
-                                        <p:strVal val="visible"/>
-                                      </p:to>
-                                    </p:set>
-                                    <p:animEffect transition="in" filter="fade">
-                                      <p:cBhvr>
-                                        <p:cTn id="10" dur="500"/>
-                                        <p:tgtEl>
-                                          <p:spTgt spid="23"/>
-                                        </p:tgtEl>
-                                      </p:cBhvr>
-                                    </p:animEffect>
-                                  </p:childTnLst>
-                                </p:cTn>
-                              </p:par>
-                              <p:par>
-                                <p:cTn id="11" presetID="10" presetClass="entr" presetSubtype="0" fill="hold" grpId="0" nodeType="withEffect">
-                                  <p:stCondLst>
-                                    <p:cond delay="0"/>
-                                  </p:stCondLst>
-                                  <p:childTnLst>
-                                    <p:set>
-                                      <p:cBhvr>
-                                        <p:cTn id="12" dur="1" fill="hold">
-                                          <p:stCondLst>
-                                            <p:cond delay="0"/>
-                                          </p:stCondLst>
-                                        </p:cTn>
-                                        <p:tgtEl>
-                                          <p:spTgt spid="34"/>
-                                        </p:tgtEl>
-                                        <p:attrNameLst>
-                                          <p:attrName>style.visibility</p:attrName>
-                                        </p:attrNameLst>
-                                      </p:cBhvr>
-                                      <p:to>
-                                        <p:strVal val="visible"/>
-                                      </p:to>
-                                    </p:set>
-                                    <p:animEffect transition="in" filter="fade">
-                                      <p:cBhvr>
-                                        <p:cTn id="13" dur="500"/>
-                                        <p:tgtEl>
-                                          <p:spTgt spid="34"/>
-                                        </p:tgtEl>
-                                      </p:cBhvr>
-                                    </p:animEffect>
-                                  </p:childTnLst>
-                                </p:cTn>
-                              </p:par>
-                              <p:par>
-                                <p:cTn id="14" presetID="10" presetClass="entr" presetSubtype="0" fill="hold" nodeType="withEffect">
-                                  <p:stCondLst>
-                                    <p:cond delay="0"/>
-                                  </p:stCondLst>
-                                  <p:childTnLst>
-                                    <p:set>
-                                      <p:cBhvr>
-                                        <p:cTn id="15" dur="1" fill="hold">
-                                          <p:stCondLst>
-                                            <p:cond delay="0"/>
-                                          </p:stCondLst>
-                                        </p:cTn>
-                                        <p:tgtEl>
-                                          <p:spTgt spid="33"/>
-                                        </p:tgtEl>
-                                        <p:attrNameLst>
-                                          <p:attrName>style.visibility</p:attrName>
-                                        </p:attrNameLst>
-                                      </p:cBhvr>
-                                      <p:to>
-                                        <p:strVal val="visible"/>
-                                      </p:to>
-                                    </p:set>
-                                    <p:animEffect transition="in" filter="fade">
-                                      <p:cBhvr>
-                                        <p:cTn id="16" dur="500"/>
-                                        <p:tgtEl>
-                                          <p:spTgt spid="33"/>
-                                        </p:tgtEl>
-                                      </p:cBhvr>
-                                    </p:animEffect>
-                                  </p:childTnLst>
-                                </p:cTn>
-                              </p:par>
-                              <p:par>
-                                <p:cTn id="17" presetID="10" presetClass="entr" presetSubtype="0" fill="hold" grpId="0" nodeType="withEffect">
-                                  <p:stCondLst>
-                                    <p:cond delay="0"/>
-                                  </p:stCondLst>
-                                  <p:childTnLst>
-                                    <p:set>
-                                      <p:cBhvr>
-                                        <p:cTn id="18" dur="1" fill="hold">
-                                          <p:stCondLst>
-                                            <p:cond delay="0"/>
-                                          </p:stCondLst>
-                                        </p:cTn>
-                                        <p:tgtEl>
-                                          <p:spTgt spid="35"/>
-                                        </p:tgtEl>
-                                        <p:attrNameLst>
-                                          <p:attrName>style.visibility</p:attrName>
-                                        </p:attrNameLst>
-                                      </p:cBhvr>
-                                      <p:to>
-                                        <p:strVal val="visible"/>
-                                      </p:to>
-                                    </p:set>
-                                    <p:animEffect transition="in" filter="fade">
-                                      <p:cBhvr>
-                                        <p:cTn id="19" dur="500"/>
-                                        <p:tgtEl>
-                                          <p:spTgt spid="35"/>
-                                        </p:tgtEl>
-                                      </p:cBhvr>
-                                    </p:animEffect>
-                                  </p:childTnLst>
-                                </p:cTn>
-                              </p:par>
-                              <p:par>
-                                <p:cTn id="20" presetID="10" presetClass="entr" presetSubtype="0" fill="hold" nodeType="withEffect">
-                                  <p:stCondLst>
-                                    <p:cond delay="0"/>
-                                  </p:stCondLst>
-                                  <p:childTnLst>
-                                    <p:set>
-                                      <p:cBhvr>
-                                        <p:cTn id="21" dur="1" fill="hold">
-                                          <p:stCondLst>
-                                            <p:cond delay="0"/>
-                                          </p:stCondLst>
-                                        </p:cTn>
-                                        <p:tgtEl>
-                                          <p:spTgt spid="28"/>
-                                        </p:tgtEl>
-                                        <p:attrNameLst>
-                                          <p:attrName>style.visibility</p:attrName>
-                                        </p:attrNameLst>
-                                      </p:cBhvr>
-                                      <p:to>
-                                        <p:strVal val="visible"/>
-                                      </p:to>
-                                    </p:set>
-                                    <p:animEffect transition="in" filter="fade">
-                                      <p:cBhvr>
-                                        <p:cTn id="22" dur="500"/>
-                                        <p:tgtEl>
-                                          <p:spTgt spid="28"/>
-                                        </p:tgtEl>
-                                      </p:cBhvr>
-                                    </p:animEffect>
-                                  </p:childTnLst>
-                                </p:cTn>
-                              </p:par>
-                              <p:par>
-                                <p:cTn id="23" presetID="10" presetClass="entr" presetSubtype="0" fill="hold" nodeType="withEffect">
-                                  <p:stCondLst>
-                                    <p:cond delay="0"/>
-                                  </p:stCondLst>
-                                  <p:childTnLst>
-                                    <p:set>
-                                      <p:cBhvr>
-                                        <p:cTn id="24" dur="1" fill="hold">
-                                          <p:stCondLst>
-                                            <p:cond delay="0"/>
-                                          </p:stCondLst>
-                                        </p:cTn>
-                                        <p:tgtEl>
-                                          <p:spTgt spid="50"/>
-                                        </p:tgtEl>
-                                        <p:attrNameLst>
-                                          <p:attrName>style.visibility</p:attrName>
-                                        </p:attrNameLst>
-                                      </p:cBhvr>
-                                      <p:to>
-                                        <p:strVal val="visible"/>
-                                      </p:to>
-                                    </p:set>
-                                    <p:animEffect transition="in" filter="fade">
-                                      <p:cBhvr>
-                                        <p:cTn id="25" dur="500"/>
-                                        <p:tgtEl>
-                                          <p:spTgt spid="50"/>
-                                        </p:tgtEl>
-                                      </p:cBhvr>
-                                    </p:animEffect>
-                                  </p:childTnLst>
-                                </p:cTn>
-                              </p:par>
-                              <p:par>
-                                <p:cTn id="26" presetID="10" presetClass="entr" presetSubtype="0" fill="hold" grpId="0" nodeType="withEffect">
-                                  <p:stCondLst>
-                                    <p:cond delay="0"/>
-                                  </p:stCondLst>
-                                  <p:childTnLst>
-                                    <p:set>
-                                      <p:cBhvr>
-                                        <p:cTn id="27" dur="1" fill="hold">
-                                          <p:stCondLst>
-                                            <p:cond delay="0"/>
-                                          </p:stCondLst>
-                                        </p:cTn>
-                                        <p:tgtEl>
-                                          <p:spTgt spid="40"/>
-                                        </p:tgtEl>
-                                        <p:attrNameLst>
-                                          <p:attrName>style.visibility</p:attrName>
-                                        </p:attrNameLst>
-                                      </p:cBhvr>
-                                      <p:to>
-                                        <p:strVal val="visible"/>
-                                      </p:to>
-                                    </p:set>
-                                    <p:animEffect transition="in" filter="fade">
-                                      <p:cBhvr>
-                                        <p:cTn id="28" dur="500"/>
-                                        <p:tgtEl>
-                                          <p:spTgt spid="40"/>
-                                        </p:tgtEl>
-                                      </p:cBhvr>
-                                    </p:animEffect>
-                                  </p:childTnLst>
-                                </p:cTn>
-                              </p:par>
-                              <p:par>
-                                <p:cTn id="29" presetID="10" presetClass="entr" presetSubtype="0" fill="hold" nodeType="withEffect">
-                                  <p:stCondLst>
-                                    <p:cond delay="0"/>
-                                  </p:stCondLst>
-                                  <p:childTnLst>
-                                    <p:set>
-                                      <p:cBhvr>
-                                        <p:cTn id="30" dur="1" fill="hold">
-                                          <p:stCondLst>
-                                            <p:cond delay="0"/>
-                                          </p:stCondLst>
-                                        </p:cTn>
-                                        <p:tgtEl>
-                                          <p:spTgt spid="31"/>
-                                        </p:tgtEl>
-                                        <p:attrNameLst>
-                                          <p:attrName>style.visibility</p:attrName>
-                                        </p:attrNameLst>
-                                      </p:cBhvr>
-                                      <p:to>
-                                        <p:strVal val="visible"/>
-                                      </p:to>
-                                    </p:set>
-                                    <p:animEffect transition="in" filter="fade">
-                                      <p:cBhvr>
-                                        <p:cTn id="31" dur="500"/>
-                                        <p:tgtEl>
-                                          <p:spTgt spid="31"/>
-                                        </p:tgtEl>
-                                      </p:cBhvr>
-                                    </p:animEffect>
-                                  </p:childTnLst>
-                                </p:cTn>
-                              </p:par>
-                              <p:par>
-                                <p:cTn id="32" presetID="10" presetClass="entr" presetSubtype="0" fill="hold" grpId="0" nodeType="withEffect">
-                                  <p:stCondLst>
-                                    <p:cond delay="0"/>
-                                  </p:stCondLst>
-                                  <p:childTnLst>
-                                    <p:set>
-                                      <p:cBhvr>
-                                        <p:cTn id="33" dur="1" fill="hold">
-                                          <p:stCondLst>
-                                            <p:cond delay="0"/>
-                                          </p:stCondLst>
-                                        </p:cTn>
-                                        <p:tgtEl>
-                                          <p:spTgt spid="41"/>
-                                        </p:tgtEl>
-                                        <p:attrNameLst>
-                                          <p:attrName>style.visibility</p:attrName>
-                                        </p:attrNameLst>
-                                      </p:cBhvr>
-                                      <p:to>
-                                        <p:strVal val="visible"/>
-                                      </p:to>
-                                    </p:set>
-                                    <p:animEffect transition="in" filter="fade">
-                                      <p:cBhvr>
-                                        <p:cTn id="34" dur="500"/>
-                                        <p:tgtEl>
-                                          <p:spTgt spid="41"/>
-                                        </p:tgtEl>
-                                      </p:cBhvr>
-                                    </p:animEffect>
-                                  </p:childTnLst>
-                                </p:cTn>
-                              </p:par>
-                              <p:par>
-                                <p:cTn id="35" presetID="10" presetClass="entr" presetSubtype="0" fill="hold" grpId="0" nodeType="withEffect">
-                                  <p:stCondLst>
-                                    <p:cond delay="0"/>
-                                  </p:stCondLst>
-                                  <p:childTnLst>
-                                    <p:set>
-                                      <p:cBhvr>
-                                        <p:cTn id="36" dur="1" fill="hold">
-                                          <p:stCondLst>
-                                            <p:cond delay="0"/>
-                                          </p:stCondLst>
-                                        </p:cTn>
-                                        <p:tgtEl>
-                                          <p:spTgt spid="45"/>
-                                        </p:tgtEl>
-                                        <p:attrNameLst>
-                                          <p:attrName>style.visibility</p:attrName>
-                                        </p:attrNameLst>
-                                      </p:cBhvr>
-                                      <p:to>
-                                        <p:strVal val="visible"/>
-                                      </p:to>
-                                    </p:set>
-                                    <p:animEffect transition="in" filter="fade">
-                                      <p:cBhvr>
-                                        <p:cTn id="37" dur="500"/>
-                                        <p:tgtEl>
-                                          <p:spTgt spid="45"/>
-                                        </p:tgtEl>
-                                      </p:cBhvr>
-                                    </p:animEffect>
-                                  </p:childTnLst>
-                                </p:cTn>
-                              </p:par>
-                              <p:par>
-                                <p:cTn id="38" presetID="10" presetClass="entr" presetSubtype="0" fill="hold" nodeType="withEffect">
-                                  <p:stCondLst>
-                                    <p:cond delay="0"/>
-                                  </p:stCondLst>
-                                  <p:childTnLst>
-                                    <p:set>
-                                      <p:cBhvr>
-                                        <p:cTn id="39" dur="1" fill="hold">
-                                          <p:stCondLst>
-                                            <p:cond delay="0"/>
-                                          </p:stCondLst>
-                                        </p:cTn>
-                                        <p:tgtEl>
-                                          <p:spTgt spid="47"/>
-                                        </p:tgtEl>
-                                        <p:attrNameLst>
-                                          <p:attrName>style.visibility</p:attrName>
-                                        </p:attrNameLst>
-                                      </p:cBhvr>
-                                      <p:to>
-                                        <p:strVal val="visible"/>
-                                      </p:to>
-                                    </p:set>
-                                    <p:animEffect transition="in" filter="fade">
-                                      <p:cBhvr>
-                                        <p:cTn id="40" dur="500"/>
-                                        <p:tgtEl>
-                                          <p:spTgt spid="47"/>
-                                        </p:tgtEl>
-                                      </p:cBhvr>
-                                    </p:animEffect>
-                                  </p:childTnLst>
-                                </p:cTn>
-                              </p:par>
-                            </p:childTnLst>
-                          </p:cTn>
-                        </p:par>
-                      </p:childTnLst>
-                    </p:cTn>
-                  </p:par>
-                </p:childTnLst>
-              </p:cTn>
-              <p:prevCondLst>
-                <p:cond evt="onPrev" delay="0">
-                  <p:tgtEl>
-                    <p:sldTgt/>
-                  </p:tgtEl>
-                </p:cond>
-              </p:prevCondLst>
-              <p:nextCondLst>
-                <p:cond evt="onNext" delay="0">
-                  <p:tgtEl>
-                    <p:sldTgt/>
-                  </p:tgtEl>
-                </p:cond>
-              </p:nextCondLst>
-            </p:seq>
-          </p:childTnLst>
-        </p:cTn>
-      </p:par>
-    </p:tnLst>
-    <p:bldLst>
-      <p:bldP spid="5" grpId="0"/>
-      <p:bldP spid="34" grpId="0"/>
-      <p:bldP spid="35" grpId="0"/>
-      <p:bldP spid="40" grpId="0"/>
-      <p:bldP spid="41" grpId="0" animBg="1"/>
-      <p:bldP spid="45" grpId="0"/>
-    </p:bldLst>
-  </p:timing>
-</p:sld>
-</file>
-
-<file path=ppt/slides/slide16.xml><?xml version="1.0" encoding="utf-8"?>
-<p:sld xmlns:a="http://schemas.openxmlformats.org/drawingml/2006/main" xmlns:r="http://schemas.openxmlformats.org/officeDocument/2006/relationships" xmlns:p="http://schemas.openxmlformats.org/presentationml/2006/main">
-  <p:cSld>
-    <p:spTree>
-      <p:nvGrpSpPr>
-        <p:cNvPr id="1" name="">
-          <a:extLst>
-            <a:ext uri="{FF2B5EF4-FFF2-40B4-BE49-F238E27FC236}">
-              <a16:creationId xmlns:a16="http://schemas.microsoft.com/office/drawing/2014/main" id="{A9D81833-7E5D-EEB0-FA81-60644B548C45}"/>
-            </a:ext>
-          </a:extLst>
-        </p:cNvPr>
-        <p:cNvGrpSpPr/>
-        <p:nvPr/>
-      </p:nvGrpSpPr>
-      <p:grpSpPr>
-        <a:xfrm>
-          <a:off x="0" y="0"/>
-          <a:ext cx="0" cy="0"/>
-          <a:chOff x="0" y="0"/>
-          <a:chExt cx="0" cy="0"/>
-        </a:xfrm>
-      </p:grpSpPr>
-      <p:pic>
-        <p:nvPicPr>
-          <p:cNvPr id="38" name="Immagine 37" descr="Immagine che contiene testo, schermata, diagramma, numero&#10;&#10;Il contenuto generato dall'IA potrebbe non essere corretto.">
-            <a:extLst>
-              <a:ext uri="{FF2B5EF4-FFF2-40B4-BE49-F238E27FC236}">
-                <a16:creationId xmlns:a16="http://schemas.microsoft.com/office/drawing/2014/main" id="{3B2E6781-08DF-588F-F409-C300D955C6EC}"/>
-              </a:ext>
-            </a:extLst>
-          </p:cNvPr>
-          <p:cNvPicPr>
-            <a:picLocks noChangeAspect="1"/>
-          </p:cNvPicPr>
-          <p:nvPr/>
-        </p:nvPicPr>
-        <p:blipFill>
-          <a:blip r:embed="rId3"/>
-          <a:stretch>
-            <a:fillRect/>
-          </a:stretch>
-        </p:blipFill>
-        <p:spPr>
-          <a:xfrm>
-            <a:off x="4245460" y="3241969"/>
-            <a:ext cx="197443" cy="86632"/>
-          </a:xfrm>
-          <a:prstGeom prst="rect">
-            <a:avLst/>
-          </a:prstGeom>
-        </p:spPr>
-      </p:pic>
-      <p:sp>
-        <p:nvSpPr>
-          <p:cNvPr id="6" name="Parallelogramma 5">
-            <a:extLst>
-              <a:ext uri="{FF2B5EF4-FFF2-40B4-BE49-F238E27FC236}">
-                <a16:creationId xmlns:a16="http://schemas.microsoft.com/office/drawing/2014/main" id="{7526B841-A049-BF67-43A3-D4ADB829F23A}"/>
-              </a:ext>
-            </a:extLst>
-          </p:cNvPr>
-          <p:cNvSpPr/>
-          <p:nvPr/>
-        </p:nvSpPr>
-        <p:spPr>
-          <a:xfrm>
-            <a:off x="-238531" y="6376664"/>
-            <a:ext cx="8472199" cy="481339"/>
-          </a:xfrm>
-          <a:prstGeom prst="parallelogram">
-            <a:avLst/>
-          </a:prstGeom>
-          <a:solidFill>
-            <a:srgbClr val="0F406B"/>
-          </a:solidFill>
-          <a:ln>
-            <a:noFill/>
-          </a:ln>
-        </p:spPr>
-        <p:style>
-          <a:lnRef idx="1">
-            <a:schemeClr val="accent1"/>
-          </a:lnRef>
-          <a:fillRef idx="3">
-            <a:schemeClr val="accent1"/>
-          </a:fillRef>
-          <a:effectRef idx="2">
-            <a:schemeClr val="accent1"/>
-          </a:effectRef>
-          <a:fontRef idx="minor">
-            <a:schemeClr val="lt1"/>
-          </a:fontRef>
-        </p:style>
-        <p:txBody>
-          <a:bodyPr rtlCol="0" anchor="ctr"/>
-          <a:lstStyle/>
-          <a:p>
-            <a:pPr algn="ctr"/>
-            <a:endParaRPr lang="it-IT">
-              <a:solidFill>
-                <a:srgbClr val="0F406B"/>
-              </a:solidFill>
-            </a:endParaRPr>
-          </a:p>
-        </p:txBody>
-      </p:sp>
-      <p:pic>
-        <p:nvPicPr>
-          <p:cNvPr id="7" name="Immagine 6" descr="cherubino_pant541.eps">
-            <a:extLst>
-              <a:ext uri="{FF2B5EF4-FFF2-40B4-BE49-F238E27FC236}">
-                <a16:creationId xmlns:a16="http://schemas.microsoft.com/office/drawing/2014/main" id="{81C54B1E-3854-C5F0-D471-BB6801B5A35D}"/>
-              </a:ext>
-            </a:extLst>
-          </p:cNvPr>
-          <p:cNvPicPr>
-            <a:picLocks noChangeAspect="1"/>
-          </p:cNvPicPr>
-          <p:nvPr/>
-        </p:nvPicPr>
-        <p:blipFill>
-          <a:blip r:embed="rId4">
-            <a:extLst>
-              <a:ext uri="{28A0092B-C50C-407E-A947-70E740481C1C}">
-                <a14:useLocalDpi xmlns:a14="http://schemas.microsoft.com/office/drawing/2010/main" val="0"/>
-              </a:ext>
-            </a:extLst>
-          </a:blip>
-          <a:stretch>
-            <a:fillRect/>
-          </a:stretch>
-        </p:blipFill>
-        <p:spPr>
-          <a:xfrm>
-            <a:off x="8458202" y="6376665"/>
-            <a:ext cx="459463" cy="469067"/>
-          </a:xfrm>
-          <a:prstGeom prst="rect">
-            <a:avLst/>
-          </a:prstGeom>
-        </p:spPr>
-      </p:pic>
-      <p:pic>
-        <p:nvPicPr>
-          <p:cNvPr id="8" name="Immagine 7" descr="logo_white.eps">
-            <a:extLst>
-              <a:ext uri="{FF2B5EF4-FFF2-40B4-BE49-F238E27FC236}">
-                <a16:creationId xmlns:a16="http://schemas.microsoft.com/office/drawing/2014/main" id="{5E7581D7-3684-38FB-49AC-D380A57E87B4}"/>
-              </a:ext>
-            </a:extLst>
-          </p:cNvPr>
-          <p:cNvPicPr>
-            <a:picLocks noChangeAspect="1"/>
-          </p:cNvPicPr>
-          <p:nvPr/>
-        </p:nvPicPr>
-        <p:blipFill>
-          <a:blip r:embed="rId5">
-            <a:extLst>
-              <a:ext uri="{28A0092B-C50C-407E-A947-70E740481C1C}">
-                <a14:useLocalDpi xmlns:a14="http://schemas.microsoft.com/office/drawing/2010/main" val="0"/>
-              </a:ext>
-            </a:extLst>
-          </a:blip>
-          <a:stretch>
-            <a:fillRect/>
-          </a:stretch>
-        </p:blipFill>
-        <p:spPr>
-          <a:xfrm>
-            <a:off x="5457610" y="6502433"/>
-            <a:ext cx="2395665" cy="220877"/>
-          </a:xfrm>
-          <a:prstGeom prst="rect">
-            <a:avLst/>
-          </a:prstGeom>
-        </p:spPr>
-      </p:pic>
-      <p:sp>
-        <p:nvSpPr>
-          <p:cNvPr id="3" name="CasellaDiTesto 2">
-            <a:extLst>
-              <a:ext uri="{FF2B5EF4-FFF2-40B4-BE49-F238E27FC236}">
-                <a16:creationId xmlns:a16="http://schemas.microsoft.com/office/drawing/2014/main" id="{72481C5A-4A80-9DA9-36C6-B338316DDBB2}"/>
-              </a:ext>
-            </a:extLst>
-          </p:cNvPr>
-          <p:cNvSpPr txBox="1">
-            <a:spLocks noChangeArrowheads="1"/>
-          </p:cNvSpPr>
-          <p:nvPr/>
-        </p:nvSpPr>
-        <p:spPr bwMode="auto">
-          <a:xfrm>
-            <a:off x="3" y="0"/>
-            <a:ext cx="3400425" cy="553998"/>
-          </a:xfrm>
-          <a:prstGeom prst="rect">
-            <a:avLst/>
-          </a:prstGeom>
-          <a:noFill/>
-          <a:ln>
-            <a:noFill/>
-          </a:ln>
-          <a:extLst>
-            <a:ext uri="{909E8E84-426E-40DD-AFC4-6F175D3DCCD1}">
-              <a14:hiddenFill xmlns:a14="http://schemas.microsoft.com/office/drawing/2010/main">
-                <a:solidFill>
-                  <a:srgbClr val="FFFFFF"/>
-                </a:solidFill>
-              </a14:hiddenFill>
-            </a:ext>
-            <a:ext uri="{91240B29-F687-4F45-9708-019B960494DF}">
-              <a14:hiddenLine xmlns:a14="http://schemas.microsoft.com/office/drawing/2010/main" w="9525">
-                <a:solidFill>
-                  <a:srgbClr val="000000"/>
-                </a:solidFill>
-                <a:miter lim="800000"/>
-                <a:headEnd/>
-                <a:tailEnd/>
-              </a14:hiddenLine>
-            </a:ext>
-          </a:extLst>
-        </p:spPr>
-        <p:txBody>
-          <a:bodyPr wrap="square">
-            <a:spAutoFit/>
-          </a:bodyPr>
-          <a:lstStyle>
-            <a:lvl1pPr eaLnBrk="0" hangingPunct="0">
-              <a:defRPr sz="3000">
-                <a:solidFill>
-                  <a:srgbClr val="414141"/>
-                </a:solidFill>
-                <a:latin typeface="Gill Sans Light" charset="0"/>
-                <a:ea typeface="ヒラギノ角ゴ ProN W3" charset="0"/>
-                <a:cs typeface="ヒラギノ角ゴ ProN W3" charset="0"/>
-                <a:sym typeface="Gill Sans Light" charset="0"/>
-              </a:defRPr>
-            </a:lvl1pPr>
-            <a:lvl2pPr marL="742950" indent="-285750" eaLnBrk="0" hangingPunct="0">
-              <a:defRPr sz="3000">
-                <a:solidFill>
-                  <a:srgbClr val="414141"/>
-                </a:solidFill>
-                <a:latin typeface="Gill Sans Light" charset="0"/>
-                <a:ea typeface="ヒラギノ角ゴ ProN W3" charset="0"/>
-                <a:cs typeface="ヒラギノ角ゴ ProN W3" charset="0"/>
-                <a:sym typeface="Gill Sans Light" charset="0"/>
-              </a:defRPr>
-            </a:lvl2pPr>
-            <a:lvl3pPr marL="1143000" indent="-228600" eaLnBrk="0" hangingPunct="0">
-              <a:defRPr sz="3000">
-                <a:solidFill>
-                  <a:srgbClr val="414141"/>
-                </a:solidFill>
-                <a:latin typeface="Gill Sans Light" charset="0"/>
-                <a:ea typeface="ヒラギノ角ゴ ProN W3" charset="0"/>
-                <a:cs typeface="ヒラギノ角ゴ ProN W3" charset="0"/>
-                <a:sym typeface="Gill Sans Light" charset="0"/>
-              </a:defRPr>
-            </a:lvl3pPr>
-            <a:lvl4pPr marL="1600200" indent="-228600" eaLnBrk="0" hangingPunct="0">
-              <a:defRPr sz="3000">
-                <a:solidFill>
-                  <a:srgbClr val="414141"/>
-                </a:solidFill>
-                <a:latin typeface="Gill Sans Light" charset="0"/>
-                <a:ea typeface="ヒラギノ角ゴ ProN W3" charset="0"/>
-                <a:cs typeface="ヒラギノ角ゴ ProN W3" charset="0"/>
-                <a:sym typeface="Gill Sans Light" charset="0"/>
-              </a:defRPr>
-            </a:lvl4pPr>
-            <a:lvl5pPr marL="2057400" indent="-228600" eaLnBrk="0" hangingPunct="0">
-              <a:defRPr sz="3000">
-                <a:solidFill>
-                  <a:srgbClr val="414141"/>
-                </a:solidFill>
-                <a:latin typeface="Gill Sans Light" charset="0"/>
-                <a:ea typeface="ヒラギノ角ゴ ProN W3" charset="0"/>
-                <a:cs typeface="ヒラギノ角ゴ ProN W3" charset="0"/>
-                <a:sym typeface="Gill Sans Light" charset="0"/>
-              </a:defRPr>
-            </a:lvl5pPr>
-            <a:lvl6pPr marL="2514600" indent="-228600" algn="ctr" eaLnBrk="0" fontAlgn="base" hangingPunct="0">
-              <a:spcBef>
-                <a:spcPct val="0"/>
-              </a:spcBef>
-              <a:spcAft>
-                <a:spcPct val="0"/>
-              </a:spcAft>
-              <a:defRPr sz="3000">
-                <a:solidFill>
-                  <a:srgbClr val="414141"/>
-                </a:solidFill>
-                <a:latin typeface="Gill Sans Light" charset="0"/>
-                <a:ea typeface="ヒラギノ角ゴ ProN W3" charset="0"/>
-                <a:cs typeface="ヒラギノ角ゴ ProN W3" charset="0"/>
-                <a:sym typeface="Gill Sans Light" charset="0"/>
-              </a:defRPr>
-            </a:lvl6pPr>
-            <a:lvl7pPr marL="2971800" indent="-228600" algn="ctr" eaLnBrk="0" fontAlgn="base" hangingPunct="0">
-              <a:spcBef>
-                <a:spcPct val="0"/>
-              </a:spcBef>
-              <a:spcAft>
-                <a:spcPct val="0"/>
-              </a:spcAft>
-              <a:defRPr sz="3000">
-                <a:solidFill>
-                  <a:srgbClr val="414141"/>
-                </a:solidFill>
-                <a:latin typeface="Gill Sans Light" charset="0"/>
-                <a:ea typeface="ヒラギノ角ゴ ProN W3" charset="0"/>
-                <a:cs typeface="ヒラギノ角ゴ ProN W3" charset="0"/>
-                <a:sym typeface="Gill Sans Light" charset="0"/>
-              </a:defRPr>
-            </a:lvl7pPr>
-            <a:lvl8pPr marL="3429000" indent="-228600" algn="ctr" eaLnBrk="0" fontAlgn="base" hangingPunct="0">
-              <a:spcBef>
-                <a:spcPct val="0"/>
-              </a:spcBef>
-              <a:spcAft>
-                <a:spcPct val="0"/>
-              </a:spcAft>
-              <a:defRPr sz="3000">
-                <a:solidFill>
-                  <a:srgbClr val="414141"/>
-                </a:solidFill>
-                <a:latin typeface="Gill Sans Light" charset="0"/>
-                <a:ea typeface="ヒラギノ角ゴ ProN W3" charset="0"/>
-                <a:cs typeface="ヒラギノ角ゴ ProN W3" charset="0"/>
-                <a:sym typeface="Gill Sans Light" charset="0"/>
-              </a:defRPr>
-            </a:lvl8pPr>
-            <a:lvl9pPr marL="3886200" indent="-228600" algn="ctr" eaLnBrk="0" fontAlgn="base" hangingPunct="0">
-              <a:spcBef>
-                <a:spcPct val="0"/>
-              </a:spcBef>
-              <a:spcAft>
-                <a:spcPct val="0"/>
-              </a:spcAft>
-              <a:defRPr sz="3000">
-                <a:solidFill>
-                  <a:srgbClr val="414141"/>
-                </a:solidFill>
-                <a:latin typeface="Gill Sans Light" charset="0"/>
-                <a:ea typeface="ヒラギノ角ゴ ProN W3" charset="0"/>
-                <a:cs typeface="ヒラギノ角ゴ ProN W3" charset="0"/>
-                <a:sym typeface="Gill Sans Light" charset="0"/>
-              </a:defRPr>
-            </a:lvl9pPr>
-          </a:lstStyle>
-          <a:p>
-            <a:pPr eaLnBrk="1" hangingPunct="1"/>
-            <a:r>
-              <a:rPr lang="it-IT" b="1">
-                <a:solidFill>
-                  <a:srgbClr val="0F406B"/>
-                </a:solidFill>
-                <a:latin typeface="Arial" panose="020B0604020202020204" pitchFamily="34" charset="0"/>
-                <a:cs typeface="Arial" panose="020B0604020202020204" pitchFamily="34" charset="0"/>
-              </a:rPr>
-              <a:t>R</a:t>
-            </a:r>
-            <a:r>
-              <a:rPr lang="it-IT" sz="2000" b="1">
-                <a:solidFill>
-                  <a:srgbClr val="0F406B"/>
-                </a:solidFill>
-                <a:latin typeface="Arial" panose="020B0604020202020204" pitchFamily="34" charset="0"/>
-                <a:cs typeface="Arial" panose="020B0604020202020204" pitchFamily="34" charset="0"/>
-              </a:rPr>
-              <a:t>ESULTS</a:t>
-            </a:r>
-            <a:endParaRPr lang="it-IT" sz="1400" b="1">
-              <a:solidFill>
-                <a:srgbClr val="0F406B"/>
-              </a:solidFill>
-              <a:latin typeface="Arial" panose="020B0604020202020204" pitchFamily="34" charset="0"/>
-              <a:cs typeface="Arial" panose="020B0604020202020204" pitchFamily="34" charset="0"/>
-            </a:endParaRPr>
-          </a:p>
-        </p:txBody>
-      </p:sp>
-      <p:cxnSp>
-        <p:nvCxnSpPr>
-          <p:cNvPr id="23" name="Connettore diritto 22">
-            <a:extLst>
-              <a:ext uri="{FF2B5EF4-FFF2-40B4-BE49-F238E27FC236}">
-                <a16:creationId xmlns:a16="http://schemas.microsoft.com/office/drawing/2014/main" id="{CC034298-C43C-2456-97DE-0BD6918FF98C}"/>
-              </a:ext>
-            </a:extLst>
-          </p:cNvPr>
-          <p:cNvCxnSpPr>
-            <a:cxnSpLocks/>
-          </p:cNvCxnSpPr>
-          <p:nvPr/>
-        </p:nvCxnSpPr>
-        <p:spPr>
-          <a:xfrm>
-            <a:off x="126750" y="593643"/>
-            <a:ext cx="1819747" cy="0"/>
-          </a:xfrm>
-          <a:prstGeom prst="line">
-            <a:avLst/>
-          </a:prstGeom>
-          <a:ln w="38100">
-            <a:solidFill>
-              <a:srgbClr val="0F406B"/>
-            </a:solidFill>
-          </a:ln>
-        </p:spPr>
-        <p:style>
-          <a:lnRef idx="2">
-            <a:schemeClr val="accent1"/>
-          </a:lnRef>
-          <a:fillRef idx="0">
-            <a:schemeClr val="accent1"/>
-          </a:fillRef>
-          <a:effectRef idx="1">
-            <a:schemeClr val="accent1"/>
-          </a:effectRef>
-          <a:fontRef idx="minor">
-            <a:schemeClr val="tx1"/>
-          </a:fontRef>
-        </p:style>
-      </p:cxnSp>
-      <p:sp>
-        <p:nvSpPr>
-          <p:cNvPr id="16" name="CasellaDiTesto 15">
-            <a:extLst>
-              <a:ext uri="{FF2B5EF4-FFF2-40B4-BE49-F238E27FC236}">
-                <a16:creationId xmlns:a16="http://schemas.microsoft.com/office/drawing/2014/main" id="{E47A22F5-618E-B314-3722-A00F56A3AD64}"/>
-              </a:ext>
-            </a:extLst>
-          </p:cNvPr>
-          <p:cNvSpPr txBox="1">
-            <a:spLocks noChangeArrowheads="1"/>
-          </p:cNvSpPr>
-          <p:nvPr/>
-        </p:nvSpPr>
-        <p:spPr bwMode="auto">
-          <a:xfrm>
-            <a:off x="94957" y="747871"/>
-            <a:ext cx="3400425" cy="338554"/>
-          </a:xfrm>
-          <a:prstGeom prst="rect">
-            <a:avLst/>
-          </a:prstGeom>
-          <a:noFill/>
-          <a:ln>
-            <a:noFill/>
-          </a:ln>
-          <a:extLst>
-            <a:ext uri="{909E8E84-426E-40DD-AFC4-6F175D3DCCD1}">
-              <a14:hiddenFill xmlns:a14="http://schemas.microsoft.com/office/drawing/2010/main">
-                <a:solidFill>
-                  <a:srgbClr val="FFFFFF"/>
-                </a:solidFill>
-              </a14:hiddenFill>
-            </a:ext>
-            <a:ext uri="{91240B29-F687-4F45-9708-019B960494DF}">
-              <a14:hiddenLine xmlns:a14="http://schemas.microsoft.com/office/drawing/2010/main" w="9525">
-                <a:solidFill>
-                  <a:srgbClr val="000000"/>
-                </a:solidFill>
-                <a:miter lim="800000"/>
-                <a:headEnd/>
-                <a:tailEnd/>
-              </a14:hiddenLine>
-            </a:ext>
-          </a:extLst>
-        </p:spPr>
-        <p:txBody>
-          <a:bodyPr wrap="square">
-            <a:spAutoFit/>
-          </a:bodyPr>
-          <a:lstStyle>
-            <a:lvl1pPr eaLnBrk="0" hangingPunct="0">
-              <a:defRPr sz="3000">
-                <a:solidFill>
-                  <a:srgbClr val="414141"/>
-                </a:solidFill>
-                <a:latin typeface="Gill Sans Light" charset="0"/>
-                <a:ea typeface="ヒラギノ角ゴ ProN W3" charset="0"/>
-                <a:cs typeface="ヒラギノ角ゴ ProN W3" charset="0"/>
-                <a:sym typeface="Gill Sans Light" charset="0"/>
-              </a:defRPr>
-            </a:lvl1pPr>
-            <a:lvl2pPr marL="742950" indent="-285750" eaLnBrk="0" hangingPunct="0">
-              <a:defRPr sz="3000">
-                <a:solidFill>
-                  <a:srgbClr val="414141"/>
-                </a:solidFill>
-                <a:latin typeface="Gill Sans Light" charset="0"/>
-                <a:ea typeface="ヒラギノ角ゴ ProN W3" charset="0"/>
-                <a:cs typeface="ヒラギノ角ゴ ProN W3" charset="0"/>
-                <a:sym typeface="Gill Sans Light" charset="0"/>
-              </a:defRPr>
-            </a:lvl2pPr>
-            <a:lvl3pPr marL="1143000" indent="-228600" eaLnBrk="0" hangingPunct="0">
-              <a:defRPr sz="3000">
-                <a:solidFill>
-                  <a:srgbClr val="414141"/>
-                </a:solidFill>
-                <a:latin typeface="Gill Sans Light" charset="0"/>
-                <a:ea typeface="ヒラギノ角ゴ ProN W3" charset="0"/>
-                <a:cs typeface="ヒラギノ角ゴ ProN W3" charset="0"/>
-                <a:sym typeface="Gill Sans Light" charset="0"/>
-              </a:defRPr>
-            </a:lvl3pPr>
-            <a:lvl4pPr marL="1600200" indent="-228600" eaLnBrk="0" hangingPunct="0">
-              <a:defRPr sz="3000">
-                <a:solidFill>
-                  <a:srgbClr val="414141"/>
-                </a:solidFill>
-                <a:latin typeface="Gill Sans Light" charset="0"/>
-                <a:ea typeface="ヒラギノ角ゴ ProN W3" charset="0"/>
-                <a:cs typeface="ヒラギノ角ゴ ProN W3" charset="0"/>
-                <a:sym typeface="Gill Sans Light" charset="0"/>
-              </a:defRPr>
-            </a:lvl4pPr>
-            <a:lvl5pPr marL="2057400" indent="-228600" eaLnBrk="0" hangingPunct="0">
-              <a:defRPr sz="3000">
-                <a:solidFill>
-                  <a:srgbClr val="414141"/>
-                </a:solidFill>
-                <a:latin typeface="Gill Sans Light" charset="0"/>
-                <a:ea typeface="ヒラギノ角ゴ ProN W3" charset="0"/>
-                <a:cs typeface="ヒラギノ角ゴ ProN W3" charset="0"/>
-                <a:sym typeface="Gill Sans Light" charset="0"/>
-              </a:defRPr>
-            </a:lvl5pPr>
-            <a:lvl6pPr marL="2514600" indent="-228600" algn="ctr" eaLnBrk="0" fontAlgn="base" hangingPunct="0">
-              <a:spcBef>
-                <a:spcPct val="0"/>
-              </a:spcBef>
-              <a:spcAft>
-                <a:spcPct val="0"/>
-              </a:spcAft>
-              <a:defRPr sz="3000">
-                <a:solidFill>
-                  <a:srgbClr val="414141"/>
-                </a:solidFill>
-                <a:latin typeface="Gill Sans Light" charset="0"/>
-                <a:ea typeface="ヒラギノ角ゴ ProN W3" charset="0"/>
-                <a:cs typeface="ヒラギノ角ゴ ProN W3" charset="0"/>
-                <a:sym typeface="Gill Sans Light" charset="0"/>
-              </a:defRPr>
-            </a:lvl6pPr>
-            <a:lvl7pPr marL="2971800" indent="-228600" algn="ctr" eaLnBrk="0" fontAlgn="base" hangingPunct="0">
-              <a:spcBef>
-                <a:spcPct val="0"/>
-              </a:spcBef>
-              <a:spcAft>
-                <a:spcPct val="0"/>
-              </a:spcAft>
-              <a:defRPr sz="3000">
-                <a:solidFill>
-                  <a:srgbClr val="414141"/>
-                </a:solidFill>
-                <a:latin typeface="Gill Sans Light" charset="0"/>
-                <a:ea typeface="ヒラギノ角ゴ ProN W3" charset="0"/>
-                <a:cs typeface="ヒラギノ角ゴ ProN W3" charset="0"/>
-                <a:sym typeface="Gill Sans Light" charset="0"/>
-              </a:defRPr>
-            </a:lvl7pPr>
-            <a:lvl8pPr marL="3429000" indent="-228600" algn="ctr" eaLnBrk="0" fontAlgn="base" hangingPunct="0">
-              <a:spcBef>
-                <a:spcPct val="0"/>
-              </a:spcBef>
-              <a:spcAft>
-                <a:spcPct val="0"/>
-              </a:spcAft>
-              <a:defRPr sz="3000">
-                <a:solidFill>
-                  <a:srgbClr val="414141"/>
-                </a:solidFill>
-                <a:latin typeface="Gill Sans Light" charset="0"/>
-                <a:ea typeface="ヒラギノ角ゴ ProN W3" charset="0"/>
-                <a:cs typeface="ヒラギノ角ゴ ProN W3" charset="0"/>
-                <a:sym typeface="Gill Sans Light" charset="0"/>
-              </a:defRPr>
-            </a:lvl8pPr>
-            <a:lvl9pPr marL="3886200" indent="-228600" algn="ctr" eaLnBrk="0" fontAlgn="base" hangingPunct="0">
-              <a:spcBef>
-                <a:spcPct val="0"/>
-              </a:spcBef>
-              <a:spcAft>
-                <a:spcPct val="0"/>
-              </a:spcAft>
-              <a:defRPr sz="3000">
-                <a:solidFill>
-                  <a:srgbClr val="414141"/>
-                </a:solidFill>
-                <a:latin typeface="Gill Sans Light" charset="0"/>
-                <a:ea typeface="ヒラギノ角ゴ ProN W3" charset="0"/>
-                <a:cs typeface="ヒラギノ角ゴ ProN W3" charset="0"/>
-                <a:sym typeface="Gill Sans Light" charset="0"/>
-              </a:defRPr>
-            </a:lvl9pPr>
-          </a:lstStyle>
-          <a:p>
-            <a:pPr eaLnBrk="1" hangingPunct="1"/>
-            <a:r>
-              <a:rPr lang="it-IT" sz="1600" b="1">
-                <a:solidFill>
-                  <a:srgbClr val="0F406B"/>
-                </a:solidFill>
-                <a:latin typeface="Arial" panose="020B0604020202020204" pitchFamily="34" charset="0"/>
-                <a:cs typeface="Arial" panose="020B0604020202020204" pitchFamily="34" charset="0"/>
-              </a:rPr>
-              <a:t>BEST COMBINATIONS :</a:t>
-            </a:r>
-          </a:p>
-        </p:txBody>
-      </p:sp>
-      <p:sp>
-        <p:nvSpPr>
-          <p:cNvPr id="21" name="CasellaDiTesto 20">
-            <a:extLst>
-              <a:ext uri="{FF2B5EF4-FFF2-40B4-BE49-F238E27FC236}">
-                <a16:creationId xmlns:a16="http://schemas.microsoft.com/office/drawing/2014/main" id="{BFE07B55-E79E-06A1-1A48-B38D2CC69D97}"/>
-              </a:ext>
-            </a:extLst>
-          </p:cNvPr>
-          <p:cNvSpPr txBox="1"/>
-          <p:nvPr/>
-        </p:nvSpPr>
-        <p:spPr>
-          <a:xfrm>
-            <a:off x="126750" y="5718970"/>
-            <a:ext cx="6851211" cy="369332"/>
-          </a:xfrm>
-          <a:prstGeom prst="rect">
-            <a:avLst/>
-          </a:prstGeom>
-          <a:noFill/>
-        </p:spPr>
-        <p:txBody>
-          <a:bodyPr wrap="square">
-            <a:spAutoFit/>
-          </a:bodyPr>
-          <a:lstStyle/>
-          <a:p>
-            <a:r>
-              <a:rPr lang="it-IT">
-                <a:latin typeface="Arial" panose="020B0604020202020204" pitchFamily="34" charset="0"/>
-                <a:cs typeface="Arial" panose="020B0604020202020204" pitchFamily="34" charset="0"/>
-              </a:rPr>
-              <a:t>Best </a:t>
-            </a:r>
-            <a:r>
-              <a:rPr lang="it-IT" err="1">
-                <a:latin typeface="Arial" panose="020B0604020202020204" pitchFamily="34" charset="0"/>
-                <a:cs typeface="Arial" panose="020B0604020202020204" pitchFamily="34" charset="0"/>
-              </a:rPr>
-              <a:t>achieved</a:t>
-            </a:r>
-            <a:r>
-              <a:rPr lang="it-IT">
-                <a:latin typeface="Arial" panose="020B0604020202020204" pitchFamily="34" charset="0"/>
-                <a:cs typeface="Arial" panose="020B0604020202020204" pitchFamily="34" charset="0"/>
-              </a:rPr>
-              <a:t> </a:t>
-            </a:r>
-            <a:r>
-              <a:rPr lang="it-IT" b="1">
-                <a:solidFill>
-                  <a:srgbClr val="0F406B"/>
-                </a:solidFill>
-                <a:latin typeface="Arial" panose="020B0604020202020204" pitchFamily="34" charset="0"/>
-                <a:cs typeface="Arial" panose="020B0604020202020204" pitchFamily="34" charset="0"/>
-              </a:rPr>
-              <a:t>f1-macro score </a:t>
-            </a:r>
-            <a:r>
-              <a:rPr lang="it-IT" err="1">
-                <a:latin typeface="Arial" panose="020B0604020202020204" pitchFamily="34" charset="0"/>
-                <a:cs typeface="Arial" panose="020B0604020202020204" pitchFamily="34" charset="0"/>
-              </a:rPr>
-              <a:t>during</a:t>
-            </a:r>
-            <a:r>
-              <a:rPr lang="it-IT">
-                <a:latin typeface="Arial" panose="020B0604020202020204" pitchFamily="34" charset="0"/>
-                <a:cs typeface="Arial" panose="020B0604020202020204" pitchFamily="34" charset="0"/>
-              </a:rPr>
-              <a:t> </a:t>
-            </a:r>
-            <a:r>
-              <a:rPr lang="it-IT" err="1">
-                <a:latin typeface="Arial" panose="020B0604020202020204" pitchFamily="34" charset="0"/>
-                <a:cs typeface="Arial" panose="020B0604020202020204" pitchFamily="34" charset="0"/>
-              </a:rPr>
-              <a:t>RandomSearchCV</a:t>
-            </a:r>
-            <a:r>
-              <a:rPr lang="it-IT">
-                <a:latin typeface="Arial" panose="020B0604020202020204" pitchFamily="34" charset="0"/>
-                <a:cs typeface="Arial" panose="020B0604020202020204" pitchFamily="34" charset="0"/>
-              </a:rPr>
-              <a:t> : </a:t>
-            </a:r>
-            <a:r>
-              <a:rPr lang="it-IT" b="1">
-                <a:solidFill>
-                  <a:srgbClr val="0F406B"/>
-                </a:solidFill>
-                <a:latin typeface="Arial" panose="020B0604020202020204" pitchFamily="34" charset="0"/>
-                <a:cs typeface="Arial" panose="020B0604020202020204" pitchFamily="34" charset="0"/>
-              </a:rPr>
-              <a:t>0.787</a:t>
-            </a:r>
-          </a:p>
-        </p:txBody>
-      </p:sp>
-      <p:pic>
-        <p:nvPicPr>
-          <p:cNvPr id="5" name="Immagine 4">
-            <a:extLst>
-              <a:ext uri="{FF2B5EF4-FFF2-40B4-BE49-F238E27FC236}">
-                <a16:creationId xmlns:a16="http://schemas.microsoft.com/office/drawing/2014/main" id="{5ECC6075-017B-0574-488C-46C7F82C5F79}"/>
-              </a:ext>
-            </a:extLst>
-          </p:cNvPr>
-          <p:cNvPicPr>
-            <a:picLocks noChangeAspect="1"/>
-          </p:cNvPicPr>
-          <p:nvPr/>
-        </p:nvPicPr>
-        <p:blipFill>
-          <a:blip r:embed="rId6"/>
-          <a:stretch>
-            <a:fillRect/>
-          </a:stretch>
-        </p:blipFill>
-        <p:spPr>
-          <a:xfrm>
-            <a:off x="94955" y="1054576"/>
-            <a:ext cx="8917663" cy="4664395"/>
-          </a:xfrm>
-          <a:prstGeom prst="rect">
-            <a:avLst/>
-          </a:prstGeom>
-        </p:spPr>
-      </p:pic>
-    </p:spTree>
-    <p:extLst>
-      <p:ext uri="{BB962C8B-B14F-4D97-AF65-F5344CB8AC3E}">
-        <p14:creationId xmlns:p14="http://schemas.microsoft.com/office/powerpoint/2010/main" val="707321557"/>
-      </p:ext>
-    </p:extLst>
-  </p:cSld>
-  <p:clrMapOvr>
-    <a:masterClrMapping/>
-  </p:clrMapOvr>
-  <mc:AlternateContent xmlns:mc="http://schemas.openxmlformats.org/markup-compatibility/2006" xmlns:p159="http://schemas.microsoft.com/office/powerpoint/2015/09/main">
-    <mc:Choice Requires="p159">
-      <p:transition xmlns:p14="http://schemas.microsoft.com/office/powerpoint/2010/main" spd="slow" p14:dur="1500">
         <p159:morph option="byObject"/>
       </p:transition>
     </mc:Choice>
@@ -20999,397 +18242,12 @@
           </a:fontRef>
         </p:style>
       </p:cxnSp>
-      <p:sp>
-        <p:nvSpPr>
-          <p:cNvPr id="3" name="CasellaDiTesto 15">
-            <a:extLst>
-              <a:ext uri="{FF2B5EF4-FFF2-40B4-BE49-F238E27FC236}">
-                <a16:creationId xmlns:a16="http://schemas.microsoft.com/office/drawing/2014/main" id="{AABB9969-3445-BCAE-C692-2F872EF1EB0E}"/>
-              </a:ext>
-            </a:extLst>
-          </p:cNvPr>
-          <p:cNvSpPr txBox="1">
-            <a:spLocks noChangeArrowheads="1"/>
-          </p:cNvSpPr>
-          <p:nvPr/>
-        </p:nvSpPr>
-        <p:spPr bwMode="auto">
-          <a:xfrm>
-            <a:off x="113245" y="778353"/>
-            <a:ext cx="5168265" cy="584775"/>
-          </a:xfrm>
-          <a:prstGeom prst="rect">
-            <a:avLst/>
-          </a:prstGeom>
-          <a:noFill/>
-          <a:ln>
-            <a:noFill/>
-          </a:ln>
-          <a:extLst>
-            <a:ext uri="{909E8E84-426E-40DD-AFC4-6F175D3DCCD1}">
-              <a14:hiddenFill xmlns:a14="http://schemas.microsoft.com/office/drawing/2010/main">
-                <a:solidFill>
-                  <a:srgbClr val="FFFFFF"/>
-                </a:solidFill>
-              </a14:hiddenFill>
-            </a:ext>
-            <a:ext uri="{91240B29-F687-4F45-9708-019B960494DF}">
-              <a14:hiddenLine xmlns:a14="http://schemas.microsoft.com/office/drawing/2010/main" w="9525">
-                <a:solidFill>
-                  <a:srgbClr val="000000"/>
-                </a:solidFill>
-                <a:miter lim="800000"/>
-                <a:headEnd/>
-                <a:tailEnd/>
-              </a14:hiddenLine>
-            </a:ext>
-          </a:extLst>
-        </p:spPr>
-        <p:txBody>
-          <a:bodyPr wrap="square" lIns="91440" tIns="45720" rIns="91440" bIns="45720" anchor="t">
-            <a:spAutoFit/>
-          </a:bodyPr>
-          <a:lstStyle>
-            <a:lvl1pPr eaLnBrk="0" hangingPunct="0">
-              <a:defRPr sz="3000">
-                <a:solidFill>
-                  <a:srgbClr val="414141"/>
-                </a:solidFill>
-                <a:latin typeface="Gill Sans Light" charset="0"/>
-                <a:ea typeface="ヒラギノ角ゴ ProN W3" charset="0"/>
-                <a:cs typeface="ヒラギノ角ゴ ProN W3" charset="0"/>
-                <a:sym typeface="Gill Sans Light" charset="0"/>
-              </a:defRPr>
-            </a:lvl1pPr>
-            <a:lvl2pPr marL="742950" indent="-285750" eaLnBrk="0" hangingPunct="0">
-              <a:defRPr sz="3000">
-                <a:solidFill>
-                  <a:srgbClr val="414141"/>
-                </a:solidFill>
-                <a:latin typeface="Gill Sans Light" charset="0"/>
-                <a:ea typeface="ヒラギノ角ゴ ProN W3" charset="0"/>
-                <a:cs typeface="ヒラギノ角ゴ ProN W3" charset="0"/>
-                <a:sym typeface="Gill Sans Light" charset="0"/>
-              </a:defRPr>
-            </a:lvl2pPr>
-            <a:lvl3pPr marL="1143000" indent="-228600" eaLnBrk="0" hangingPunct="0">
-              <a:defRPr sz="3000">
-                <a:solidFill>
-                  <a:srgbClr val="414141"/>
-                </a:solidFill>
-                <a:latin typeface="Gill Sans Light" charset="0"/>
-                <a:ea typeface="ヒラギノ角ゴ ProN W3" charset="0"/>
-                <a:cs typeface="ヒラギノ角ゴ ProN W3" charset="0"/>
-                <a:sym typeface="Gill Sans Light" charset="0"/>
-              </a:defRPr>
-            </a:lvl3pPr>
-            <a:lvl4pPr marL="1600200" indent="-228600" eaLnBrk="0" hangingPunct="0">
-              <a:defRPr sz="3000">
-                <a:solidFill>
-                  <a:srgbClr val="414141"/>
-                </a:solidFill>
-                <a:latin typeface="Gill Sans Light" charset="0"/>
-                <a:ea typeface="ヒラギノ角ゴ ProN W3" charset="0"/>
-                <a:cs typeface="ヒラギノ角ゴ ProN W3" charset="0"/>
-                <a:sym typeface="Gill Sans Light" charset="0"/>
-              </a:defRPr>
-            </a:lvl4pPr>
-            <a:lvl5pPr marL="2057400" indent="-228600" eaLnBrk="0" hangingPunct="0">
-              <a:defRPr sz="3000">
-                <a:solidFill>
-                  <a:srgbClr val="414141"/>
-                </a:solidFill>
-                <a:latin typeface="Gill Sans Light" charset="0"/>
-                <a:ea typeface="ヒラギノ角ゴ ProN W3" charset="0"/>
-                <a:cs typeface="ヒラギノ角ゴ ProN W3" charset="0"/>
-                <a:sym typeface="Gill Sans Light" charset="0"/>
-              </a:defRPr>
-            </a:lvl5pPr>
-            <a:lvl6pPr marL="2514600" indent="-228600" algn="ctr" eaLnBrk="0" fontAlgn="base" hangingPunct="0">
-              <a:spcBef>
-                <a:spcPct val="0"/>
-              </a:spcBef>
-              <a:spcAft>
-                <a:spcPct val="0"/>
-              </a:spcAft>
-              <a:defRPr sz="3000">
-                <a:solidFill>
-                  <a:srgbClr val="414141"/>
-                </a:solidFill>
-                <a:latin typeface="Gill Sans Light" charset="0"/>
-                <a:ea typeface="ヒラギノ角ゴ ProN W3" charset="0"/>
-                <a:cs typeface="ヒラギノ角ゴ ProN W3" charset="0"/>
-                <a:sym typeface="Gill Sans Light" charset="0"/>
-              </a:defRPr>
-            </a:lvl6pPr>
-            <a:lvl7pPr marL="2971800" indent="-228600" algn="ctr" eaLnBrk="0" fontAlgn="base" hangingPunct="0">
-              <a:spcBef>
-                <a:spcPct val="0"/>
-              </a:spcBef>
-              <a:spcAft>
-                <a:spcPct val="0"/>
-              </a:spcAft>
-              <a:defRPr sz="3000">
-                <a:solidFill>
-                  <a:srgbClr val="414141"/>
-                </a:solidFill>
-                <a:latin typeface="Gill Sans Light" charset="0"/>
-                <a:ea typeface="ヒラギノ角ゴ ProN W3" charset="0"/>
-                <a:cs typeface="ヒラギノ角ゴ ProN W3" charset="0"/>
-                <a:sym typeface="Gill Sans Light" charset="0"/>
-              </a:defRPr>
-            </a:lvl7pPr>
-            <a:lvl8pPr marL="3429000" indent="-228600" algn="ctr" eaLnBrk="0" fontAlgn="base" hangingPunct="0">
-              <a:spcBef>
-                <a:spcPct val="0"/>
-              </a:spcBef>
-              <a:spcAft>
-                <a:spcPct val="0"/>
-              </a:spcAft>
-              <a:defRPr sz="3000">
-                <a:solidFill>
-                  <a:srgbClr val="414141"/>
-                </a:solidFill>
-                <a:latin typeface="Gill Sans Light" charset="0"/>
-                <a:ea typeface="ヒラギノ角ゴ ProN W3" charset="0"/>
-                <a:cs typeface="ヒラギノ角ゴ ProN W3" charset="0"/>
-                <a:sym typeface="Gill Sans Light" charset="0"/>
-              </a:defRPr>
-            </a:lvl8pPr>
-            <a:lvl9pPr marL="3886200" indent="-228600" algn="ctr" eaLnBrk="0" fontAlgn="base" hangingPunct="0">
-              <a:spcBef>
-                <a:spcPct val="0"/>
-              </a:spcBef>
-              <a:spcAft>
-                <a:spcPct val="0"/>
-              </a:spcAft>
-              <a:defRPr sz="3000">
-                <a:solidFill>
-                  <a:srgbClr val="414141"/>
-                </a:solidFill>
-                <a:latin typeface="Gill Sans Light" charset="0"/>
-                <a:ea typeface="ヒラギノ角ゴ ProN W3" charset="0"/>
-                <a:cs typeface="ヒラギノ角ゴ ProN W3" charset="0"/>
-                <a:sym typeface="Gill Sans Light" charset="0"/>
-              </a:defRPr>
-            </a:lvl9pPr>
-          </a:lstStyle>
-          <a:p>
-            <a:r>
-              <a:rPr lang="it-IT" sz="1600" b="1">
-                <a:solidFill>
-                  <a:srgbClr val="0F406B"/>
-                </a:solidFill>
-                <a:latin typeface="Arial"/>
-                <a:cs typeface="Arial"/>
-              </a:rPr>
-              <a:t>SHAP PLOTS</a:t>
-            </a:r>
-            <a:endParaRPr lang="en-US"/>
-          </a:p>
-          <a:p>
-            <a:endParaRPr lang="it-IT" sz="1600" b="1">
-              <a:solidFill>
-                <a:srgbClr val="0F406B"/>
-              </a:solidFill>
-              <a:latin typeface="Arial"/>
-              <a:cs typeface="Arial"/>
-            </a:endParaRPr>
-          </a:p>
-        </p:txBody>
-      </p:sp>
-      <p:sp>
-        <p:nvSpPr>
-          <p:cNvPr id="16" name="TextBox 15">
-            <a:extLst>
-              <a:ext uri="{FF2B5EF4-FFF2-40B4-BE49-F238E27FC236}">
-                <a16:creationId xmlns:a16="http://schemas.microsoft.com/office/drawing/2014/main" id="{871CC657-4744-1F46-DAE0-E9D3576AA688}"/>
-              </a:ext>
-            </a:extLst>
-          </p:cNvPr>
-          <p:cNvSpPr txBox="1"/>
-          <p:nvPr/>
-        </p:nvSpPr>
-        <p:spPr>
-          <a:xfrm>
-            <a:off x="54595" y="3695253"/>
-            <a:ext cx="6099944" cy="1077218"/>
-          </a:xfrm>
-          <a:prstGeom prst="rect">
-            <a:avLst/>
-          </a:prstGeom>
-          <a:noFill/>
-        </p:spPr>
-        <p:txBody>
-          <a:bodyPr rot="0" spcFirstLastPara="0" vertOverflow="overflow" horzOverflow="overflow" vert="horz" wrap="square" lIns="91440" tIns="45720" rIns="91440" bIns="45720" numCol="1" spcCol="0" rtlCol="0" fromWordArt="0" anchor="t" anchorCtr="0" forceAA="0" compatLnSpc="1">
-            <a:prstTxWarp prst="textNoShape">
-              <a:avLst/>
-            </a:prstTxWarp>
-            <a:spAutoFit/>
-          </a:bodyPr>
-          <a:lstStyle/>
-          <a:p>
-            <a:pPr marL="285744" indent="-285744">
-              <a:buFont typeface="Arial"/>
-              <a:buChar char="•"/>
-            </a:pPr>
-            <a:r>
-              <a:rPr lang="en-US" sz="1600">
-                <a:latin typeface="Calibri"/>
-                <a:ea typeface="Calibri"/>
-                <a:cs typeface="Calibri"/>
-              </a:rPr>
-              <a:t>SHAP values are defined over the </a:t>
-            </a:r>
-            <a:r>
-              <a:rPr lang="en-US" sz="1600" i="1" err="1">
-                <a:latin typeface="Calibri"/>
-                <a:ea typeface="Calibri"/>
-                <a:cs typeface="Calibri"/>
-              </a:rPr>
-              <a:t>predict_proba</a:t>
-            </a:r>
-            <a:r>
-              <a:rPr lang="en-US" sz="1600">
-                <a:latin typeface="Calibri"/>
-                <a:ea typeface="Calibri"/>
-                <a:cs typeface="Calibri"/>
-              </a:rPr>
-              <a:t> function of the model, thus they are on probability scale</a:t>
-            </a:r>
-            <a:endParaRPr lang="en-US">
-              <a:latin typeface="Calibri"/>
-              <a:ea typeface="Calibri"/>
-              <a:cs typeface="Calibri"/>
-            </a:endParaRPr>
-          </a:p>
-          <a:p>
-            <a:pPr marL="285744" indent="-285744">
-              <a:buFont typeface="Arial"/>
-              <a:buChar char="•"/>
-            </a:pPr>
-            <a:r>
-              <a:rPr lang="en-US" sz="1600">
-                <a:ea typeface="+mn-lt"/>
-                <a:cs typeface="+mn-lt"/>
-              </a:rPr>
-              <a:t>SHAP value </a:t>
-            </a:r>
-            <a:r>
-              <a:rPr lang="en-US" sz="1600" err="1">
-                <a:ea typeface="+mn-lt"/>
-                <a:cs typeface="+mn-lt"/>
-              </a:rPr>
-              <a:t>ϕ</a:t>
-            </a:r>
-            <a:r>
-              <a:rPr lang="en-US" sz="1600" baseline="-25000" err="1">
-                <a:ea typeface="+mn-lt"/>
-                <a:cs typeface="+mn-lt"/>
-              </a:rPr>
-              <a:t>ijk</a:t>
-            </a:r>
-            <a:r>
-              <a:rPr lang="en-US" sz="1600">
-                <a:ea typeface="+mn-lt"/>
-                <a:cs typeface="+mn-lt"/>
-              </a:rPr>
-              <a:t> = 0 indicates that feature j has no additional impact beyond the baseline expectation on class k</a:t>
-            </a:r>
-            <a:endParaRPr lang="en-US">
-              <a:ea typeface="Calibri"/>
-              <a:cs typeface="Calibri"/>
-            </a:endParaRPr>
-          </a:p>
-        </p:txBody>
-      </p:sp>
-      <p:grpSp>
-        <p:nvGrpSpPr>
-          <p:cNvPr id="9" name="Group 8">
-            <a:extLst>
-              <a:ext uri="{FF2B5EF4-FFF2-40B4-BE49-F238E27FC236}">
-                <a16:creationId xmlns:a16="http://schemas.microsoft.com/office/drawing/2014/main" id="{33CD9DC4-6CFE-9021-FF51-732AA51524A7}"/>
-              </a:ext>
-            </a:extLst>
-          </p:cNvPr>
-          <p:cNvGrpSpPr/>
-          <p:nvPr/>
-        </p:nvGrpSpPr>
-        <p:grpSpPr>
-          <a:xfrm>
-            <a:off x="39219" y="1072098"/>
-            <a:ext cx="9104780" cy="2287739"/>
-            <a:chOff x="112058" y="1223374"/>
-            <a:chExt cx="7961780" cy="1917945"/>
-          </a:xfrm>
-        </p:grpSpPr>
-        <p:pic>
-          <p:nvPicPr>
-            <p:cNvPr id="2" name="Picture 1" descr="A graph of different colored squares&#10;&#10;AI-generated content may be incorrect.">
-              <a:extLst>
-                <a:ext uri="{FF2B5EF4-FFF2-40B4-BE49-F238E27FC236}">
-                  <a16:creationId xmlns:a16="http://schemas.microsoft.com/office/drawing/2014/main" id="{BED5892E-BBC4-BABA-FDC3-8D81660606A8}"/>
-                </a:ext>
-              </a:extLst>
-            </p:cNvPr>
-            <p:cNvPicPr>
-              <a:picLocks noChangeAspect="1"/>
-            </p:cNvPicPr>
-            <p:nvPr/>
-          </p:nvPicPr>
-          <p:blipFill>
-            <a:blip r:embed="rId5"/>
-            <a:stretch>
-              <a:fillRect/>
-            </a:stretch>
-          </p:blipFill>
-          <p:spPr>
-            <a:xfrm>
-              <a:off x="112058" y="1268977"/>
-              <a:ext cx="4006104" cy="1871561"/>
-            </a:xfrm>
-            <a:prstGeom prst="rect">
-              <a:avLst/>
-            </a:prstGeom>
-          </p:spPr>
-        </p:pic>
-        <p:pic>
-          <p:nvPicPr>
-            <p:cNvPr id="5" name="Picture 4" descr="A graph of blue and pink dots&#10;&#10;AI-generated content may be incorrect.">
-              <a:extLst>
-                <a:ext uri="{FF2B5EF4-FFF2-40B4-BE49-F238E27FC236}">
-                  <a16:creationId xmlns:a16="http://schemas.microsoft.com/office/drawing/2014/main" id="{64881774-B711-6469-858E-C2C69AE05385}"/>
-                </a:ext>
-              </a:extLst>
-            </p:cNvPr>
-            <p:cNvPicPr>
-              <a:picLocks noChangeAspect="1"/>
-            </p:cNvPicPr>
-            <p:nvPr/>
-          </p:nvPicPr>
-          <p:blipFill>
-            <a:blip r:embed="rId6"/>
-            <a:stretch>
-              <a:fillRect/>
-            </a:stretch>
-          </p:blipFill>
-          <p:spPr>
-            <a:xfrm>
-              <a:off x="4118161" y="1223374"/>
-              <a:ext cx="3955677" cy="1917945"/>
-            </a:xfrm>
-            <a:prstGeom prst="rect">
-              <a:avLst/>
-            </a:prstGeom>
-          </p:spPr>
-        </p:pic>
-      </p:grpSp>
       <p:pic>
         <p:nvPicPr>
-          <p:cNvPr id="15" name="Picture 14">
-            <a:extLst>
-              <a:ext uri="{FF2B5EF4-FFF2-40B4-BE49-F238E27FC236}">
-                <a16:creationId xmlns:a16="http://schemas.microsoft.com/office/drawing/2014/main" id="{20A404D3-1BC4-1914-0755-4287A02B5E53}"/>
+          <p:cNvPr id="2" name="Picture 1" descr="A graph of different colored squares&#10;&#10;AI-generated content may be incorrect.">
+            <a:extLst>
+              <a:ext uri="{FF2B5EF4-FFF2-40B4-BE49-F238E27FC236}">
+                <a16:creationId xmlns:a16="http://schemas.microsoft.com/office/drawing/2014/main" id="{BED5892E-BBC4-BABA-FDC3-8D81660606A8}"/>
               </a:ext>
             </a:extLst>
           </p:cNvPr>
@@ -21399,135 +18257,21 @@
           <p:nvPr/>
         </p:nvPicPr>
         <p:blipFill>
-          <a:blip r:embed="rId7"/>
+          <a:blip r:embed="rId5"/>
           <a:stretch>
             <a:fillRect/>
           </a:stretch>
         </p:blipFill>
         <p:spPr>
           <a:xfrm>
-            <a:off x="6112531" y="3507442"/>
-            <a:ext cx="2981325" cy="1333500"/>
+            <a:off x="522606" y="1496960"/>
+            <a:ext cx="7548319" cy="3678265"/>
           </a:xfrm>
           <a:prstGeom prst="rect">
             <a:avLst/>
           </a:prstGeom>
         </p:spPr>
       </p:pic>
-      <p:sp>
-        <p:nvSpPr>
-          <p:cNvPr id="18" name="TextBox 17">
-            <a:extLst>
-              <a:ext uri="{FF2B5EF4-FFF2-40B4-BE49-F238E27FC236}">
-                <a16:creationId xmlns:a16="http://schemas.microsoft.com/office/drawing/2014/main" id="{00E1F412-DE3A-FA3A-C792-8FADA925A005}"/>
-              </a:ext>
-            </a:extLst>
-          </p:cNvPr>
-          <p:cNvSpPr txBox="1"/>
-          <p:nvPr/>
-        </p:nvSpPr>
-        <p:spPr>
-          <a:xfrm>
-            <a:off x="617447" y="4931711"/>
-            <a:ext cx="8475007" cy="1323439"/>
-          </a:xfrm>
-          <a:prstGeom prst="rect">
-            <a:avLst/>
-          </a:prstGeom>
-          <a:noFill/>
-        </p:spPr>
-        <p:txBody>
-          <a:bodyPr rot="0" spcFirstLastPara="0" vertOverflow="overflow" horzOverflow="overflow" vert="horz" wrap="square" lIns="91440" tIns="45720" rIns="91440" bIns="45720" numCol="1" spcCol="0" rtlCol="0" fromWordArt="0" anchor="t" anchorCtr="0" forceAA="0" compatLnSpc="1">
-            <a:prstTxWarp prst="textNoShape">
-              <a:avLst/>
-            </a:prstTxWarp>
-            <a:spAutoFit/>
-          </a:bodyPr>
-          <a:lstStyle/>
-          <a:p>
-            <a:pPr marL="342891" indent="-342891">
-              <a:buAutoNum type="arabicPeriod"/>
-            </a:pPr>
-            <a:r>
-              <a:rPr lang="en-US" sz="1600">
-                <a:ea typeface="+mn-lt"/>
-                <a:cs typeface="+mn-lt"/>
-              </a:rPr>
-              <a:t>damping coefficient is the most important feature across all classes except class 1, where stiffness is more informative</a:t>
-            </a:r>
-          </a:p>
-          <a:p>
-            <a:pPr marL="342891" indent="-342891">
-              <a:buAutoNum type="arabicPeriod"/>
-            </a:pPr>
-            <a:r>
-              <a:rPr lang="en-US" sz="1600">
-                <a:ea typeface="+mn-lt"/>
-                <a:cs typeface="+mn-lt"/>
-              </a:rPr>
-              <a:t>Higher values of damping coefficient tend to decrease the probability of predicting class 3</a:t>
-            </a:r>
-          </a:p>
-          <a:p>
-            <a:pPr marL="342891" indent="-342891">
-              <a:buAutoNum type="arabicPeriod"/>
-            </a:pPr>
-            <a:r>
-              <a:rPr lang="en-US" sz="1600">
-                <a:ea typeface="+mn-lt"/>
-                <a:cs typeface="+mn-lt"/>
-              </a:rPr>
-              <a:t>Features that have SHAP values clustered near zero for a particular class are not informative or meaningful for that class</a:t>
-            </a:r>
-            <a:endParaRPr lang="en-US">
-              <a:ea typeface="Calibri"/>
-              <a:cs typeface="Calibri"/>
-            </a:endParaRPr>
-          </a:p>
-        </p:txBody>
-      </p:sp>
-      <p:sp>
-        <p:nvSpPr>
-          <p:cNvPr id="4" name="TextBox 3">
-            <a:extLst>
-              <a:ext uri="{FF2B5EF4-FFF2-40B4-BE49-F238E27FC236}">
-                <a16:creationId xmlns:a16="http://schemas.microsoft.com/office/drawing/2014/main" id="{33FE9F38-32A8-2F73-649D-0F0D6E07055B}"/>
-              </a:ext>
-            </a:extLst>
-          </p:cNvPr>
-          <p:cNvSpPr txBox="1"/>
-          <p:nvPr/>
-        </p:nvSpPr>
-        <p:spPr>
-          <a:xfrm>
-            <a:off x="5943600" y="853441"/>
-            <a:ext cx="2743200" cy="338554"/>
-          </a:xfrm>
-          <a:prstGeom prst="rect">
-            <a:avLst/>
-          </a:prstGeom>
-          <a:noFill/>
-        </p:spPr>
-        <p:txBody>
-          <a:bodyPr rot="0" spcFirstLastPara="0" vertOverflow="overflow" horzOverflow="overflow" vert="horz" wrap="square" lIns="91440" tIns="45720" rIns="91440" bIns="45720" numCol="1" spcCol="0" rtlCol="0" fromWordArt="0" anchor="t" anchorCtr="0" forceAA="0" compatLnSpc="1">
-            <a:prstTxWarp prst="textNoShape">
-              <a:avLst/>
-            </a:prstTxWarp>
-            <a:spAutoFit/>
-          </a:bodyPr>
-          <a:lstStyle/>
-          <a:p>
-            <a:r>
-              <a:rPr lang="en-US" sz="1600" i="1"/>
-              <a:t>Class 3 SHAP values plot</a:t>
-            </a:r>
-            <a:endParaRPr lang="en-US" sz="1600" i="1">
-              <a:ea typeface="Calibri"/>
-              <a:cs typeface="Calibri"/>
-            </a:endParaRPr>
-          </a:p>
-        </p:txBody>
-      </p:sp>
     </p:spTree>
     <p:extLst>
       <p:ext uri="{BB962C8B-B14F-4D97-AF65-F5344CB8AC3E}">
@@ -21561,6 +18305,442 @@
         <p:cNvPr id="1" name="">
           <a:extLst>
             <a:ext uri="{FF2B5EF4-FFF2-40B4-BE49-F238E27FC236}">
+              <a16:creationId xmlns:a16="http://schemas.microsoft.com/office/drawing/2014/main" id="{10BA7FA5-F716-E0AC-6EF7-1CC96C4140A7}"/>
+            </a:ext>
+          </a:extLst>
+        </p:cNvPr>
+        <p:cNvGrpSpPr/>
+        <p:nvPr/>
+      </p:nvGrpSpPr>
+      <p:grpSpPr>
+        <a:xfrm>
+          <a:off x="0" y="0"/>
+          <a:ext cx="0" cy="0"/>
+          <a:chOff x="0" y="0"/>
+          <a:chExt cx="0" cy="0"/>
+        </a:xfrm>
+      </p:grpSpPr>
+      <p:sp>
+        <p:nvSpPr>
+          <p:cNvPr id="6" name="Parallelogramma 5">
+            <a:extLst>
+              <a:ext uri="{FF2B5EF4-FFF2-40B4-BE49-F238E27FC236}">
+                <a16:creationId xmlns:a16="http://schemas.microsoft.com/office/drawing/2014/main" id="{6AC4C72B-047A-8A23-EE09-30028062BCB2}"/>
+              </a:ext>
+            </a:extLst>
+          </p:cNvPr>
+          <p:cNvSpPr/>
+          <p:nvPr/>
+        </p:nvSpPr>
+        <p:spPr>
+          <a:xfrm>
+            <a:off x="-238531" y="6376664"/>
+            <a:ext cx="8472199" cy="481339"/>
+          </a:xfrm>
+          <a:prstGeom prst="parallelogram">
+            <a:avLst/>
+          </a:prstGeom>
+          <a:solidFill>
+            <a:srgbClr val="0F406B"/>
+          </a:solidFill>
+          <a:ln>
+            <a:noFill/>
+          </a:ln>
+        </p:spPr>
+        <p:style>
+          <a:lnRef idx="1">
+            <a:schemeClr val="accent1"/>
+          </a:lnRef>
+          <a:fillRef idx="3">
+            <a:schemeClr val="accent1"/>
+          </a:fillRef>
+          <a:effectRef idx="2">
+            <a:schemeClr val="accent1"/>
+          </a:effectRef>
+          <a:fontRef idx="minor">
+            <a:schemeClr val="lt1"/>
+          </a:fontRef>
+        </p:style>
+        <p:txBody>
+          <a:bodyPr rtlCol="0" anchor="ctr"/>
+          <a:lstStyle/>
+          <a:p>
+            <a:pPr algn="ctr"/>
+            <a:endParaRPr lang="it-IT">
+              <a:solidFill>
+                <a:srgbClr val="0F406B"/>
+              </a:solidFill>
+            </a:endParaRPr>
+          </a:p>
+        </p:txBody>
+      </p:sp>
+      <p:pic>
+        <p:nvPicPr>
+          <p:cNvPr id="7" name="Immagine 6" descr="cherubino_pant541.eps">
+            <a:extLst>
+              <a:ext uri="{FF2B5EF4-FFF2-40B4-BE49-F238E27FC236}">
+                <a16:creationId xmlns:a16="http://schemas.microsoft.com/office/drawing/2014/main" id="{12EA1A38-CABB-5C2C-8AC3-B7FE7667CA22}"/>
+              </a:ext>
+            </a:extLst>
+          </p:cNvPr>
+          <p:cNvPicPr>
+            <a:picLocks noChangeAspect="1"/>
+          </p:cNvPicPr>
+          <p:nvPr/>
+        </p:nvPicPr>
+        <p:blipFill>
+          <a:blip r:embed="rId3">
+            <a:extLst>
+              <a:ext uri="{28A0092B-C50C-407E-A947-70E740481C1C}">
+                <a14:useLocalDpi xmlns:a14="http://schemas.microsoft.com/office/drawing/2010/main" val="0"/>
+              </a:ext>
+            </a:extLst>
+          </a:blip>
+          <a:stretch>
+            <a:fillRect/>
+          </a:stretch>
+        </p:blipFill>
+        <p:spPr>
+          <a:xfrm>
+            <a:off x="8458202" y="6376665"/>
+            <a:ext cx="459463" cy="469067"/>
+          </a:xfrm>
+          <a:prstGeom prst="rect">
+            <a:avLst/>
+          </a:prstGeom>
+        </p:spPr>
+      </p:pic>
+      <p:pic>
+        <p:nvPicPr>
+          <p:cNvPr id="8" name="Immagine 7" descr="logo_white.eps">
+            <a:extLst>
+              <a:ext uri="{FF2B5EF4-FFF2-40B4-BE49-F238E27FC236}">
+                <a16:creationId xmlns:a16="http://schemas.microsoft.com/office/drawing/2014/main" id="{A01474F5-4E61-1050-4E66-5690564339B5}"/>
+              </a:ext>
+            </a:extLst>
+          </p:cNvPr>
+          <p:cNvPicPr>
+            <a:picLocks noChangeAspect="1"/>
+          </p:cNvPicPr>
+          <p:nvPr/>
+        </p:nvPicPr>
+        <p:blipFill>
+          <a:blip r:embed="rId4">
+            <a:extLst>
+              <a:ext uri="{28A0092B-C50C-407E-A947-70E740481C1C}">
+                <a14:useLocalDpi xmlns:a14="http://schemas.microsoft.com/office/drawing/2010/main" val="0"/>
+              </a:ext>
+            </a:extLst>
+          </a:blip>
+          <a:stretch>
+            <a:fillRect/>
+          </a:stretch>
+        </p:blipFill>
+        <p:spPr>
+          <a:xfrm>
+            <a:off x="5457610" y="6502433"/>
+            <a:ext cx="2395665" cy="220877"/>
+          </a:xfrm>
+          <a:prstGeom prst="rect">
+            <a:avLst/>
+          </a:prstGeom>
+        </p:spPr>
+      </p:pic>
+      <p:sp>
+        <p:nvSpPr>
+          <p:cNvPr id="26" name="CasellaDiTesto 1">
+            <a:extLst>
+              <a:ext uri="{FF2B5EF4-FFF2-40B4-BE49-F238E27FC236}">
+                <a16:creationId xmlns:a16="http://schemas.microsoft.com/office/drawing/2014/main" id="{5F3CF18E-3EF4-D822-65EE-E26B9E6BCE20}"/>
+              </a:ext>
+            </a:extLst>
+          </p:cNvPr>
+          <p:cNvSpPr txBox="1">
+            <a:spLocks noChangeArrowheads="1"/>
+          </p:cNvSpPr>
+          <p:nvPr/>
+        </p:nvSpPr>
+        <p:spPr bwMode="auto">
+          <a:xfrm>
+            <a:off x="55098" y="1900"/>
+            <a:ext cx="8565334" cy="523220"/>
+          </a:xfrm>
+          <a:prstGeom prst="rect">
+            <a:avLst/>
+          </a:prstGeom>
+          <a:noFill/>
+          <a:ln>
+            <a:noFill/>
+          </a:ln>
+          <a:extLst>
+            <a:ext uri="{909E8E84-426E-40DD-AFC4-6F175D3DCCD1}">
+              <a14:hiddenFill xmlns:a14="http://schemas.microsoft.com/office/drawing/2010/main">
+                <a:solidFill>
+                  <a:srgbClr val="FFFFFF"/>
+                </a:solidFill>
+              </a14:hiddenFill>
+            </a:ext>
+            <a:ext uri="{91240B29-F687-4F45-9708-019B960494DF}">
+              <a14:hiddenLine xmlns:a14="http://schemas.microsoft.com/office/drawing/2010/main" w="9525">
+                <a:solidFill>
+                  <a:srgbClr val="000000"/>
+                </a:solidFill>
+                <a:miter lim="800000"/>
+                <a:headEnd/>
+                <a:tailEnd/>
+              </a14:hiddenLine>
+            </a:ext>
+          </a:extLst>
+        </p:spPr>
+        <p:txBody>
+          <a:bodyPr wrap="square" lIns="91440" tIns="45720" rIns="91440" bIns="45720" anchor="t">
+            <a:spAutoFit/>
+          </a:bodyPr>
+          <a:lstStyle>
+            <a:lvl1pPr eaLnBrk="0" hangingPunct="0">
+              <a:defRPr sz="3000">
+                <a:solidFill>
+                  <a:srgbClr val="414141"/>
+                </a:solidFill>
+                <a:latin typeface="Gill Sans Light" charset="0"/>
+                <a:ea typeface="ヒラギノ角ゴ ProN W3" charset="0"/>
+                <a:cs typeface="ヒラギノ角ゴ ProN W3" charset="0"/>
+                <a:sym typeface="Gill Sans Light" charset="0"/>
+              </a:defRPr>
+            </a:lvl1pPr>
+            <a:lvl2pPr marL="742950" indent="-285750" eaLnBrk="0" hangingPunct="0">
+              <a:defRPr sz="3000">
+                <a:solidFill>
+                  <a:srgbClr val="414141"/>
+                </a:solidFill>
+                <a:latin typeface="Gill Sans Light" charset="0"/>
+                <a:ea typeface="ヒラギノ角ゴ ProN W3" charset="0"/>
+                <a:cs typeface="ヒラギノ角ゴ ProN W3" charset="0"/>
+                <a:sym typeface="Gill Sans Light" charset="0"/>
+              </a:defRPr>
+            </a:lvl2pPr>
+            <a:lvl3pPr marL="1143000" indent="-228600" eaLnBrk="0" hangingPunct="0">
+              <a:defRPr sz="3000">
+                <a:solidFill>
+                  <a:srgbClr val="414141"/>
+                </a:solidFill>
+                <a:latin typeface="Gill Sans Light" charset="0"/>
+                <a:ea typeface="ヒラギノ角ゴ ProN W3" charset="0"/>
+                <a:cs typeface="ヒラギノ角ゴ ProN W3" charset="0"/>
+                <a:sym typeface="Gill Sans Light" charset="0"/>
+              </a:defRPr>
+            </a:lvl3pPr>
+            <a:lvl4pPr marL="1600200" indent="-228600" eaLnBrk="0" hangingPunct="0">
+              <a:defRPr sz="3000">
+                <a:solidFill>
+                  <a:srgbClr val="414141"/>
+                </a:solidFill>
+                <a:latin typeface="Gill Sans Light" charset="0"/>
+                <a:ea typeface="ヒラギノ角ゴ ProN W3" charset="0"/>
+                <a:cs typeface="ヒラギノ角ゴ ProN W3" charset="0"/>
+                <a:sym typeface="Gill Sans Light" charset="0"/>
+              </a:defRPr>
+            </a:lvl4pPr>
+            <a:lvl5pPr marL="2057400" indent="-228600" eaLnBrk="0" hangingPunct="0">
+              <a:defRPr sz="3000">
+                <a:solidFill>
+                  <a:srgbClr val="414141"/>
+                </a:solidFill>
+                <a:latin typeface="Gill Sans Light" charset="0"/>
+                <a:ea typeface="ヒラギノ角ゴ ProN W3" charset="0"/>
+                <a:cs typeface="ヒラギノ角ゴ ProN W3" charset="0"/>
+                <a:sym typeface="Gill Sans Light" charset="0"/>
+              </a:defRPr>
+            </a:lvl5pPr>
+            <a:lvl6pPr marL="2514600" indent="-228600" algn="ctr" eaLnBrk="0" fontAlgn="base" hangingPunct="0">
+              <a:spcBef>
+                <a:spcPct val="0"/>
+              </a:spcBef>
+              <a:spcAft>
+                <a:spcPct val="0"/>
+              </a:spcAft>
+              <a:defRPr sz="3000">
+                <a:solidFill>
+                  <a:srgbClr val="414141"/>
+                </a:solidFill>
+                <a:latin typeface="Gill Sans Light" charset="0"/>
+                <a:ea typeface="ヒラギノ角ゴ ProN W3" charset="0"/>
+                <a:cs typeface="ヒラギノ角ゴ ProN W3" charset="0"/>
+                <a:sym typeface="Gill Sans Light" charset="0"/>
+              </a:defRPr>
+            </a:lvl6pPr>
+            <a:lvl7pPr marL="2971800" indent="-228600" algn="ctr" eaLnBrk="0" fontAlgn="base" hangingPunct="0">
+              <a:spcBef>
+                <a:spcPct val="0"/>
+              </a:spcBef>
+              <a:spcAft>
+                <a:spcPct val="0"/>
+              </a:spcAft>
+              <a:defRPr sz="3000">
+                <a:solidFill>
+                  <a:srgbClr val="414141"/>
+                </a:solidFill>
+                <a:latin typeface="Gill Sans Light" charset="0"/>
+                <a:ea typeface="ヒラギノ角ゴ ProN W3" charset="0"/>
+                <a:cs typeface="ヒラギノ角ゴ ProN W3" charset="0"/>
+                <a:sym typeface="Gill Sans Light" charset="0"/>
+              </a:defRPr>
+            </a:lvl7pPr>
+            <a:lvl8pPr marL="3429000" indent="-228600" algn="ctr" eaLnBrk="0" fontAlgn="base" hangingPunct="0">
+              <a:spcBef>
+                <a:spcPct val="0"/>
+              </a:spcBef>
+              <a:spcAft>
+                <a:spcPct val="0"/>
+              </a:spcAft>
+              <a:defRPr sz="3000">
+                <a:solidFill>
+                  <a:srgbClr val="414141"/>
+                </a:solidFill>
+                <a:latin typeface="Gill Sans Light" charset="0"/>
+                <a:ea typeface="ヒラギノ角ゴ ProN W3" charset="0"/>
+                <a:cs typeface="ヒラギノ角ゴ ProN W3" charset="0"/>
+                <a:sym typeface="Gill Sans Light" charset="0"/>
+              </a:defRPr>
+            </a:lvl8pPr>
+            <a:lvl9pPr marL="3886200" indent="-228600" algn="ctr" eaLnBrk="0" fontAlgn="base" hangingPunct="0">
+              <a:spcBef>
+                <a:spcPct val="0"/>
+              </a:spcBef>
+              <a:spcAft>
+                <a:spcPct val="0"/>
+              </a:spcAft>
+              <a:defRPr sz="3000">
+                <a:solidFill>
+                  <a:srgbClr val="414141"/>
+                </a:solidFill>
+                <a:latin typeface="Gill Sans Light" charset="0"/>
+                <a:ea typeface="ヒラギノ角ゴ ProN W3" charset="0"/>
+                <a:cs typeface="ヒラギノ角ゴ ProN W3" charset="0"/>
+                <a:sym typeface="Gill Sans Light" charset="0"/>
+              </a:defRPr>
+            </a:lvl9pPr>
+          </a:lstStyle>
+          <a:p>
+            <a:r>
+              <a:rPr lang="it-IT" sz="2800" b="1" dirty="0">
+                <a:solidFill>
+                  <a:srgbClr val="0F406B"/>
+                </a:solidFill>
+                <a:latin typeface="Arial"/>
+                <a:cs typeface="Arial"/>
+              </a:rPr>
+              <a:t>Considering same DAMASCONI for invarince</a:t>
+            </a:r>
+          </a:p>
+        </p:txBody>
+      </p:sp>
+      <p:cxnSp>
+        <p:nvCxnSpPr>
+          <p:cNvPr id="27" name="Connettore diritto 15">
+            <a:extLst>
+              <a:ext uri="{FF2B5EF4-FFF2-40B4-BE49-F238E27FC236}">
+                <a16:creationId xmlns:a16="http://schemas.microsoft.com/office/drawing/2014/main" id="{FE63ADB7-7203-4335-CCF5-DCF8CC753E21}"/>
+              </a:ext>
+            </a:extLst>
+          </p:cNvPr>
+          <p:cNvCxnSpPr>
+            <a:cxnSpLocks/>
+          </p:cNvCxnSpPr>
+          <p:nvPr/>
+        </p:nvCxnSpPr>
+        <p:spPr>
+          <a:xfrm>
+            <a:off x="110087" y="484673"/>
+            <a:ext cx="7743188" cy="0"/>
+          </a:xfrm>
+          <a:prstGeom prst="line">
+            <a:avLst/>
+          </a:prstGeom>
+          <a:ln>
+            <a:solidFill>
+              <a:srgbClr val="0F406B"/>
+            </a:solidFill>
+          </a:ln>
+        </p:spPr>
+        <p:style>
+          <a:lnRef idx="3">
+            <a:schemeClr val="accent1"/>
+          </a:lnRef>
+          <a:fillRef idx="0">
+            <a:schemeClr val="accent1"/>
+          </a:fillRef>
+          <a:effectRef idx="2">
+            <a:schemeClr val="accent1"/>
+          </a:effectRef>
+          <a:fontRef idx="minor">
+            <a:schemeClr val="tx1"/>
+          </a:fontRef>
+        </p:style>
+      </p:cxnSp>
+      <p:pic>
+        <p:nvPicPr>
+          <p:cNvPr id="12" name="Picture 11">
+            <a:extLst>
+              <a:ext uri="{FF2B5EF4-FFF2-40B4-BE49-F238E27FC236}">
+                <a16:creationId xmlns:a16="http://schemas.microsoft.com/office/drawing/2014/main" id="{F938C256-BEF1-C6BB-8261-B5A762B6109E}"/>
+              </a:ext>
+            </a:extLst>
+          </p:cNvPr>
+          <p:cNvPicPr>
+            <a:picLocks noChangeAspect="1"/>
+          </p:cNvPicPr>
+          <p:nvPr/>
+        </p:nvPicPr>
+        <p:blipFill>
+          <a:blip r:embed="rId5"/>
+          <a:stretch>
+            <a:fillRect/>
+          </a:stretch>
+        </p:blipFill>
+        <p:spPr>
+          <a:xfrm>
+            <a:off x="0" y="1349209"/>
+            <a:ext cx="9144000" cy="4012098"/>
+          </a:xfrm>
+          <a:prstGeom prst="rect">
+            <a:avLst/>
+          </a:prstGeom>
+        </p:spPr>
+      </p:pic>
+    </p:spTree>
+    <p:extLst>
+      <p:ext uri="{BB962C8B-B14F-4D97-AF65-F5344CB8AC3E}">
+        <p14:creationId xmlns:p14="http://schemas.microsoft.com/office/powerpoint/2010/main" val="445580416"/>
+      </p:ext>
+    </p:extLst>
+  </p:cSld>
+  <p:clrMapOvr>
+    <a:masterClrMapping/>
+  </p:clrMapOvr>
+  <mc:AlternateContent xmlns:mc="http://schemas.openxmlformats.org/markup-compatibility/2006" xmlns:p159="http://schemas.microsoft.com/office/powerpoint/2015/09/main">
+    <mc:Choice Requires="p159">
+      <p:transition xmlns:p14="http://schemas.microsoft.com/office/powerpoint/2010/main" spd="slow" p14:dur="2000">
+        <p159:morph option="byObject"/>
+      </p:transition>
+    </mc:Choice>
+    <mc:Fallback xmlns="">
+      <p:transition spd="slow">
+        <p:fade/>
+      </p:transition>
+    </mc:Fallback>
+  </mc:AlternateContent>
+</p:sld>
+</file>
+
+<file path=ppt/slides/slide22.xml><?xml version="1.0" encoding="utf-8"?>
+<p:sld xmlns:a="http://schemas.openxmlformats.org/drawingml/2006/main" xmlns:r="http://schemas.openxmlformats.org/officeDocument/2006/relationships" xmlns:p="http://schemas.openxmlformats.org/presentationml/2006/main">
+  <p:cSld>
+    <p:spTree>
+      <p:nvGrpSpPr>
+        <p:cNvPr id="1" name="">
+          <a:extLst>
+            <a:ext uri="{FF2B5EF4-FFF2-40B4-BE49-F238E27FC236}">
               <a16:creationId xmlns:a16="http://schemas.microsoft.com/office/drawing/2014/main" id="{8BE820F0-A49C-0564-9B3F-BF23249511E2}"/>
             </a:ext>
           </a:extLst>
@@ -22131,7 +19311,7 @@
 </p:sld>
 </file>
 
-<file path=ppt/slides/slide22.xml><?xml version="1.0" encoding="utf-8"?>
+<file path=ppt/slides/slide23.xml><?xml version="1.0" encoding="utf-8"?>
 <p:sld xmlns:a="http://schemas.openxmlformats.org/drawingml/2006/main" xmlns:r="http://schemas.openxmlformats.org/officeDocument/2006/relationships" xmlns:p="http://schemas.openxmlformats.org/presentationml/2006/main">
   <p:cSld>
     <p:spTree>
@@ -36867,6 +34047,14 @@
 </file>
 
 <file path=customXml/item1.xml><?xml version="1.0" encoding="utf-8"?>
+<p:properties xmlns:p="http://schemas.microsoft.com/office/2006/metadata/properties" xmlns:xsi="http://www.w3.org/2001/XMLSchema-instance" xmlns:pc="http://schemas.microsoft.com/office/infopath/2007/PartnerControls">
+  <documentManagement>
+    <_activity xmlns="2a430ece-bd3d-4b23-b4ad-a6fd4059b123" xsi:nil="true"/>
+  </documentManagement>
+</p:properties>
+</file>
+
+<file path=customXml/item2.xml><?xml version="1.0" encoding="utf-8"?>
 <ct:contentTypeSchema xmlns:ct="http://schemas.microsoft.com/office/2006/metadata/contentType" xmlns:ma="http://schemas.microsoft.com/office/2006/metadata/properties/metaAttributes" ct:_="" ma:_="" ma:contentTypeName="Document" ma:contentTypeID="0x0101005384DECEDC1AB345A42A165B6E66DDF2" ma:contentTypeVersion="5" ma:contentTypeDescription="Create a new document." ma:contentTypeScope="" ma:versionID="399a9e366c866d1ab7c3ed7d7c802c87">
   <xsd:schema xmlns:xsd="http://www.w3.org/2001/XMLSchema" xmlns:xs="http://www.w3.org/2001/XMLSchema" xmlns:p="http://schemas.microsoft.com/office/2006/metadata/properties" xmlns:ns3="2a430ece-bd3d-4b23-b4ad-a6fd4059b123" targetNamespace="http://schemas.microsoft.com/office/2006/metadata/properties" ma:root="true" ma:fieldsID="6875eea47f50b88d1cfa825fb8371b5a" ns3:_="">
     <xsd:import namespace="2a430ece-bd3d-4b23-b4ad-a6fd4059b123"/>
@@ -37016,14 +34204,6 @@
 </ct:contentTypeSchema>
 </file>
 
-<file path=customXml/item2.xml><?xml version="1.0" encoding="utf-8"?>
-<p:properties xmlns:p="http://schemas.microsoft.com/office/2006/metadata/properties" xmlns:xsi="http://www.w3.org/2001/XMLSchema-instance" xmlns:pc="http://schemas.microsoft.com/office/infopath/2007/PartnerControls">
-  <documentManagement>
-    <_activity xmlns="2a430ece-bd3d-4b23-b4ad-a6fd4059b123" xsi:nil="true"/>
-  </documentManagement>
-</p:properties>
-</file>
-
 <file path=customXml/item3.xml><?xml version="1.0" encoding="utf-8"?>
 <?mso-contentType ?>
 <FormTemplates xmlns="http://schemas.microsoft.com/sharepoint/v3/contenttype/forms">
@@ -37034,6 +34214,22 @@
 </file>
 
 <file path=customXml/itemProps1.xml><?xml version="1.0" encoding="utf-8"?>
+<ds:datastoreItem xmlns:ds="http://schemas.openxmlformats.org/officeDocument/2006/customXml" ds:itemID="{E7B3249A-4FFF-4BAF-9AE7-CD3AE4597344}">
+  <ds:schemaRefs>
+    <ds:schemaRef ds:uri="2a430ece-bd3d-4b23-b4ad-a6fd4059b123"/>
+    <ds:schemaRef ds:uri="http://purl.org/dc/dcmitype/"/>
+    <ds:schemaRef ds:uri="http://purl.org/dc/elements/1.1/"/>
+    <ds:schemaRef ds:uri="http://purl.org/dc/terms/"/>
+    <ds:schemaRef ds:uri="http://schemas.microsoft.com/office/2006/documentManagement/types"/>
+    <ds:schemaRef ds:uri="http://schemas.microsoft.com/office/2006/metadata/properties"/>
+    <ds:schemaRef ds:uri="http://schemas.microsoft.com/office/infopath/2007/PartnerControls"/>
+    <ds:schemaRef ds:uri="http://schemas.openxmlformats.org/package/2006/metadata/core-properties"/>
+    <ds:schemaRef ds:uri="http://www.w3.org/XML/1998/namespace"/>
+  </ds:schemaRefs>
+</ds:datastoreItem>
+</file>
+
+<file path=customXml/itemProps2.xml><?xml version="1.0" encoding="utf-8"?>
 <ds:datastoreItem xmlns:ds="http://schemas.openxmlformats.org/officeDocument/2006/customXml" ds:itemID="{D6881693-5C85-4499-BA8F-8B95FE56474F}">
   <ds:schemaRefs>
     <ds:schemaRef ds:uri="2a430ece-bd3d-4b23-b4ad-a6fd4059b123"/>
@@ -37051,22 +34247,6 @@
 </ds:datastoreItem>
 </file>
 
-<file path=customXml/itemProps2.xml><?xml version="1.0" encoding="utf-8"?>
-<ds:datastoreItem xmlns:ds="http://schemas.openxmlformats.org/officeDocument/2006/customXml" ds:itemID="{E7B3249A-4FFF-4BAF-9AE7-CD3AE4597344}">
-  <ds:schemaRefs>
-    <ds:schemaRef ds:uri="2a430ece-bd3d-4b23-b4ad-a6fd4059b123"/>
-    <ds:schemaRef ds:uri="http://purl.org/dc/dcmitype/"/>
-    <ds:schemaRef ds:uri="http://purl.org/dc/elements/1.1/"/>
-    <ds:schemaRef ds:uri="http://purl.org/dc/terms/"/>
-    <ds:schemaRef ds:uri="http://schemas.microsoft.com/office/2006/documentManagement/types"/>
-    <ds:schemaRef ds:uri="http://schemas.microsoft.com/office/2006/metadata/properties"/>
-    <ds:schemaRef ds:uri="http://schemas.microsoft.com/office/infopath/2007/PartnerControls"/>
-    <ds:schemaRef ds:uri="http://schemas.openxmlformats.org/package/2006/metadata/core-properties"/>
-    <ds:schemaRef ds:uri="http://www.w3.org/XML/1998/namespace"/>
-  </ds:schemaRefs>
-</ds:datastoreItem>
-</file>
-
 <file path=customXml/itemProps3.xml><?xml version="1.0" encoding="utf-8"?>
 <ds:datastoreItem xmlns:ds="http://schemas.openxmlformats.org/officeDocument/2006/customXml" ds:itemID="{F3177990-2FF3-4701-82BA-B3ECCF19FF1F}">
   <ds:schemaRefs>

--- a/Project slides.pptx
+++ b/Project slides.pptx
@@ -238,7 +238,7 @@
           <a:p>
             <a:fld id="{810B0250-5E95-4301-A834-CE72E4D9A9B1}" type="datetimeFigureOut">
               <a:rPr lang="it-IT" smtClean="0"/>
-              <a:t>26/09/2025</a:t>
+              <a:t>03/10/2025</a:t>
             </a:fld>
             <a:endParaRPr lang="it-IT"/>
           </a:p>
@@ -396,7 +396,7 @@
           <a:p>
             <a:fld id="{B4614DB0-6389-4E60-A9E8-38662DC90D27}" type="slidenum">
               <a:rPr lang="it-IT" smtClean="0"/>
-              <a:t>‹#›</a:t>
+              <a:t>‹N›</a:t>
             </a:fld>
             <a:endParaRPr lang="it-IT"/>
           </a:p>
@@ -3010,7 +3010,7 @@
           <a:p>
             <a:fld id="{8DF5B5D2-CA2A-6548-955E-9897154AE4E2}" type="datetimeFigureOut">
               <a:rPr lang="it-IT" smtClean="0"/>
-              <a:t>26/09/2025</a:t>
+              <a:t>03/10/2025</a:t>
             </a:fld>
             <a:endParaRPr lang="it-IT"/>
           </a:p>
@@ -3052,7 +3052,7 @@
           <a:p>
             <a:fld id="{6DE11C3C-84A5-A346-8CE0-29825D2E2D30}" type="slidenum">
               <a:rPr lang="it-IT" smtClean="0"/>
-              <a:t>‹#›</a:t>
+              <a:t>‹N›</a:t>
             </a:fld>
             <a:endParaRPr lang="it-IT"/>
           </a:p>
@@ -3178,7 +3178,7 @@
           <a:p>
             <a:fld id="{8DF5B5D2-CA2A-6548-955E-9897154AE4E2}" type="datetimeFigureOut">
               <a:rPr lang="it-IT" smtClean="0"/>
-              <a:t>26/09/2025</a:t>
+              <a:t>03/10/2025</a:t>
             </a:fld>
             <a:endParaRPr lang="it-IT"/>
           </a:p>
@@ -3220,7 +3220,7 @@
           <a:p>
             <a:fld id="{6DE11C3C-84A5-A346-8CE0-29825D2E2D30}" type="slidenum">
               <a:rPr lang="it-IT" smtClean="0"/>
-              <a:t>‹#›</a:t>
+              <a:t>‹N›</a:t>
             </a:fld>
             <a:endParaRPr lang="it-IT"/>
           </a:p>
@@ -3356,7 +3356,7 @@
           <a:p>
             <a:fld id="{8DF5B5D2-CA2A-6548-955E-9897154AE4E2}" type="datetimeFigureOut">
               <a:rPr lang="it-IT" smtClean="0"/>
-              <a:t>26/09/2025</a:t>
+              <a:t>03/10/2025</a:t>
             </a:fld>
             <a:endParaRPr lang="it-IT"/>
           </a:p>
@@ -3398,7 +3398,7 @@
           <a:p>
             <a:fld id="{6DE11C3C-84A5-A346-8CE0-29825D2E2D30}" type="slidenum">
               <a:rPr lang="it-IT" smtClean="0"/>
-              <a:t>‹#›</a:t>
+              <a:t>‹N›</a:t>
             </a:fld>
             <a:endParaRPr lang="it-IT"/>
           </a:p>
@@ -3524,7 +3524,7 @@
           <a:p>
             <a:fld id="{8DF5B5D2-CA2A-6548-955E-9897154AE4E2}" type="datetimeFigureOut">
               <a:rPr lang="it-IT" smtClean="0"/>
-              <a:t>26/09/2025</a:t>
+              <a:t>03/10/2025</a:t>
             </a:fld>
             <a:endParaRPr lang="it-IT"/>
           </a:p>
@@ -3566,7 +3566,7 @@
           <a:p>
             <a:fld id="{6DE11C3C-84A5-A346-8CE0-29825D2E2D30}" type="slidenum">
               <a:rPr lang="it-IT" smtClean="0"/>
-              <a:t>‹#›</a:t>
+              <a:t>‹N›</a:t>
             </a:fld>
             <a:endParaRPr lang="it-IT"/>
           </a:p>
@@ -3769,7 +3769,7 @@
           <a:p>
             <a:fld id="{8DF5B5D2-CA2A-6548-955E-9897154AE4E2}" type="datetimeFigureOut">
               <a:rPr lang="it-IT" smtClean="0"/>
-              <a:t>26/09/2025</a:t>
+              <a:t>03/10/2025</a:t>
             </a:fld>
             <a:endParaRPr lang="it-IT"/>
           </a:p>
@@ -3811,7 +3811,7 @@
           <a:p>
             <a:fld id="{6DE11C3C-84A5-A346-8CE0-29825D2E2D30}" type="slidenum">
               <a:rPr lang="it-IT" smtClean="0"/>
-              <a:t>‹#›</a:t>
+              <a:t>‹N›</a:t>
             </a:fld>
             <a:endParaRPr lang="it-IT"/>
           </a:p>
@@ -4054,7 +4054,7 @@
           <a:p>
             <a:fld id="{8DF5B5D2-CA2A-6548-955E-9897154AE4E2}" type="datetimeFigureOut">
               <a:rPr lang="it-IT" smtClean="0"/>
-              <a:t>26/09/2025</a:t>
+              <a:t>03/10/2025</a:t>
             </a:fld>
             <a:endParaRPr lang="it-IT"/>
           </a:p>
@@ -4096,7 +4096,7 @@
           <a:p>
             <a:fld id="{6DE11C3C-84A5-A346-8CE0-29825D2E2D30}" type="slidenum">
               <a:rPr lang="it-IT" smtClean="0"/>
-              <a:t>‹#›</a:t>
+              <a:t>‹N›</a:t>
             </a:fld>
             <a:endParaRPr lang="it-IT"/>
           </a:p>
@@ -4473,7 +4473,7 @@
           <a:p>
             <a:fld id="{8DF5B5D2-CA2A-6548-955E-9897154AE4E2}" type="datetimeFigureOut">
               <a:rPr lang="it-IT" smtClean="0"/>
-              <a:t>26/09/2025</a:t>
+              <a:t>03/10/2025</a:t>
             </a:fld>
             <a:endParaRPr lang="it-IT"/>
           </a:p>
@@ -4515,7 +4515,7 @@
           <a:p>
             <a:fld id="{6DE11C3C-84A5-A346-8CE0-29825D2E2D30}" type="slidenum">
               <a:rPr lang="it-IT" smtClean="0"/>
-              <a:t>‹#›</a:t>
+              <a:t>‹N›</a:t>
             </a:fld>
             <a:endParaRPr lang="it-IT"/>
           </a:p>
@@ -4590,7 +4590,7 @@
           <a:p>
             <a:fld id="{8DF5B5D2-CA2A-6548-955E-9897154AE4E2}" type="datetimeFigureOut">
               <a:rPr lang="it-IT" smtClean="0"/>
-              <a:t>26/09/2025</a:t>
+              <a:t>03/10/2025</a:t>
             </a:fld>
             <a:endParaRPr lang="it-IT"/>
           </a:p>
@@ -4632,7 +4632,7 @@
           <a:p>
             <a:fld id="{6DE11C3C-84A5-A346-8CE0-29825D2E2D30}" type="slidenum">
               <a:rPr lang="it-IT" smtClean="0"/>
-              <a:t>‹#›</a:t>
+              <a:t>‹N›</a:t>
             </a:fld>
             <a:endParaRPr lang="it-IT"/>
           </a:p>
@@ -4685,7 +4685,7 @@
           <a:p>
             <a:fld id="{8DF5B5D2-CA2A-6548-955E-9897154AE4E2}" type="datetimeFigureOut">
               <a:rPr lang="it-IT" smtClean="0"/>
-              <a:t>26/09/2025</a:t>
+              <a:t>03/10/2025</a:t>
             </a:fld>
             <a:endParaRPr lang="it-IT"/>
           </a:p>
@@ -4727,7 +4727,7 @@
           <a:p>
             <a:fld id="{6DE11C3C-84A5-A346-8CE0-29825D2E2D30}" type="slidenum">
               <a:rPr lang="it-IT" smtClean="0"/>
-              <a:t>‹#›</a:t>
+              <a:t>‹N›</a:t>
             </a:fld>
             <a:endParaRPr lang="it-IT"/>
           </a:p>
@@ -4960,7 +4960,7 @@
           <a:p>
             <a:fld id="{8DF5B5D2-CA2A-6548-955E-9897154AE4E2}" type="datetimeFigureOut">
               <a:rPr lang="it-IT" smtClean="0"/>
-              <a:t>26/09/2025</a:t>
+              <a:t>03/10/2025</a:t>
             </a:fld>
             <a:endParaRPr lang="it-IT"/>
           </a:p>
@@ -5002,7 +5002,7 @@
           <a:p>
             <a:fld id="{6DE11C3C-84A5-A346-8CE0-29825D2E2D30}" type="slidenum">
               <a:rPr lang="it-IT" smtClean="0"/>
-              <a:t>‹#›</a:t>
+              <a:t>‹N›</a:t>
             </a:fld>
             <a:endParaRPr lang="it-IT"/>
           </a:p>
@@ -5212,7 +5212,7 @@
           <a:p>
             <a:fld id="{8DF5B5D2-CA2A-6548-955E-9897154AE4E2}" type="datetimeFigureOut">
               <a:rPr lang="it-IT" smtClean="0"/>
-              <a:t>26/09/2025</a:t>
+              <a:t>03/10/2025</a:t>
             </a:fld>
             <a:endParaRPr lang="it-IT"/>
           </a:p>
@@ -5254,7 +5254,7 @@
           <a:p>
             <a:fld id="{6DE11C3C-84A5-A346-8CE0-29825D2E2D30}" type="slidenum">
               <a:rPr lang="it-IT" smtClean="0"/>
-              <a:t>‹#›</a:t>
+              <a:t>‹N›</a:t>
             </a:fld>
             <a:endParaRPr lang="it-IT"/>
           </a:p>
@@ -5423,7 +5423,7 @@
           <a:p>
             <a:fld id="{8DF5B5D2-CA2A-6548-955E-9897154AE4E2}" type="datetimeFigureOut">
               <a:rPr lang="it-IT" smtClean="0"/>
-              <a:t>26/09/2025</a:t>
+              <a:t>03/10/2025</a:t>
             </a:fld>
             <a:endParaRPr lang="it-IT"/>
           </a:p>
@@ -5501,7 +5501,7 @@
           <a:p>
             <a:fld id="{6DE11C3C-84A5-A346-8CE0-29825D2E2D30}" type="slidenum">
               <a:rPr lang="it-IT" smtClean="0"/>
-              <a:t>‹#›</a:t>
+              <a:t>‹N›</a:t>
             </a:fld>
             <a:endParaRPr lang="it-IT"/>
           </a:p>
@@ -9131,6 +9131,49 @@
           </a:prstGeom>
         </p:spPr>
       </p:pic>
+      <p:cxnSp>
+        <p:nvCxnSpPr>
+          <p:cNvPr id="10" name="Connettore diritto 9">
+            <a:extLst>
+              <a:ext uri="{FF2B5EF4-FFF2-40B4-BE49-F238E27FC236}">
+                <a16:creationId xmlns:a16="http://schemas.microsoft.com/office/drawing/2014/main" id="{3D8E8E8C-277A-8349-1B33-0321ED9A6D5D}"/>
+              </a:ext>
+            </a:extLst>
+          </p:cNvPr>
+          <p:cNvCxnSpPr>
+            <a:cxnSpLocks/>
+          </p:cNvCxnSpPr>
+          <p:nvPr/>
+        </p:nvCxnSpPr>
+        <p:spPr>
+          <a:xfrm>
+            <a:off x="-2058278" y="573978"/>
+            <a:ext cx="1819747" cy="0"/>
+          </a:xfrm>
+          <a:prstGeom prst="line">
+            <a:avLst/>
+          </a:prstGeom>
+          <a:ln w="38100">
+            <a:solidFill>
+              <a:srgbClr val="0F406B"/>
+            </a:solidFill>
+          </a:ln>
+        </p:spPr>
+        <p:style>
+          <a:lnRef idx="2">
+            <a:schemeClr val="accent1"/>
+          </a:lnRef>
+          <a:fillRef idx="0">
+            <a:schemeClr val="accent1"/>
+          </a:fillRef>
+          <a:effectRef idx="1">
+            <a:schemeClr val="accent1"/>
+          </a:effectRef>
+          <a:fontRef idx="minor">
+            <a:schemeClr val="tx1"/>
+          </a:fontRef>
+        </p:style>
+      </p:cxnSp>
     </p:spTree>
     <p:extLst>
       <p:ext uri="{BB962C8B-B14F-4D97-AF65-F5344CB8AC3E}">
@@ -10230,6 +10273,49 @@
           </a:prstGeom>
         </p:spPr>
       </p:pic>
+      <p:cxnSp>
+        <p:nvCxnSpPr>
+          <p:cNvPr id="2" name="Connettore diritto 1">
+            <a:extLst>
+              <a:ext uri="{FF2B5EF4-FFF2-40B4-BE49-F238E27FC236}">
+                <a16:creationId xmlns:a16="http://schemas.microsoft.com/office/drawing/2014/main" id="{CC173A21-FD94-A85F-22F6-136E3815BBD6}"/>
+              </a:ext>
+            </a:extLst>
+          </p:cNvPr>
+          <p:cNvCxnSpPr>
+            <a:cxnSpLocks/>
+          </p:cNvCxnSpPr>
+          <p:nvPr/>
+        </p:nvCxnSpPr>
+        <p:spPr>
+          <a:xfrm>
+            <a:off x="-1957689" y="467372"/>
+            <a:ext cx="1819747" cy="0"/>
+          </a:xfrm>
+          <a:prstGeom prst="line">
+            <a:avLst/>
+          </a:prstGeom>
+          <a:ln w="38100">
+            <a:solidFill>
+              <a:srgbClr val="0F406B"/>
+            </a:solidFill>
+          </a:ln>
+        </p:spPr>
+        <p:style>
+          <a:lnRef idx="2">
+            <a:schemeClr val="accent1"/>
+          </a:lnRef>
+          <a:fillRef idx="0">
+            <a:schemeClr val="accent1"/>
+          </a:fillRef>
+          <a:effectRef idx="1">
+            <a:schemeClr val="accent1"/>
+          </a:effectRef>
+          <a:fontRef idx="minor">
+            <a:schemeClr val="tx1"/>
+          </a:fontRef>
+        </p:style>
+      </p:cxnSp>
     </p:spTree>
     <p:extLst>
       <p:ext uri="{BB962C8B-B14F-4D97-AF65-F5344CB8AC3E}">
@@ -10280,10 +10366,10 @@
       </p:grpSpPr>
       <p:pic>
         <p:nvPicPr>
-          <p:cNvPr id="38" name="Immagine 37" descr="Immagine che contiene testo, schermata, diagramma, numero&#10;&#10;Il contenuto generato dall'IA potrebbe non essere corretto.">
-            <a:extLst>
-              <a:ext uri="{FF2B5EF4-FFF2-40B4-BE49-F238E27FC236}">
-                <a16:creationId xmlns:a16="http://schemas.microsoft.com/office/drawing/2014/main" id="{3B2E6781-08DF-588F-F409-C300D955C6EC}"/>
+          <p:cNvPr id="2" name="Picture 13">
+            <a:extLst>
+              <a:ext uri="{FF2B5EF4-FFF2-40B4-BE49-F238E27FC236}">
+                <a16:creationId xmlns:a16="http://schemas.microsoft.com/office/drawing/2014/main" id="{33F903D3-4862-7273-92C8-FE8D6BE6E0A7}"/>
               </a:ext>
             </a:extLst>
           </p:cNvPr>
@@ -10294,6 +10380,36 @@
         </p:nvPicPr>
         <p:blipFill>
           <a:blip r:embed="rId3"/>
+          <a:stretch>
+            <a:fillRect/>
+          </a:stretch>
+        </p:blipFill>
+        <p:spPr>
+          <a:xfrm>
+            <a:off x="612179" y="1691556"/>
+            <a:ext cx="3516574" cy="1542962"/>
+          </a:xfrm>
+          <a:prstGeom prst="rect">
+            <a:avLst/>
+          </a:prstGeom>
+        </p:spPr>
+      </p:pic>
+      <p:pic>
+        <p:nvPicPr>
+          <p:cNvPr id="38" name="Immagine 37" descr="Immagine che contiene testo, schermata, diagramma, numero&#10;&#10;Il contenuto generato dall'IA potrebbe non essere corretto.">
+            <a:extLst>
+              <a:ext uri="{FF2B5EF4-FFF2-40B4-BE49-F238E27FC236}">
+                <a16:creationId xmlns:a16="http://schemas.microsoft.com/office/drawing/2014/main" id="{3B2E6781-08DF-588F-F409-C300D955C6EC}"/>
+              </a:ext>
+            </a:extLst>
+          </p:cNvPr>
+          <p:cNvPicPr>
+            <a:picLocks noChangeAspect="1"/>
+          </p:cNvPicPr>
+          <p:nvPr/>
+        </p:nvPicPr>
+        <p:blipFill>
+          <a:blip r:embed="rId4"/>
           <a:stretch>
             <a:fillRect/>
           </a:stretch>
@@ -10377,7 +10493,7 @@
           <p:nvPr/>
         </p:nvPicPr>
         <p:blipFill>
-          <a:blip r:embed="rId4">
+          <a:blip r:embed="rId5">
             <a:extLst>
               <a:ext uri="{28A0092B-C50C-407E-A947-70E740481C1C}">
                 <a14:useLocalDpi xmlns:a14="http://schemas.microsoft.com/office/drawing/2010/main" val="0"/>
@@ -10413,7 +10529,7 @@
           <p:nvPr/>
         </p:nvPicPr>
         <p:blipFill>
-          <a:blip r:embed="rId5">
+          <a:blip r:embed="rId6">
             <a:extLst>
               <a:ext uri="{28A0092B-C50C-407E-A947-70E740481C1C}">
                 <a14:useLocalDpi xmlns:a14="http://schemas.microsoft.com/office/drawing/2010/main" val="0"/>
@@ -10989,7 +11105,7 @@
           <p:nvPr/>
         </p:nvPicPr>
         <p:blipFill>
-          <a:blip r:embed="rId6"/>
+          <a:blip r:embed="rId7"/>
           <a:stretch>
             <a:fillRect/>
           </a:stretch>
@@ -11004,6 +11120,195 @@
           </a:prstGeom>
         </p:spPr>
       </p:pic>
+      <p:sp>
+        <p:nvSpPr>
+          <p:cNvPr id="9" name="CasellaDiTesto 1">
+            <a:extLst>
+              <a:ext uri="{FF2B5EF4-FFF2-40B4-BE49-F238E27FC236}">
+                <a16:creationId xmlns:a16="http://schemas.microsoft.com/office/drawing/2014/main" id="{4B3C9E39-FC8F-FECF-1151-3A70A75DCE49}"/>
+              </a:ext>
+            </a:extLst>
+          </p:cNvPr>
+          <p:cNvSpPr txBox="1">
+            <a:spLocks noChangeArrowheads="1"/>
+          </p:cNvSpPr>
+          <p:nvPr/>
+        </p:nvSpPr>
+        <p:spPr bwMode="auto">
+          <a:xfrm>
+            <a:off x="-142567" y="-509677"/>
+            <a:ext cx="7548319" cy="523220"/>
+          </a:xfrm>
+          <a:prstGeom prst="rect">
+            <a:avLst/>
+          </a:prstGeom>
+          <a:noFill/>
+          <a:ln>
+            <a:noFill/>
+          </a:ln>
+          <a:extLst>
+            <a:ext uri="{909E8E84-426E-40DD-AFC4-6F175D3DCCD1}">
+              <a14:hiddenFill xmlns:a14="http://schemas.microsoft.com/office/drawing/2010/main">
+                <a:solidFill>
+                  <a:srgbClr val="FFFFFF"/>
+                </a:solidFill>
+              </a14:hiddenFill>
+            </a:ext>
+            <a:ext uri="{91240B29-F687-4F45-9708-019B960494DF}">
+              <a14:hiddenLine xmlns:a14="http://schemas.microsoft.com/office/drawing/2010/main" w="9525">
+                <a:solidFill>
+                  <a:srgbClr val="000000"/>
+                </a:solidFill>
+                <a:miter lim="800000"/>
+                <a:headEnd/>
+                <a:tailEnd/>
+              </a14:hiddenLine>
+            </a:ext>
+          </a:extLst>
+        </p:spPr>
+        <p:txBody>
+          <a:bodyPr wrap="square" lIns="91440" tIns="45720" rIns="91440" bIns="45720" anchor="t">
+            <a:spAutoFit/>
+          </a:bodyPr>
+          <a:lstStyle>
+            <a:lvl1pPr eaLnBrk="0" hangingPunct="0">
+              <a:defRPr sz="3000">
+                <a:solidFill>
+                  <a:srgbClr val="414141"/>
+                </a:solidFill>
+                <a:latin typeface="Gill Sans Light" charset="0"/>
+                <a:ea typeface="ヒラギノ角ゴ ProN W3" charset="0"/>
+                <a:cs typeface="ヒラギノ角ゴ ProN W3" charset="0"/>
+                <a:sym typeface="Gill Sans Light" charset="0"/>
+              </a:defRPr>
+            </a:lvl1pPr>
+            <a:lvl2pPr marL="742950" indent="-285750" eaLnBrk="0" hangingPunct="0">
+              <a:defRPr sz="3000">
+                <a:solidFill>
+                  <a:srgbClr val="414141"/>
+                </a:solidFill>
+                <a:latin typeface="Gill Sans Light" charset="0"/>
+                <a:ea typeface="ヒラギノ角ゴ ProN W3" charset="0"/>
+                <a:cs typeface="ヒラギノ角ゴ ProN W3" charset="0"/>
+                <a:sym typeface="Gill Sans Light" charset="0"/>
+              </a:defRPr>
+            </a:lvl2pPr>
+            <a:lvl3pPr marL="1143000" indent="-228600" eaLnBrk="0" hangingPunct="0">
+              <a:defRPr sz="3000">
+                <a:solidFill>
+                  <a:srgbClr val="414141"/>
+                </a:solidFill>
+                <a:latin typeface="Gill Sans Light" charset="0"/>
+                <a:ea typeface="ヒラギノ角ゴ ProN W3" charset="0"/>
+                <a:cs typeface="ヒラギノ角ゴ ProN W3" charset="0"/>
+                <a:sym typeface="Gill Sans Light" charset="0"/>
+              </a:defRPr>
+            </a:lvl3pPr>
+            <a:lvl4pPr marL="1600200" indent="-228600" eaLnBrk="0" hangingPunct="0">
+              <a:defRPr sz="3000">
+                <a:solidFill>
+                  <a:srgbClr val="414141"/>
+                </a:solidFill>
+                <a:latin typeface="Gill Sans Light" charset="0"/>
+                <a:ea typeface="ヒラギノ角ゴ ProN W3" charset="0"/>
+                <a:cs typeface="ヒラギノ角ゴ ProN W3" charset="0"/>
+                <a:sym typeface="Gill Sans Light" charset="0"/>
+              </a:defRPr>
+            </a:lvl4pPr>
+            <a:lvl5pPr marL="2057400" indent="-228600" eaLnBrk="0" hangingPunct="0">
+              <a:defRPr sz="3000">
+                <a:solidFill>
+                  <a:srgbClr val="414141"/>
+                </a:solidFill>
+                <a:latin typeface="Gill Sans Light" charset="0"/>
+                <a:ea typeface="ヒラギノ角ゴ ProN W3" charset="0"/>
+                <a:cs typeface="ヒラギノ角ゴ ProN W3" charset="0"/>
+                <a:sym typeface="Gill Sans Light" charset="0"/>
+              </a:defRPr>
+            </a:lvl5pPr>
+            <a:lvl6pPr marL="2514600" indent="-228600" algn="ctr" eaLnBrk="0" fontAlgn="base" hangingPunct="0">
+              <a:spcBef>
+                <a:spcPct val="0"/>
+              </a:spcBef>
+              <a:spcAft>
+                <a:spcPct val="0"/>
+              </a:spcAft>
+              <a:defRPr sz="3000">
+                <a:solidFill>
+                  <a:srgbClr val="414141"/>
+                </a:solidFill>
+                <a:latin typeface="Gill Sans Light" charset="0"/>
+                <a:ea typeface="ヒラギノ角ゴ ProN W3" charset="0"/>
+                <a:cs typeface="ヒラギノ角ゴ ProN W3" charset="0"/>
+                <a:sym typeface="Gill Sans Light" charset="0"/>
+              </a:defRPr>
+            </a:lvl6pPr>
+            <a:lvl7pPr marL="2971800" indent="-228600" algn="ctr" eaLnBrk="0" fontAlgn="base" hangingPunct="0">
+              <a:spcBef>
+                <a:spcPct val="0"/>
+              </a:spcBef>
+              <a:spcAft>
+                <a:spcPct val="0"/>
+              </a:spcAft>
+              <a:defRPr sz="3000">
+                <a:solidFill>
+                  <a:srgbClr val="414141"/>
+                </a:solidFill>
+                <a:latin typeface="Gill Sans Light" charset="0"/>
+                <a:ea typeface="ヒラギノ角ゴ ProN W3" charset="0"/>
+                <a:cs typeface="ヒラギノ角ゴ ProN W3" charset="0"/>
+                <a:sym typeface="Gill Sans Light" charset="0"/>
+              </a:defRPr>
+            </a:lvl7pPr>
+            <a:lvl8pPr marL="3429000" indent="-228600" algn="ctr" eaLnBrk="0" fontAlgn="base" hangingPunct="0">
+              <a:spcBef>
+                <a:spcPct val="0"/>
+              </a:spcBef>
+              <a:spcAft>
+                <a:spcPct val="0"/>
+              </a:spcAft>
+              <a:defRPr sz="3000">
+                <a:solidFill>
+                  <a:srgbClr val="414141"/>
+                </a:solidFill>
+                <a:latin typeface="Gill Sans Light" charset="0"/>
+                <a:ea typeface="ヒラギノ角ゴ ProN W3" charset="0"/>
+                <a:cs typeface="ヒラギノ角ゴ ProN W3" charset="0"/>
+                <a:sym typeface="Gill Sans Light" charset="0"/>
+              </a:defRPr>
+            </a:lvl8pPr>
+            <a:lvl9pPr marL="3886200" indent="-228600" algn="ctr" eaLnBrk="0" fontAlgn="base" hangingPunct="0">
+              <a:spcBef>
+                <a:spcPct val="0"/>
+              </a:spcBef>
+              <a:spcAft>
+                <a:spcPct val="0"/>
+              </a:spcAft>
+              <a:defRPr sz="3000">
+                <a:solidFill>
+                  <a:srgbClr val="414141"/>
+                </a:solidFill>
+                <a:latin typeface="Gill Sans Light" charset="0"/>
+                <a:ea typeface="ヒラギノ角ゴ ProN W3" charset="0"/>
+                <a:cs typeface="ヒラギノ角ゴ ProN W3" charset="0"/>
+                <a:sym typeface="Gill Sans Light" charset="0"/>
+              </a:defRPr>
+            </a:lvl9pPr>
+          </a:lstStyle>
+          <a:p>
+            <a:r>
+              <a:rPr lang="it-IT" sz="2800" b="1" dirty="0">
+                <a:solidFill>
+                  <a:srgbClr val="0F406B"/>
+                </a:solidFill>
+                <a:latin typeface="Arial"/>
+                <a:cs typeface="Arial"/>
+              </a:rPr>
+              <a:t>Considering the Binary Case (1)</a:t>
+            </a:r>
+          </a:p>
+        </p:txBody>
+      </p:sp>
     </p:spTree>
     <p:extLst>
       <p:ext uri="{BB962C8B-B14F-4D97-AF65-F5344CB8AC3E}">
@@ -11383,7 +11688,7 @@
         </p:nvCxnSpPr>
         <p:spPr>
           <a:xfrm>
-            <a:off x="110087" y="484673"/>
+            <a:off x="208410" y="567341"/>
             <a:ext cx="5450055" cy="0"/>
           </a:xfrm>
           <a:prstGeom prst="line">
@@ -11803,12 +12108,42 @@
           </a:p>
         </p:txBody>
       </p:sp>
+      <p:pic>
+        <p:nvPicPr>
+          <p:cNvPr id="3" name="Picture 2">
+            <a:extLst>
+              <a:ext uri="{FF2B5EF4-FFF2-40B4-BE49-F238E27FC236}">
+                <a16:creationId xmlns:a16="http://schemas.microsoft.com/office/drawing/2014/main" id="{E9D3811E-93E1-2D38-F9CA-95262A0CDB20}"/>
+              </a:ext>
+            </a:extLst>
+          </p:cNvPr>
+          <p:cNvPicPr>
+            <a:picLocks noChangeAspect="1"/>
+          </p:cNvPicPr>
+          <p:nvPr/>
+        </p:nvPicPr>
+        <p:blipFill>
+          <a:blip r:embed="rId5"/>
+          <a:stretch>
+            <a:fillRect/>
+          </a:stretch>
+        </p:blipFill>
+        <p:spPr>
+          <a:xfrm>
+            <a:off x="1738686" y="623006"/>
+            <a:ext cx="5666628" cy="5697993"/>
+          </a:xfrm>
+          <a:prstGeom prst="rect">
+            <a:avLst/>
+          </a:prstGeom>
+        </p:spPr>
+      </p:pic>
       <p:cxnSp>
         <p:nvCxnSpPr>
-          <p:cNvPr id="27" name="Connettore diritto 15">
-            <a:extLst>
-              <a:ext uri="{FF2B5EF4-FFF2-40B4-BE49-F238E27FC236}">
-                <a16:creationId xmlns:a16="http://schemas.microsoft.com/office/drawing/2014/main" id="{8BEF4A98-60BE-3368-B88D-9C838ABB567E}"/>
+          <p:cNvPr id="2" name="Connettore diritto 15">
+            <a:extLst>
+              <a:ext uri="{FF2B5EF4-FFF2-40B4-BE49-F238E27FC236}">
+                <a16:creationId xmlns:a16="http://schemas.microsoft.com/office/drawing/2014/main" id="{F9B79730-89A8-0B0A-ABD0-D160B1BBD9F9}"/>
               </a:ext>
             </a:extLst>
           </p:cNvPr>
@@ -11819,8 +12154,8 @@
         </p:nvCxnSpPr>
         <p:spPr>
           <a:xfrm>
-            <a:off x="110087" y="484673"/>
-            <a:ext cx="5347523" cy="0"/>
+            <a:off x="208410" y="567341"/>
+            <a:ext cx="5450055" cy="0"/>
           </a:xfrm>
           <a:prstGeom prst="line">
             <a:avLst/>
@@ -11848,10 +12183,10 @@
       </p:cxnSp>
       <p:pic>
         <p:nvPicPr>
-          <p:cNvPr id="3" name="Picture 2">
-            <a:extLst>
-              <a:ext uri="{FF2B5EF4-FFF2-40B4-BE49-F238E27FC236}">
-                <a16:creationId xmlns:a16="http://schemas.microsoft.com/office/drawing/2014/main" id="{E9D3811E-93E1-2D38-F9CA-95262A0CDB20}"/>
+          <p:cNvPr id="5" name="Elemento grafico 4" descr="Punto esclamativo con riempimento a tinta unita">
+            <a:extLst>
+              <a:ext uri="{FF2B5EF4-FFF2-40B4-BE49-F238E27FC236}">
+                <a16:creationId xmlns:a16="http://schemas.microsoft.com/office/drawing/2014/main" id="{1EF73CAE-BC15-2C60-8070-26390A7FE403}"/>
               </a:ext>
             </a:extLst>
           </p:cNvPr>
@@ -11861,15 +12196,241 @@
           <p:nvPr/>
         </p:nvPicPr>
         <p:blipFill>
-          <a:blip r:embed="rId5"/>
+          <a:blip r:embed="rId6">
+            <a:extLst>
+              <a:ext uri="{96DAC541-7B7A-43D3-8B79-37D633B846F1}">
+                <asvg:svgBlip xmlns:asvg="http://schemas.microsoft.com/office/drawing/2016/SVG/main" r:embed="rId7"/>
+              </a:ext>
+            </a:extLst>
+          </a:blip>
           <a:stretch>
             <a:fillRect/>
           </a:stretch>
         </p:blipFill>
         <p:spPr>
           <a:xfrm>
-            <a:off x="1589578" y="558522"/>
-            <a:ext cx="5777241" cy="5809218"/>
+            <a:off x="349043" y="2800522"/>
+            <a:ext cx="1108587" cy="1108587"/>
+          </a:xfrm>
+          <a:prstGeom prst="rect">
+            <a:avLst/>
+          </a:prstGeom>
+        </p:spPr>
+      </p:pic>
+      <p:sp>
+        <p:nvSpPr>
+          <p:cNvPr id="9" name="CasellaDiTesto 8">
+            <a:extLst>
+              <a:ext uri="{FF2B5EF4-FFF2-40B4-BE49-F238E27FC236}">
+                <a16:creationId xmlns:a16="http://schemas.microsoft.com/office/drawing/2014/main" id="{A86DA13C-0829-8604-7CB9-E8DC8787F2DE}"/>
+              </a:ext>
+            </a:extLst>
+          </p:cNvPr>
+          <p:cNvSpPr txBox="1">
+            <a:spLocks noChangeArrowheads="1"/>
+          </p:cNvSpPr>
+          <p:nvPr/>
+        </p:nvSpPr>
+        <p:spPr bwMode="auto">
+          <a:xfrm>
+            <a:off x="9290418" y="151525"/>
+            <a:ext cx="3400425" cy="338554"/>
+          </a:xfrm>
+          <a:prstGeom prst="rect">
+            <a:avLst/>
+          </a:prstGeom>
+          <a:noFill/>
+          <a:ln>
+            <a:noFill/>
+          </a:ln>
+          <a:extLst>
+            <a:ext uri="{909E8E84-426E-40DD-AFC4-6F175D3DCCD1}">
+              <a14:hiddenFill xmlns:a14="http://schemas.microsoft.com/office/drawing/2010/main">
+                <a:solidFill>
+                  <a:srgbClr val="FFFFFF"/>
+                </a:solidFill>
+              </a14:hiddenFill>
+            </a:ext>
+            <a:ext uri="{91240B29-F687-4F45-9708-019B960494DF}">
+              <a14:hiddenLine xmlns:a14="http://schemas.microsoft.com/office/drawing/2010/main" w="9525">
+                <a:solidFill>
+                  <a:srgbClr val="000000"/>
+                </a:solidFill>
+                <a:miter lim="800000"/>
+                <a:headEnd/>
+                <a:tailEnd/>
+              </a14:hiddenLine>
+            </a:ext>
+          </a:extLst>
+        </p:spPr>
+        <p:txBody>
+          <a:bodyPr wrap="square">
+            <a:spAutoFit/>
+          </a:bodyPr>
+          <a:lstStyle>
+            <a:lvl1pPr eaLnBrk="0" hangingPunct="0">
+              <a:defRPr sz="3000">
+                <a:solidFill>
+                  <a:srgbClr val="414141"/>
+                </a:solidFill>
+                <a:latin typeface="Gill Sans Light" charset="0"/>
+                <a:ea typeface="ヒラギノ角ゴ ProN W3" charset="0"/>
+                <a:cs typeface="ヒラギノ角ゴ ProN W3" charset="0"/>
+                <a:sym typeface="Gill Sans Light" charset="0"/>
+              </a:defRPr>
+            </a:lvl1pPr>
+            <a:lvl2pPr marL="742950" indent="-285750" eaLnBrk="0" hangingPunct="0">
+              <a:defRPr sz="3000">
+                <a:solidFill>
+                  <a:srgbClr val="414141"/>
+                </a:solidFill>
+                <a:latin typeface="Gill Sans Light" charset="0"/>
+                <a:ea typeface="ヒラギノ角ゴ ProN W3" charset="0"/>
+                <a:cs typeface="ヒラギノ角ゴ ProN W3" charset="0"/>
+                <a:sym typeface="Gill Sans Light" charset="0"/>
+              </a:defRPr>
+            </a:lvl2pPr>
+            <a:lvl3pPr marL="1143000" indent="-228600" eaLnBrk="0" hangingPunct="0">
+              <a:defRPr sz="3000">
+                <a:solidFill>
+                  <a:srgbClr val="414141"/>
+                </a:solidFill>
+                <a:latin typeface="Gill Sans Light" charset="0"/>
+                <a:ea typeface="ヒラギノ角ゴ ProN W3" charset="0"/>
+                <a:cs typeface="ヒラギノ角ゴ ProN W3" charset="0"/>
+                <a:sym typeface="Gill Sans Light" charset="0"/>
+              </a:defRPr>
+            </a:lvl3pPr>
+            <a:lvl4pPr marL="1600200" indent="-228600" eaLnBrk="0" hangingPunct="0">
+              <a:defRPr sz="3000">
+                <a:solidFill>
+                  <a:srgbClr val="414141"/>
+                </a:solidFill>
+                <a:latin typeface="Gill Sans Light" charset="0"/>
+                <a:ea typeface="ヒラギノ角ゴ ProN W3" charset="0"/>
+                <a:cs typeface="ヒラギノ角ゴ ProN W3" charset="0"/>
+                <a:sym typeface="Gill Sans Light" charset="0"/>
+              </a:defRPr>
+            </a:lvl4pPr>
+            <a:lvl5pPr marL="2057400" indent="-228600" eaLnBrk="0" hangingPunct="0">
+              <a:defRPr sz="3000">
+                <a:solidFill>
+                  <a:srgbClr val="414141"/>
+                </a:solidFill>
+                <a:latin typeface="Gill Sans Light" charset="0"/>
+                <a:ea typeface="ヒラギノ角ゴ ProN W3" charset="0"/>
+                <a:cs typeface="ヒラギノ角ゴ ProN W3" charset="0"/>
+                <a:sym typeface="Gill Sans Light" charset="0"/>
+              </a:defRPr>
+            </a:lvl5pPr>
+            <a:lvl6pPr marL="2514600" indent="-228600" algn="ctr" eaLnBrk="0" fontAlgn="base" hangingPunct="0">
+              <a:spcBef>
+                <a:spcPct val="0"/>
+              </a:spcBef>
+              <a:spcAft>
+                <a:spcPct val="0"/>
+              </a:spcAft>
+              <a:defRPr sz="3000">
+                <a:solidFill>
+                  <a:srgbClr val="414141"/>
+                </a:solidFill>
+                <a:latin typeface="Gill Sans Light" charset="0"/>
+                <a:ea typeface="ヒラギノ角ゴ ProN W3" charset="0"/>
+                <a:cs typeface="ヒラギノ角ゴ ProN W3" charset="0"/>
+                <a:sym typeface="Gill Sans Light" charset="0"/>
+              </a:defRPr>
+            </a:lvl6pPr>
+            <a:lvl7pPr marL="2971800" indent="-228600" algn="ctr" eaLnBrk="0" fontAlgn="base" hangingPunct="0">
+              <a:spcBef>
+                <a:spcPct val="0"/>
+              </a:spcBef>
+              <a:spcAft>
+                <a:spcPct val="0"/>
+              </a:spcAft>
+              <a:defRPr sz="3000">
+                <a:solidFill>
+                  <a:srgbClr val="414141"/>
+                </a:solidFill>
+                <a:latin typeface="Gill Sans Light" charset="0"/>
+                <a:ea typeface="ヒラギノ角ゴ ProN W3" charset="0"/>
+                <a:cs typeface="ヒラギノ角ゴ ProN W3" charset="0"/>
+                <a:sym typeface="Gill Sans Light" charset="0"/>
+              </a:defRPr>
+            </a:lvl7pPr>
+            <a:lvl8pPr marL="3429000" indent="-228600" algn="ctr" eaLnBrk="0" fontAlgn="base" hangingPunct="0">
+              <a:spcBef>
+                <a:spcPct val="0"/>
+              </a:spcBef>
+              <a:spcAft>
+                <a:spcPct val="0"/>
+              </a:spcAft>
+              <a:defRPr sz="3000">
+                <a:solidFill>
+                  <a:srgbClr val="414141"/>
+                </a:solidFill>
+                <a:latin typeface="Gill Sans Light" charset="0"/>
+                <a:ea typeface="ヒラギノ角ゴ ProN W3" charset="0"/>
+                <a:cs typeface="ヒラギノ角ゴ ProN W3" charset="0"/>
+                <a:sym typeface="Gill Sans Light" charset="0"/>
+              </a:defRPr>
+            </a:lvl8pPr>
+            <a:lvl9pPr marL="3886200" indent="-228600" algn="ctr" eaLnBrk="0" fontAlgn="base" hangingPunct="0">
+              <a:spcBef>
+                <a:spcPct val="0"/>
+              </a:spcBef>
+              <a:spcAft>
+                <a:spcPct val="0"/>
+              </a:spcAft>
+              <a:defRPr sz="3000">
+                <a:solidFill>
+                  <a:srgbClr val="414141"/>
+                </a:solidFill>
+                <a:latin typeface="Gill Sans Light" charset="0"/>
+                <a:ea typeface="ヒラギノ角ゴ ProN W3" charset="0"/>
+                <a:cs typeface="ヒラギノ角ゴ ProN W3" charset="0"/>
+                <a:sym typeface="Gill Sans Light" charset="0"/>
+              </a:defRPr>
+            </a:lvl9pPr>
+          </a:lstStyle>
+          <a:p>
+            <a:pPr eaLnBrk="1" hangingPunct="1"/>
+            <a:r>
+              <a:rPr lang="it-IT" sz="1600" b="1" dirty="0">
+                <a:solidFill>
+                  <a:srgbClr val="0F406B"/>
+                </a:solidFill>
+                <a:latin typeface="Arial" panose="020B0604020202020204" pitchFamily="34" charset="0"/>
+                <a:cs typeface="Arial" panose="020B0604020202020204" pitchFamily="34" charset="0"/>
+              </a:rPr>
+              <a:t>CONFUSION MATRICES : </a:t>
+            </a:r>
+          </a:p>
+        </p:txBody>
+      </p:sp>
+      <p:pic>
+        <p:nvPicPr>
+          <p:cNvPr id="10" name="Immagine 9" descr="Immagine che contiene testo, schermata, diagramma, numero&#10;&#10;Il contenuto generato dall'IA potrebbe non essere corretto.">
+            <a:extLst>
+              <a:ext uri="{FF2B5EF4-FFF2-40B4-BE49-F238E27FC236}">
+                <a16:creationId xmlns:a16="http://schemas.microsoft.com/office/drawing/2014/main" id="{05FCCC19-B5D6-7CF5-7ED9-83048DB03C5D}"/>
+              </a:ext>
+            </a:extLst>
+          </p:cNvPr>
+          <p:cNvPicPr>
+            <a:picLocks noChangeAspect="1"/>
+          </p:cNvPicPr>
+          <p:nvPr/>
+        </p:nvPicPr>
+        <p:blipFill>
+          <a:blip r:embed="rId8"/>
+          <a:stretch>
+            <a:fillRect/>
+          </a:stretch>
+        </p:blipFill>
+        <p:spPr>
+          <a:xfrm>
+            <a:off x="9367432" y="623006"/>
+            <a:ext cx="8736464" cy="3833287"/>
           </a:xfrm>
           <a:prstGeom prst="rect">
             <a:avLst/>
@@ -11886,13 +12447,13 @@
   <p:clrMapOvr>
     <a:masterClrMapping/>
   </p:clrMapOvr>
-  <mc:AlternateContent xmlns:mc="http://schemas.openxmlformats.org/markup-compatibility/2006" xmlns:p159="http://schemas.microsoft.com/office/powerpoint/2015/09/main">
-    <mc:Choice Requires="p159">
+  <mc:AlternateContent xmlns:mc="http://schemas.openxmlformats.org/markup-compatibility/2006">
+    <mc:Choice xmlns:p159="http://schemas.microsoft.com/office/powerpoint/2015/09/main" Requires="p159">
       <p:transition xmlns:p14="http://schemas.microsoft.com/office/powerpoint/2010/main" spd="slow" p14:dur="2000">
-        <p159:morph option="byObject"/>
+        <p159:morph option="byWord"/>
       </p:transition>
     </mc:Choice>
-    <mc:Fallback xmlns="">
+    <mc:Fallback>
       <p:transition spd="slow">
         <p:fade/>
       </p:transition>
@@ -12508,7 +13069,7 @@
           <a:p>
             <a:pPr eaLnBrk="1" hangingPunct="1"/>
             <a:r>
-              <a:rPr lang="it-IT" sz="1600" b="1">
+              <a:rPr lang="it-IT" sz="1600" b="1" dirty="0">
                 <a:solidFill>
                   <a:srgbClr val="0F406B"/>
                 </a:solidFill>
@@ -12647,7 +13208,7 @@
               </a:spcAft>
             </a:pPr>
             <a:r>
-              <a:rPr lang="it-IT" altLang="it-IT">
+              <a:rPr lang="it-IT" altLang="it-IT" dirty="0">
                 <a:solidFill>
                   <a:schemeClr val="bg1"/>
                 </a:solidFill>
@@ -12656,7 +13217,7 @@
               <a:t>Test set: </a:t>
             </a:r>
             <a:r>
-              <a:rPr lang="it-IT" altLang="it-IT" err="1">
+              <a:rPr lang="it-IT" altLang="it-IT" dirty="0" err="1">
                 <a:solidFill>
                   <a:schemeClr val="bg1"/>
                 </a:solidFill>
@@ -12664,7 +13225,7 @@
               </a:rPr>
               <a:t>DamasconeB</a:t>
             </a:r>
-            <a:endParaRPr lang="it-IT" altLang="it-IT">
+            <a:endParaRPr lang="it-IT" altLang="it-IT" dirty="0">
               <a:solidFill>
                 <a:schemeClr val="bg1"/>
               </a:solidFill>
@@ -12681,42 +13242,24 @@
               </a:spcAft>
             </a:pPr>
             <a:r>
-              <a:rPr lang="it-IT" altLang="it-IT">
+              <a:rPr lang="it-IT" altLang="it-IT" dirty="0">
                 <a:solidFill>
                   <a:schemeClr val="bg1"/>
                 </a:solidFill>
                 <a:latin typeface="Arial" panose="020B0604020202020204" pitchFamily="34" charset="0"/>
               </a:rPr>
-              <a:t>Overall </a:t>
-            </a:r>
-            <a:r>
-              <a:rPr lang="it-IT" altLang="it-IT" err="1">
+              <a:t>Overall accuracy: </a:t>
+            </a:r>
+            <a:r>
+              <a:rPr lang="it-IT" altLang="it-IT" sz="2000" b="1" dirty="0">
                 <a:solidFill>
                   <a:schemeClr val="bg1"/>
                 </a:solidFill>
                 <a:latin typeface="Arial" panose="020B0604020202020204" pitchFamily="34" charset="0"/>
               </a:rPr>
-              <a:t>accuracy</a:t>
-            </a:r>
-            <a:r>
-              <a:rPr lang="it-IT" altLang="it-IT">
-                <a:solidFill>
-                  <a:schemeClr val="bg1"/>
-                </a:solidFill>
-                <a:latin typeface="Arial" panose="020B0604020202020204" pitchFamily="34" charset="0"/>
-              </a:rPr>
-              <a:t>: </a:t>
-            </a:r>
-            <a:r>
-              <a:rPr lang="it-IT" altLang="it-IT" sz="2000" b="1">
-                <a:solidFill>
-                  <a:schemeClr val="bg1"/>
-                </a:solidFill>
-                <a:latin typeface="Arial" panose="020B0604020202020204" pitchFamily="34" charset="0"/>
-              </a:rPr>
               <a:t>0.8383</a:t>
             </a:r>
-            <a:endParaRPr lang="it-IT" altLang="it-IT">
+            <a:endParaRPr lang="it-IT" altLang="it-IT" dirty="0">
               <a:solidFill>
                 <a:schemeClr val="bg1"/>
               </a:solidFill>
@@ -12733,7 +13276,7 @@
               </a:spcAft>
             </a:pPr>
             <a:r>
-              <a:rPr lang="it-IT" altLang="it-IT">
+              <a:rPr lang="it-IT" altLang="it-IT" dirty="0">
                 <a:solidFill>
                   <a:schemeClr val="bg1"/>
                 </a:solidFill>
@@ -12742,7 +13285,7 @@
               <a:t>Macro F1-score: </a:t>
             </a:r>
             <a:r>
-              <a:rPr lang="it-IT" altLang="it-IT" sz="2000" b="1">
+              <a:rPr lang="it-IT" altLang="it-IT" sz="2000" b="1" dirty="0">
                 <a:solidFill>
                   <a:schemeClr val="bg1"/>
                 </a:solidFill>
@@ -12750,7 +13293,7 @@
               </a:rPr>
               <a:t>0.6438</a:t>
             </a:r>
-            <a:endParaRPr lang="it-IT" altLang="it-IT">
+            <a:endParaRPr lang="it-IT" altLang="it-IT" dirty="0">
               <a:solidFill>
                 <a:schemeClr val="bg1"/>
               </a:solidFill>
@@ -13020,6 +13563,184 @@
       </p:transition>
     </mc:Fallback>
   </mc:AlternateContent>
+  <p:timing>
+    <p:tnLst>
+      <p:par>
+        <p:cTn id="1" dur="indefinite" restart="never" nodeType="tmRoot">
+          <p:childTnLst>
+            <p:seq concurrent="1" nextAc="seek">
+              <p:cTn id="2" dur="indefinite" nodeType="mainSeq">
+                <p:childTnLst>
+                  <p:par>
+                    <p:cTn id="3" fill="hold">
+                      <p:stCondLst>
+                        <p:cond delay="indefinite"/>
+                        <p:cond evt="onBegin" delay="0">
+                          <p:tn val="2"/>
+                        </p:cond>
+                      </p:stCondLst>
+                      <p:childTnLst>
+                        <p:par>
+                          <p:cTn id="4" fill="hold">
+                            <p:stCondLst>
+                              <p:cond delay="0"/>
+                            </p:stCondLst>
+                            <p:childTnLst>
+                              <p:par>
+                                <p:cTn id="5" presetID="22" presetClass="entr" presetSubtype="1" fill="hold" grpId="0" nodeType="afterEffect">
+                                  <p:stCondLst>
+                                    <p:cond delay="0"/>
+                                  </p:stCondLst>
+                                  <p:childTnLst>
+                                    <p:set>
+                                      <p:cBhvr>
+                                        <p:cTn id="6" dur="1" fill="hold">
+                                          <p:stCondLst>
+                                            <p:cond delay="0"/>
+                                          </p:stCondLst>
+                                        </p:cTn>
+                                        <p:tgtEl>
+                                          <p:spTgt spid="9"/>
+                                        </p:tgtEl>
+                                        <p:attrNameLst>
+                                          <p:attrName>style.visibility</p:attrName>
+                                        </p:attrNameLst>
+                                      </p:cBhvr>
+                                      <p:to>
+                                        <p:strVal val="visible"/>
+                                      </p:to>
+                                    </p:set>
+                                    <p:animEffect transition="in" filter="wipe(up)">
+                                      <p:cBhvr>
+                                        <p:cTn id="7" dur="500"/>
+                                        <p:tgtEl>
+                                          <p:spTgt spid="9"/>
+                                        </p:tgtEl>
+                                      </p:cBhvr>
+                                    </p:animEffect>
+                                  </p:childTnLst>
+                                </p:cTn>
+                              </p:par>
+                            </p:childTnLst>
+                          </p:cTn>
+                        </p:par>
+                        <p:par>
+                          <p:cTn id="8" fill="hold">
+                            <p:stCondLst>
+                              <p:cond delay="500"/>
+                            </p:stCondLst>
+                            <p:childTnLst>
+                              <p:par>
+                                <p:cTn id="9" presetID="22" presetClass="entr" presetSubtype="2" fill="hold" nodeType="afterEffect">
+                                  <p:stCondLst>
+                                    <p:cond delay="0"/>
+                                  </p:stCondLst>
+                                  <p:childTnLst>
+                                    <p:set>
+                                      <p:cBhvr>
+                                        <p:cTn id="10" dur="1" fill="hold">
+                                          <p:stCondLst>
+                                            <p:cond delay="0"/>
+                                          </p:stCondLst>
+                                        </p:cTn>
+                                        <p:tgtEl>
+                                          <p:spTgt spid="12"/>
+                                        </p:tgtEl>
+                                        <p:attrNameLst>
+                                          <p:attrName>style.visibility</p:attrName>
+                                        </p:attrNameLst>
+                                      </p:cBhvr>
+                                      <p:to>
+                                        <p:strVal val="visible"/>
+                                      </p:to>
+                                    </p:set>
+                                    <p:animEffect transition="in" filter="wipe(right)">
+                                      <p:cBhvr>
+                                        <p:cTn id="11" dur="500"/>
+                                        <p:tgtEl>
+                                          <p:spTgt spid="12"/>
+                                        </p:tgtEl>
+                                      </p:cBhvr>
+                                    </p:animEffect>
+                                  </p:childTnLst>
+                                </p:cTn>
+                              </p:par>
+                            </p:childTnLst>
+                          </p:cTn>
+                        </p:par>
+                        <p:par>
+                          <p:cTn id="12" fill="hold">
+                            <p:stCondLst>
+                              <p:cond delay="1000"/>
+                            </p:stCondLst>
+                            <p:childTnLst>
+                              <p:par>
+                                <p:cTn id="13" presetID="22" presetClass="entr" presetSubtype="2" fill="hold" grpId="0" nodeType="afterEffect">
+                                  <p:stCondLst>
+                                    <p:cond delay="0"/>
+                                  </p:stCondLst>
+                                  <p:childTnLst>
+                                    <p:set>
+                                      <p:cBhvr>
+                                        <p:cTn id="14" dur="1" fill="hold">
+                                          <p:stCondLst>
+                                            <p:cond delay="0"/>
+                                          </p:stCondLst>
+                                        </p:cTn>
+                                        <p:tgtEl>
+                                          <p:spTgt spid="10"/>
+                                        </p:tgtEl>
+                                        <p:attrNameLst>
+                                          <p:attrName>style.visibility</p:attrName>
+                                        </p:attrNameLst>
+                                      </p:cBhvr>
+                                      <p:to>
+                                        <p:strVal val="visible"/>
+                                      </p:to>
+                                    </p:set>
+                                    <p:animEffect transition="in" filter="wipe(right)">
+                                      <p:cBhvr>
+                                        <p:cTn id="15" dur="500"/>
+                                        <p:tgtEl>
+                                          <p:spTgt spid="10"/>
+                                        </p:tgtEl>
+                                      </p:cBhvr>
+                                    </p:animEffect>
+                                  </p:childTnLst>
+                                </p:cTn>
+                              </p:par>
+                            </p:childTnLst>
+                          </p:cTn>
+                        </p:par>
+                      </p:childTnLst>
+                    </p:cTn>
+                  </p:par>
+                </p:childTnLst>
+              </p:cTn>
+              <p:prevCondLst>
+                <p:cond evt="onPrev" delay="0">
+                  <p:tgtEl>
+                    <p:sldTgt/>
+                  </p:tgtEl>
+                </p:cond>
+              </p:prevCondLst>
+              <p:nextCondLst>
+                <p:cond evt="onNext" delay="0">
+                  <p:tgtEl>
+                    <p:sldTgt/>
+                  </p:tgtEl>
+                </p:cond>
+              </p:nextCondLst>
+            </p:seq>
+          </p:childTnLst>
+        </p:cTn>
+      </p:par>
+    </p:tnLst>
+    <p:bldLst>
+      <p:bldP spid="9" grpId="0" animBg="1"/>
+      <p:bldP spid="10" grpId="0" animBg="1"/>
+    </p:bldLst>
+  </p:timing>
 </p:sld>
 </file>
 
@@ -15918,6 +16639,36 @@
           </a:p>
         </p:txBody>
       </p:sp>
+      <p:pic>
+        <p:nvPicPr>
+          <p:cNvPr id="2" name="Picture 1" descr="A graph of different colored squares&#10;&#10;AI-generated content may be incorrect.">
+            <a:extLst>
+              <a:ext uri="{FF2B5EF4-FFF2-40B4-BE49-F238E27FC236}">
+                <a16:creationId xmlns:a16="http://schemas.microsoft.com/office/drawing/2014/main" id="{D1A15103-3347-24D0-BA1B-C23DD50964D1}"/>
+              </a:ext>
+            </a:extLst>
+          </p:cNvPr>
+          <p:cNvPicPr>
+            <a:picLocks noChangeAspect="1"/>
+          </p:cNvPicPr>
+          <p:nvPr/>
+        </p:nvPicPr>
+        <p:blipFill>
+          <a:blip r:embed="rId9"/>
+          <a:stretch>
+            <a:fillRect/>
+          </a:stretch>
+        </p:blipFill>
+        <p:spPr>
+          <a:xfrm>
+            <a:off x="9509292" y="1362125"/>
+            <a:ext cx="7548319" cy="3678265"/>
+          </a:xfrm>
+          <a:prstGeom prst="rect">
+            <a:avLst/>
+          </a:prstGeom>
+        </p:spPr>
+      </p:pic>
     </p:spTree>
     <p:extLst>
       <p:ext uri="{BB962C8B-B14F-4D97-AF65-F5344CB8AC3E}">
@@ -34047,14 +34798,6 @@
 </file>
 
 <file path=customXml/item1.xml><?xml version="1.0" encoding="utf-8"?>
-<p:properties xmlns:p="http://schemas.microsoft.com/office/2006/metadata/properties" xmlns:xsi="http://www.w3.org/2001/XMLSchema-instance" xmlns:pc="http://schemas.microsoft.com/office/infopath/2007/PartnerControls">
-  <documentManagement>
-    <_activity xmlns="2a430ece-bd3d-4b23-b4ad-a6fd4059b123" xsi:nil="true"/>
-  </documentManagement>
-</p:properties>
-</file>
-
-<file path=customXml/item2.xml><?xml version="1.0" encoding="utf-8"?>
 <ct:contentTypeSchema xmlns:ct="http://schemas.microsoft.com/office/2006/metadata/contentType" xmlns:ma="http://schemas.microsoft.com/office/2006/metadata/properties/metaAttributes" ct:_="" ma:_="" ma:contentTypeName="Document" ma:contentTypeID="0x0101005384DECEDC1AB345A42A165B6E66DDF2" ma:contentTypeVersion="5" ma:contentTypeDescription="Create a new document." ma:contentTypeScope="" ma:versionID="399a9e366c866d1ab7c3ed7d7c802c87">
   <xsd:schema xmlns:xsd="http://www.w3.org/2001/XMLSchema" xmlns:xs="http://www.w3.org/2001/XMLSchema" xmlns:p="http://schemas.microsoft.com/office/2006/metadata/properties" xmlns:ns3="2a430ece-bd3d-4b23-b4ad-a6fd4059b123" targetNamespace="http://schemas.microsoft.com/office/2006/metadata/properties" ma:root="true" ma:fieldsID="6875eea47f50b88d1cfa825fb8371b5a" ns3:_="">
     <xsd:import namespace="2a430ece-bd3d-4b23-b4ad-a6fd4059b123"/>
@@ -34204,6 +34947,14 @@
 </ct:contentTypeSchema>
 </file>
 
+<file path=customXml/item2.xml><?xml version="1.0" encoding="utf-8"?>
+<p:properties xmlns:p="http://schemas.microsoft.com/office/2006/metadata/properties" xmlns:xsi="http://www.w3.org/2001/XMLSchema-instance" xmlns:pc="http://schemas.microsoft.com/office/infopath/2007/PartnerControls">
+  <documentManagement>
+    <_activity xmlns="2a430ece-bd3d-4b23-b4ad-a6fd4059b123" xsi:nil="true"/>
+  </documentManagement>
+</p:properties>
+</file>
+
 <file path=customXml/item3.xml><?xml version="1.0" encoding="utf-8"?>
 <?mso-contentType ?>
 <FormTemplates xmlns="http://schemas.microsoft.com/sharepoint/v3/contenttype/forms">
@@ -34214,22 +34965,6 @@
 </file>
 
 <file path=customXml/itemProps1.xml><?xml version="1.0" encoding="utf-8"?>
-<ds:datastoreItem xmlns:ds="http://schemas.openxmlformats.org/officeDocument/2006/customXml" ds:itemID="{E7B3249A-4FFF-4BAF-9AE7-CD3AE4597344}">
-  <ds:schemaRefs>
-    <ds:schemaRef ds:uri="2a430ece-bd3d-4b23-b4ad-a6fd4059b123"/>
-    <ds:schemaRef ds:uri="http://purl.org/dc/dcmitype/"/>
-    <ds:schemaRef ds:uri="http://purl.org/dc/elements/1.1/"/>
-    <ds:schemaRef ds:uri="http://purl.org/dc/terms/"/>
-    <ds:schemaRef ds:uri="http://schemas.microsoft.com/office/2006/documentManagement/types"/>
-    <ds:schemaRef ds:uri="http://schemas.microsoft.com/office/2006/metadata/properties"/>
-    <ds:schemaRef ds:uri="http://schemas.microsoft.com/office/infopath/2007/PartnerControls"/>
-    <ds:schemaRef ds:uri="http://schemas.openxmlformats.org/package/2006/metadata/core-properties"/>
-    <ds:schemaRef ds:uri="http://www.w3.org/XML/1998/namespace"/>
-  </ds:schemaRefs>
-</ds:datastoreItem>
-</file>
-
-<file path=customXml/itemProps2.xml><?xml version="1.0" encoding="utf-8"?>
 <ds:datastoreItem xmlns:ds="http://schemas.openxmlformats.org/officeDocument/2006/customXml" ds:itemID="{D6881693-5C85-4499-BA8F-8B95FE56474F}">
   <ds:schemaRefs>
     <ds:schemaRef ds:uri="2a430ece-bd3d-4b23-b4ad-a6fd4059b123"/>
@@ -34247,6 +34982,22 @@
 </ds:datastoreItem>
 </file>
 
+<file path=customXml/itemProps2.xml><?xml version="1.0" encoding="utf-8"?>
+<ds:datastoreItem xmlns:ds="http://schemas.openxmlformats.org/officeDocument/2006/customXml" ds:itemID="{E7B3249A-4FFF-4BAF-9AE7-CD3AE4597344}">
+  <ds:schemaRefs>
+    <ds:schemaRef ds:uri="2a430ece-bd3d-4b23-b4ad-a6fd4059b123"/>
+    <ds:schemaRef ds:uri="http://purl.org/dc/dcmitype/"/>
+    <ds:schemaRef ds:uri="http://purl.org/dc/elements/1.1/"/>
+    <ds:schemaRef ds:uri="http://purl.org/dc/terms/"/>
+    <ds:schemaRef ds:uri="http://schemas.microsoft.com/office/2006/documentManagement/types"/>
+    <ds:schemaRef ds:uri="http://schemas.microsoft.com/office/2006/metadata/properties"/>
+    <ds:schemaRef ds:uri="http://schemas.microsoft.com/office/infopath/2007/PartnerControls"/>
+    <ds:schemaRef ds:uri="http://schemas.openxmlformats.org/package/2006/metadata/core-properties"/>
+    <ds:schemaRef ds:uri="http://www.w3.org/XML/1998/namespace"/>
+  </ds:schemaRefs>
+</ds:datastoreItem>
+</file>
+
 <file path=customXml/itemProps3.xml><?xml version="1.0" encoding="utf-8"?>
 <ds:datastoreItem xmlns:ds="http://schemas.openxmlformats.org/officeDocument/2006/customXml" ds:itemID="{F3177990-2FF3-4701-82BA-B3ECCF19FF1F}">
   <ds:schemaRefs>
